--- a/docs/pitch-decks/Akili-Product-Deck.pptx
+++ b/docs/pitch-decks/Akili-Product-Deck.pptx
@@ -20,9 +20,10 @@
     <p:sldId id="268" r:id="rId14"/>
     <p:sldId id="269" r:id="rId15"/>
     <p:sldId id="270" r:id="rId16"/>
+    <p:sldId id="271" r:id="rId17"/>
   </p:sldIdLst>
   <p:notesMasterIdLst>
-    <p:notesMasterId r:id="rId17"/>
+    <p:notesMasterId r:id="rId18"/>
   </p:notesMasterIdLst>
   <p:sldSz cx="9144000" cy="5143500"/>
   <p:notesSz cx="5143500" cy="9144000"/>
@@ -1068,6 +1069,94 @@
             <a:fld id="{F7021451-1387-4CA6-816F-3879F97B5CBC}" type="slidenum">
               <a:rPr lang="en-US"/>
               <a:t>15</a:t>
+            </a:fld>
+            <a:endParaRPr lang="en-US"/>
+          </a:p>
+        </p:txBody>
+      </p:sp>
+    </p:spTree>
+    <p:extLst>
+      <p:ext uri="{BB962C8B-B14F-4D97-AF65-F5344CB8AC3E}">
+        <p14:creationId xmlns:p14="http://schemas.microsoft.com/office/powerpoint/2010/main" val="1024086991"/>
+      </p:ext>
+    </p:extLst>
+  </p:cSld>
+  <p:clrMapOvr>
+    <a:masterClrMapping/>
+  </p:clrMapOvr>
+</p:notes>
+</file>
+
+<file path=ppt/notesSlides/notesSlide16.xml><?xml version="1.0" encoding="utf-8"?>
+<p:notes xmlns:a="http://schemas.openxmlformats.org/drawingml/2006/main" xmlns:r="http://schemas.openxmlformats.org/officeDocument/2006/relationships" xmlns:p="http://schemas.openxmlformats.org/presentationml/2006/main">
+  <p:cSld>
+    <p:spTree>
+      <p:nvGrpSpPr>
+        <p:cNvPr id="1" name=""/>
+        <p:cNvGrpSpPr/>
+        <p:nvPr/>
+      </p:nvGrpSpPr>
+      <p:grpSpPr>
+        <a:xfrm>
+          <a:off x="0" y="0"/>
+          <a:ext cx="0" cy="0"/>
+          <a:chOff x="0" y="0"/>
+          <a:chExt cx="0" cy="0"/>
+        </a:xfrm>
+      </p:grpSpPr>
+      <p:sp>
+        <p:nvSpPr>
+          <p:cNvPr id="2" name="Slide Image Placeholder 1"/>
+          <p:cNvSpPr>
+            <a:spLocks noGrp="1" noRot="1" noChangeAspect="1"/>
+          </p:cNvSpPr>
+          <p:nvPr>
+            <p:ph type="sldImg"/>
+          </p:nvPr>
+        </p:nvSpPr>
+        <p:spPr/>
+      </p:sp>
+      <p:sp>
+        <p:nvSpPr>
+          <p:cNvPr id="3" name="Notes Placeholder 2"/>
+          <p:cNvSpPr>
+            <a:spLocks noGrp="1"/>
+          </p:cNvSpPr>
+          <p:nvPr>
+            <p:ph type="body" idx="1"/>
+          </p:nvPr>
+        </p:nvSpPr>
+        <p:spPr/>
+        <p:txBody>
+          <a:bodyPr/>
+          <a:lstStyle/>
+          <a:p>
+            <a:r>
+              <a:rPr lang="en-US" dirty="0"/>
+              <a:t/>
+            </a:r>
+            <a:endParaRPr lang="en-US" dirty="0"/>
+          </a:p>
+        </p:txBody>
+      </p:sp>
+      <p:sp>
+        <p:nvSpPr>
+          <p:cNvPr id="4" name="Slide Number Placeholder 3"/>
+          <p:cNvSpPr>
+            <a:spLocks noGrp="1"/>
+          </p:cNvSpPr>
+          <p:nvPr>
+            <p:ph type="sldNum" sz="quarter" idx="10"/>
+          </p:nvPr>
+        </p:nvSpPr>
+        <p:spPr/>
+        <p:txBody>
+          <a:bodyPr/>
+          <a:lstStyle/>
+          <a:p>
+            <a:fld id="{F7021451-1387-4CA6-816F-3879F97B5CBC}" type="slidenum">
+              <a:rPr lang="en-US"/>
+              <a:t>16</a:t>
             </a:fld>
             <a:endParaRPr lang="en-US"/>
           </a:p>
@@ -2242,7 +2331,7 @@
                 <a:ea typeface="Calibri" pitchFamily="34" charset="-122"/>
                 <a:cs typeface="Calibri" pitchFamily="34" charset="-120"/>
               </a:rPr>
-              <a:t>10-pillar family risk framework · live in production</a:t>
+              <a:t>Governance intelligence · 10 pillars · live in production</a:t>
             </a:r>
             <a:endParaRPr lang="en-US" sz="1400" dirty="0"/>
           </a:p>
@@ -2490,7 +2579,7 @@
                 <a:ea typeface="Calibri Light" pitchFamily="34" charset="-122"/>
                 <a:cs typeface="Calibri Light" pitchFamily="34" charset="-120"/>
               </a:rPr>
-              <a:t>Built for Trust</a:t>
+              <a:t>Intelligence &amp; Deliverables</a:t>
             </a:r>
             <a:endParaRPr lang="en-US" sz="2800" dirty="0"/>
           </a:p>
@@ -2584,9 +2673,366 @@
           </a:p>
         </p:txBody>
       </p:sp>
+      <p:sp>
+        <p:nvSpPr>
+          <p:cNvPr id="8" name="Text 5"/>
+          <p:cNvSpPr/>
+          <p:nvPr/>
+        </p:nvSpPr>
+        <p:spPr>
+          <a:xfrm>
+            <a:off x="502920" y="1508760"/>
+            <a:ext cx="8138160" cy="3520440"/>
+          </a:xfrm>
+          <a:prstGeom prst="rect">
+            <a:avLst/>
+          </a:prstGeom>
+          <a:noFill/>
+          <a:ln/>
+        </p:spPr>
+        <p:txBody>
+          <a:bodyPr wrap="square" rtlCol="0" anchor="t"/>
+          <a:lstStyle/>
+          <a:p>
+            <a:pPr marL="342900" indent="-342900">
+              <a:spcAft>
+                <a:spcPts val="800"/>
+              </a:spcAft>
+              <a:buSzPct val="100000"/>
+              <a:buChar char="•"/>
+            </a:pPr>
+            <a:r>
+              <a:rPr lang="en-US" sz="1500" dirty="0">
+                <a:solidFill>
+                  <a:srgbClr val="1E293B"/>
+                </a:solidFill>
+                <a:latin typeface="Calibri" pitchFamily="34" charset="0"/>
+                <a:ea typeface="Calibri" pitchFamily="34" charset="-122"/>
+                <a:cs typeface="Calibri" pitchFamily="34" charset="-120"/>
+              </a:rPr>
+              <a:t>Composite risk score (0–10) across all 10 pillars</a:t>
+            </a:r>
+            <a:endParaRPr lang="en-US" sz="1500" dirty="0"/>
+          </a:p>
+          <a:p>
+            <a:pPr marL="342900" indent="-342900">
+              <a:spcAft>
+                <a:spcPts val="800"/>
+              </a:spcAft>
+              <a:buSzPct val="100000"/>
+              <a:buChar char="•"/>
+            </a:pPr>
+            <a:r>
+              <a:rPr lang="en-US" sz="1500" dirty="0">
+                <a:solidFill>
+                  <a:srgbClr val="1E293B"/>
+                </a:solidFill>
+                <a:latin typeface="Calibri" pitchFamily="34" charset="0"/>
+                <a:ea typeface="Calibri" pitchFamily="34" charset="-122"/>
+                <a:cs typeface="Calibri" pitchFamily="34" charset="-120"/>
+              </a:rPr>
+              <a:t>Risk heat map with trend tracking</a:t>
+            </a:r>
+            <a:endParaRPr lang="en-US" sz="1500" dirty="0"/>
+          </a:p>
+          <a:p>
+            <a:pPr marL="342900" indent="-342900">
+              <a:spcAft>
+                <a:spcPts val="800"/>
+              </a:spcAft>
+              <a:buSzPct val="100000"/>
+              <a:buChar char="•"/>
+            </a:pPr>
+            <a:r>
+              <a:rPr lang="en-US" sz="1500" dirty="0">
+                <a:solidFill>
+                  <a:srgbClr val="1E293B"/>
+                </a:solidFill>
+                <a:latin typeface="Calibri" pitchFamily="34" charset="0"/>
+                <a:ea typeface="Calibri" pitchFamily="34" charset="-122"/>
+                <a:cs typeface="Calibri" pitchFamily="34" charset="-120"/>
+              </a:rPr>
+              <a:t>Missing controls ranked by severity</a:t>
+            </a:r>
+            <a:endParaRPr lang="en-US" sz="1500" dirty="0"/>
+          </a:p>
+          <a:p>
+            <a:pPr marL="342900" indent="-342900">
+              <a:spcAft>
+                <a:spcPts val="800"/>
+              </a:spcAft>
+              <a:buSzPct val="100000"/>
+              <a:buChar char="•"/>
+            </a:pPr>
+            <a:r>
+              <a:rPr lang="en-US" sz="1500" dirty="0">
+                <a:solidFill>
+                  <a:srgbClr val="1E293B"/>
+                </a:solidFill>
+                <a:latin typeface="Calibri" pitchFamily="34" charset="0"/>
+                <a:ea typeface="Calibri" pitchFamily="34" charset="-122"/>
+                <a:cs typeface="Calibri" pitchFamily="34" charset="-120"/>
+              </a:rPr>
+              <a:t>Automated recommendations mapped to services</a:t>
+            </a:r>
+            <a:endParaRPr lang="en-US" sz="1500" dirty="0"/>
+          </a:p>
+          <a:p>
+            <a:pPr marL="342900" indent="-342900">
+              <a:spcAft>
+                <a:spcPts val="800"/>
+              </a:spcAft>
+              <a:buSzPct val="100000"/>
+              <a:buChar char="•"/>
+            </a:pPr>
+            <a:r>
+              <a:rPr lang="en-US" sz="1500" dirty="0">
+                <a:solidFill>
+                  <a:srgbClr val="1E293B"/>
+                </a:solidFill>
+                <a:latin typeface="Calibri" pitchFamily="34" charset="0"/>
+                <a:ea typeface="Calibri" pitchFamily="34" charset="-122"/>
+                <a:cs typeface="Calibri" pitchFamily="34" charset="-120"/>
+              </a:rPr>
+              <a:t>Policy templates &amp; branded PDF reports</a:t>
+            </a:r>
+            <a:endParaRPr lang="en-US" sz="1500" dirty="0"/>
+          </a:p>
+          <a:p>
+            <a:pPr marL="342900" indent="-342900">
+              <a:spcAft>
+                <a:spcPts val="800"/>
+              </a:spcAft>
+              <a:buSzPct val="100000"/>
+              <a:buChar char="•"/>
+            </a:pPr>
+            <a:r>
+              <a:rPr lang="en-US" sz="1500" dirty="0">
+                <a:solidFill>
+                  <a:srgbClr val="1E293B"/>
+                </a:solidFill>
+                <a:latin typeface="Calibri" pitchFamily="34" charset="0"/>
+                <a:ea typeface="Calibri" pitchFamily="34" charset="-122"/>
+                <a:cs typeface="Calibri" pitchFamily="34" charset="-120"/>
+              </a:rPr>
+              <a:t>AI-assisted intake: audio + transcription</a:t>
+            </a:r>
+            <a:endParaRPr lang="en-US" sz="1500" dirty="0"/>
+          </a:p>
+        </p:txBody>
+      </p:sp>
+    </p:spTree>
+  </p:cSld>
+  <p:clrMapOvr>
+    <a:masterClrMapping/>
+  </p:clrMapOvr>
+</p:sld>
+</file>
+
+<file path=ppt/slides/slide11.xml><?xml version="1.0" encoding="utf-8"?>
+<p:sld xmlns:a="http://schemas.openxmlformats.org/drawingml/2006/main" xmlns:r="http://schemas.openxmlformats.org/officeDocument/2006/relationships" xmlns:p="http://schemas.openxmlformats.org/presentationml/2006/main">
+  <p:cSld name="Slide 11">
+    <p:bg>
+      <p:bgPr>
+        <a:solidFill>
+          <a:srgbClr val="FFFFFF"/>
+        </a:solidFill>
+      </p:bgPr>
+    </p:bg>
+    <p:spTree>
+      <p:nvGrpSpPr>
+        <p:cNvPr id="1" name=""/>
+        <p:cNvGrpSpPr/>
+        <p:nvPr/>
+      </p:nvGrpSpPr>
+      <p:grpSpPr>
+        <a:xfrm>
+          <a:off x="0" y="0"/>
+          <a:ext cx="0" cy="0"/>
+          <a:chOff x="0" y="0"/>
+          <a:chExt cx="0" cy="0"/>
+        </a:xfrm>
+      </p:grpSpPr>
+      <p:sp>
+        <p:nvSpPr>
+          <p:cNvPr id="2" name="Shape 0"/>
+          <p:cNvSpPr/>
+          <p:nvPr/>
+        </p:nvSpPr>
+        <p:spPr>
+          <a:xfrm>
+            <a:off x="0" y="0"/>
+            <a:ext cx="9144000" cy="73152"/>
+          </a:xfrm>
+          <a:prstGeom prst="rect">
+            <a:avLst/>
+          </a:prstGeom>
+          <a:solidFill>
+            <a:srgbClr val="4EA5D9"/>
+          </a:solidFill>
+          <a:ln w="12700">
+            <a:solidFill>
+              <a:srgbClr val="4EA5D9"/>
+            </a:solidFill>
+            <a:prstDash val="solid"/>
+          </a:ln>
+        </p:spPr>
+      </p:sp>
+      <p:sp>
+        <p:nvSpPr>
+          <p:cNvPr id="3" name="Shape 1"/>
+          <p:cNvSpPr/>
+          <p:nvPr/>
+        </p:nvSpPr>
+        <p:spPr>
+          <a:xfrm>
+            <a:off x="320040" y="502920"/>
+            <a:ext cx="54864" cy="502920"/>
+          </a:xfrm>
+          <a:prstGeom prst="rect">
+            <a:avLst/>
+          </a:prstGeom>
+          <a:solidFill>
+            <a:srgbClr val="D97706"/>
+          </a:solidFill>
+          <a:ln w="12700">
+            <a:solidFill>
+              <a:srgbClr val="D97706"/>
+            </a:solidFill>
+            <a:prstDash val="solid"/>
+          </a:ln>
+        </p:spPr>
+      </p:sp>
+      <p:sp>
+        <p:nvSpPr>
+          <p:cNvPr id="4" name="Text 2"/>
+          <p:cNvSpPr/>
+          <p:nvPr/>
+        </p:nvSpPr>
+        <p:spPr>
+          <a:xfrm>
+            <a:off x="502920" y="411480"/>
+            <a:ext cx="8138160" cy="685800"/>
+          </a:xfrm>
+          <a:prstGeom prst="rect">
+            <a:avLst/>
+          </a:prstGeom>
+          <a:noFill/>
+          <a:ln/>
+        </p:spPr>
+        <p:txBody>
+          <a:bodyPr wrap="square" rtlCol="0" anchor="t"/>
+          <a:lstStyle/>
+          <a:p>
+            <a:pPr indent="0" marL="0">
+              <a:buNone/>
+            </a:pPr>
+            <a:r>
+              <a:rPr lang="en-US" sz="2800" b="1" dirty="0">
+                <a:solidFill>
+                  <a:srgbClr val="1E293B"/>
+                </a:solidFill>
+                <a:latin typeface="Calibri Light" pitchFamily="34" charset="0"/>
+                <a:ea typeface="Calibri Light" pitchFamily="34" charset="-122"/>
+                <a:cs typeface="Calibri Light" pitchFamily="34" charset="-120"/>
+              </a:rPr>
+              <a:t>Built for Trust</a:t>
+            </a:r>
+            <a:endParaRPr lang="en-US" sz="2800" dirty="0"/>
+          </a:p>
+        </p:txBody>
+      </p:sp>
+      <p:sp>
+        <p:nvSpPr>
+          <p:cNvPr id="5" name="Shape 3"/>
+          <p:cNvSpPr/>
+          <p:nvPr/>
+        </p:nvSpPr>
+        <p:spPr>
+          <a:xfrm>
+            <a:off x="0" y="4709160"/>
+            <a:ext cx="9144000" cy="320040"/>
+          </a:xfrm>
+          <a:prstGeom prst="rect">
+            <a:avLst/>
+          </a:prstGeom>
+          <a:solidFill>
+            <a:srgbClr val="F8FAFC"/>
+          </a:solidFill>
+          <a:ln w="12700">
+            <a:solidFill>
+              <a:srgbClr val="F8FAFC"/>
+            </a:solidFill>
+            <a:prstDash val="solid"/>
+          </a:ln>
+        </p:spPr>
+      </p:sp>
+      <p:pic>
+        <p:nvPicPr>
+          <p:cNvPr id="6" name="Image 0" descr="/Users/bwoodtalton/Projects/AkiliRisk/logo/akili-horizontal-compact.png">    </p:cNvPr>
+          <p:cNvPicPr>
+            <a:picLocks noChangeAspect="1"/>
+          </p:cNvPicPr>
+          <p:nvPr/>
+        </p:nvPicPr>
+        <p:blipFill>
+          <a:blip r:embed="rId1"/>
+          <a:stretch>
+            <a:fillRect/>
+          </a:stretch>
+        </p:blipFill>
+        <p:spPr>
+          <a:xfrm>
+            <a:off x="320040" y="4754880"/>
+            <a:ext cx="1234440" cy="256032"/>
+          </a:xfrm>
+          <a:prstGeom prst="rect">
+            <a:avLst/>
+          </a:prstGeom>
+        </p:spPr>
+      </p:pic>
+      <p:sp>
+        <p:nvSpPr>
+          <p:cNvPr id="7" name="Text 4"/>
+          <p:cNvSpPr/>
+          <p:nvPr/>
+        </p:nvSpPr>
+        <p:spPr>
+          <a:xfrm>
+            <a:off x="7498080" y="4773168"/>
+            <a:ext cx="1280160" cy="228600"/>
+          </a:xfrm>
+          <a:prstGeom prst="rect">
+            <a:avLst/>
+          </a:prstGeom>
+          <a:noFill/>
+          <a:ln/>
+        </p:spPr>
+        <p:txBody>
+          <a:bodyPr wrap="square" rtlCol="0" anchor="ctr"/>
+          <a:lstStyle/>
+          <a:p>
+            <a:pPr algn="r" indent="0" marL="0">
+              <a:buNone/>
+            </a:pPr>
+            <a:r>
+              <a:rPr lang="en-US" sz="900" dirty="0">
+                <a:solidFill>
+                  <a:srgbClr val="64748B"/>
+                </a:solidFill>
+                <a:latin typeface="Calibri" pitchFamily="34" charset="0"/>
+                <a:ea typeface="Calibri" pitchFamily="34" charset="-122"/>
+                <a:cs typeface="Calibri" pitchFamily="34" charset="-120"/>
+              </a:rPr>
+              <a:t>akilirisk.com</a:t>
+            </a:r>
+            <a:endParaRPr lang="en-US" sz="900" dirty="0"/>
+          </a:p>
+        </p:txBody>
+      </p:sp>
       <p:graphicFrame>
         <p:nvGraphicFramePr>
-          <p:cNvPr id="11" name="Table 0"/>
+          <p:cNvPr id="12" name="Table 0"/>
           <p:cNvGraphicFramePr>
             <a:graphicFrameLocks noGrp="1"/>
           </p:cNvGraphicFramePr>
@@ -3110,7 +3556,7 @@
                           <a:ea typeface="Calibri" pitchFamily="34" charset="-122"/>
                           <a:cs typeface="Calibri" pitchFamily="34" charset="-120"/>
                         </a:rPr>
-                        <a:t>Row-level data isolation; advisor–client enforcement</a:t>
+                        <a:t>Row-level data isolation; firm–client enforcement</a:t>
                       </a:r>
                       <a:endParaRPr lang="en-US" sz="1000" dirty="0">
                         <a:latin typeface="Calibri" charset="0"/>
@@ -3312,9 +3758,9 @@
 </p:sld>
 </file>
 
-<file path=ppt/slides/slide11.xml><?xml version="1.0" encoding="utf-8"?>
+<file path=ppt/slides/slide12.xml><?xml version="1.0" encoding="utf-8"?>
 <p:sld xmlns:a="http://schemas.openxmlformats.org/drawingml/2006/main" xmlns:r="http://schemas.openxmlformats.org/officeDocument/2006/relationships" xmlns:p="http://schemas.openxmlformats.org/presentationml/2006/main">
-  <p:cSld name="Slide 11">
+  <p:cSld name="Slide 12">
     <p:bg>
       <p:bgPr>
         <a:solidFill>
@@ -3515,7 +3961,7 @@
       </p:sp>
       <p:graphicFrame>
         <p:nvGraphicFramePr>
-          <p:cNvPr id="12" name="Table 0"/>
+          <p:cNvPr id="13" name="Table 0"/>
           <p:cNvGraphicFramePr>
             <a:graphicFrameLocks noGrp="1"/>
           </p:cNvGraphicFramePr>
@@ -3763,7 +4209,7 @@
                           <a:ea typeface="Calibri" pitchFamily="34" charset="-122"/>
                           <a:cs typeface="Calibri" pitchFamily="34" charset="-120"/>
                         </a:rPr>
-                        <a:t>Governance alongside financial planning</a:t>
+                        <a:t>Governance intelligence alongside financial planning</a:t>
                       </a:r>
                       <a:endParaRPr lang="en-US" sz="1000" dirty="0">
                         <a:latin typeface="Calibri" charset="0"/>
@@ -3833,7 +4279,283 @@
                           <a:ea typeface="Calibri" pitchFamily="34" charset="-122"/>
                           <a:cs typeface="Calibri" pitchFamily="34" charset="-120"/>
                         </a:rPr>
-                        <a:t>Multi-family offices</a:t>
+                        <a:t>CPAs &amp; tax advisory firms</a:t>
+                      </a:r>
+                      <a:endParaRPr lang="en-US" sz="1000" dirty="0">
+                        <a:latin typeface="Calibri" charset="0"/>
+                        <a:ea typeface="Calibri" charset="0"/>
+                        <a:cs typeface="Calibri" charset="0"/>
+                      </a:endParaRPr>
+                    </a:p>
+                  </a:txBody>
+                  <a:tcPr marL="91440" marR="91440" marT="45720" marB="45720" anchor="t">
+                    <a:lnL w="6350" cap="flat" cmpd="sng" algn="ctr">
+                      <a:solidFill>
+                        <a:srgbClr val="E2E8F0"/>
+                      </a:solidFill>
+                      <a:prstDash val="solid"/>
+                      <a:round/>
+                      <a:headEnd type="none" w="med" len="med"/>
+                      <a:tailEnd type="none" w="med" len="med"/>
+                    </a:lnL>
+                    <a:lnR w="6350" cap="flat" cmpd="sng" algn="ctr">
+                      <a:solidFill>
+                        <a:srgbClr val="E2E8F0"/>
+                      </a:solidFill>
+                      <a:prstDash val="solid"/>
+                      <a:round/>
+                      <a:headEnd type="none" w="med" len="med"/>
+                      <a:tailEnd type="none" w="med" len="med"/>
+                    </a:lnR>
+                    <a:lnT w="6350" cap="flat" cmpd="sng" algn="ctr">
+                      <a:solidFill>
+                        <a:srgbClr val="E2E8F0"/>
+                      </a:solidFill>
+                      <a:prstDash val="solid"/>
+                      <a:round/>
+                      <a:headEnd type="none" w="med" len="med"/>
+                      <a:tailEnd type="none" w="med" len="med"/>
+                    </a:lnT>
+                    <a:lnB w="6350" cap="flat" cmpd="sng" algn="ctr">
+                      <a:solidFill>
+                        <a:srgbClr val="E2E8F0"/>
+                      </a:solidFill>
+                      <a:prstDash val="solid"/>
+                      <a:round/>
+                      <a:headEnd type="none" w="med" len="med"/>
+                      <a:tailEnd type="none" w="med" len="med"/>
+                    </a:lnB>
+                    <a:solidFill>
+                      <a:srgbClr val="FFFFFF"/>
+                    </a:solidFill>
+                  </a:tcPr>
+                </a:tc>
+                <a:tc>
+                  <a:txBody>
+                    <a:bodyPr/>
+                    <a:lstStyle/>
+                    <a:p>
+                      <a:pPr indent="0" marL="0">
+                        <a:buNone/>
+                      </a:pPr>
+                      <a:r>
+                        <a:rPr lang="en-US" sz="1000" dirty="0">
+                          <a:solidFill>
+                            <a:srgbClr val="1E293B"/>
+                          </a:solidFill>
+                          <a:latin typeface="Calibri" pitchFamily="34" charset="0"/>
+                          <a:ea typeface="Calibri" pitchFamily="34" charset="-122"/>
+                          <a:cs typeface="Calibri" pitchFamily="34" charset="-120"/>
+                        </a:rPr>
+                        <a:t>Tax, liquidity, and continuity visibility</a:t>
+                      </a:r>
+                      <a:endParaRPr lang="en-US" sz="1000" dirty="0">
+                        <a:latin typeface="Calibri" charset="0"/>
+                        <a:ea typeface="Calibri" charset="0"/>
+                        <a:cs typeface="Calibri" charset="0"/>
+                      </a:endParaRPr>
+                    </a:p>
+                  </a:txBody>
+                  <a:tcPr marL="91440" marR="91440" marT="45720" marB="45720" anchor="t">
+                    <a:lnL w="6350" cap="flat" cmpd="sng" algn="ctr">
+                      <a:solidFill>
+                        <a:srgbClr val="E2E8F0"/>
+                      </a:solidFill>
+                      <a:prstDash val="solid"/>
+                      <a:round/>
+                      <a:headEnd type="none" w="med" len="med"/>
+                      <a:tailEnd type="none" w="med" len="med"/>
+                    </a:lnL>
+                    <a:lnR w="6350" cap="flat" cmpd="sng" algn="ctr">
+                      <a:solidFill>
+                        <a:srgbClr val="E2E8F0"/>
+                      </a:solidFill>
+                      <a:prstDash val="solid"/>
+                      <a:round/>
+                      <a:headEnd type="none" w="med" len="med"/>
+                      <a:tailEnd type="none" w="med" len="med"/>
+                    </a:lnR>
+                    <a:lnT w="6350" cap="flat" cmpd="sng" algn="ctr">
+                      <a:solidFill>
+                        <a:srgbClr val="E2E8F0"/>
+                      </a:solidFill>
+                      <a:prstDash val="solid"/>
+                      <a:round/>
+                      <a:headEnd type="none" w="med" len="med"/>
+                      <a:tailEnd type="none" w="med" len="med"/>
+                    </a:lnT>
+                    <a:lnB w="6350" cap="flat" cmpd="sng" algn="ctr">
+                      <a:solidFill>
+                        <a:srgbClr val="E2E8F0"/>
+                      </a:solidFill>
+                      <a:prstDash val="solid"/>
+                      <a:round/>
+                      <a:headEnd type="none" w="med" len="med"/>
+                      <a:tailEnd type="none" w="med" len="med"/>
+                    </a:lnB>
+                    <a:solidFill>
+                      <a:srgbClr val="FFFFFF"/>
+                    </a:solidFill>
+                  </a:tcPr>
+                </a:tc>
+              </a:tr>
+              <a:tr h="0">
+                <a:tc>
+                  <a:txBody>
+                    <a:bodyPr/>
+                    <a:lstStyle/>
+                    <a:p>
+                      <a:pPr indent="0" marL="0">
+                        <a:buNone/>
+                      </a:pPr>
+                      <a:r>
+                        <a:rPr lang="en-US" sz="1000" dirty="0">
+                          <a:solidFill>
+                            <a:srgbClr val="1E293B"/>
+                          </a:solidFill>
+                          <a:latin typeface="Calibri" pitchFamily="34" charset="0"/>
+                          <a:ea typeface="Calibri" pitchFamily="34" charset="-122"/>
+                          <a:cs typeface="Calibri" pitchFamily="34" charset="-120"/>
+                        </a:rPr>
+                        <a:t>Estate attorneys &amp; succession planners</a:t>
+                      </a:r>
+                      <a:endParaRPr lang="en-US" sz="1000" dirty="0">
+                        <a:latin typeface="Calibri" charset="0"/>
+                        <a:ea typeface="Calibri" charset="0"/>
+                        <a:cs typeface="Calibri" charset="0"/>
+                      </a:endParaRPr>
+                    </a:p>
+                  </a:txBody>
+                  <a:tcPr marL="91440" marR="91440" marT="45720" marB="45720" anchor="t">
+                    <a:lnL w="6350" cap="flat" cmpd="sng" algn="ctr">
+                      <a:solidFill>
+                        <a:srgbClr val="E2E8F0"/>
+                      </a:solidFill>
+                      <a:prstDash val="solid"/>
+                      <a:round/>
+                      <a:headEnd type="none" w="med" len="med"/>
+                      <a:tailEnd type="none" w="med" len="med"/>
+                    </a:lnL>
+                    <a:lnR w="6350" cap="flat" cmpd="sng" algn="ctr">
+                      <a:solidFill>
+                        <a:srgbClr val="E2E8F0"/>
+                      </a:solidFill>
+                      <a:prstDash val="solid"/>
+                      <a:round/>
+                      <a:headEnd type="none" w="med" len="med"/>
+                      <a:tailEnd type="none" w="med" len="med"/>
+                    </a:lnR>
+                    <a:lnT w="6350" cap="flat" cmpd="sng" algn="ctr">
+                      <a:solidFill>
+                        <a:srgbClr val="E2E8F0"/>
+                      </a:solidFill>
+                      <a:prstDash val="solid"/>
+                      <a:round/>
+                      <a:headEnd type="none" w="med" len="med"/>
+                      <a:tailEnd type="none" w="med" len="med"/>
+                    </a:lnT>
+                    <a:lnB w="6350" cap="flat" cmpd="sng" algn="ctr">
+                      <a:solidFill>
+                        <a:srgbClr val="E2E8F0"/>
+                      </a:solidFill>
+                      <a:prstDash val="solid"/>
+                      <a:round/>
+                      <a:headEnd type="none" w="med" len="med"/>
+                      <a:tailEnd type="none" w="med" len="med"/>
+                    </a:lnB>
+                    <a:solidFill>
+                      <a:srgbClr val="F8FAFC"/>
+                    </a:solidFill>
+                  </a:tcPr>
+                </a:tc>
+                <a:tc>
+                  <a:txBody>
+                    <a:bodyPr/>
+                    <a:lstStyle/>
+                    <a:p>
+                      <a:pPr indent="0" marL="0">
+                        <a:buNone/>
+                      </a:pPr>
+                      <a:r>
+                        <a:rPr lang="en-US" sz="1000" dirty="0">
+                          <a:solidFill>
+                            <a:srgbClr val="1E293B"/>
+                          </a:solidFill>
+                          <a:latin typeface="Calibri" pitchFamily="34" charset="0"/>
+                          <a:ea typeface="Calibri" pitchFamily="34" charset="-122"/>
+                          <a:cs typeface="Calibri" pitchFamily="34" charset="-120"/>
+                        </a:rPr>
+                        <a:t>Evidence-based governance assessment</a:t>
+                      </a:r>
+                      <a:endParaRPr lang="en-US" sz="1000" dirty="0">
+                        <a:latin typeface="Calibri" charset="0"/>
+                        <a:ea typeface="Calibri" charset="0"/>
+                        <a:cs typeface="Calibri" charset="0"/>
+                      </a:endParaRPr>
+                    </a:p>
+                  </a:txBody>
+                  <a:tcPr marL="91440" marR="91440" marT="45720" marB="45720" anchor="t">
+                    <a:lnL w="6350" cap="flat" cmpd="sng" algn="ctr">
+                      <a:solidFill>
+                        <a:srgbClr val="E2E8F0"/>
+                      </a:solidFill>
+                      <a:prstDash val="solid"/>
+                      <a:round/>
+                      <a:headEnd type="none" w="med" len="med"/>
+                      <a:tailEnd type="none" w="med" len="med"/>
+                    </a:lnL>
+                    <a:lnR w="6350" cap="flat" cmpd="sng" algn="ctr">
+                      <a:solidFill>
+                        <a:srgbClr val="E2E8F0"/>
+                      </a:solidFill>
+                      <a:prstDash val="solid"/>
+                      <a:round/>
+                      <a:headEnd type="none" w="med" len="med"/>
+                      <a:tailEnd type="none" w="med" len="med"/>
+                    </a:lnR>
+                    <a:lnT w="6350" cap="flat" cmpd="sng" algn="ctr">
+                      <a:solidFill>
+                        <a:srgbClr val="E2E8F0"/>
+                      </a:solidFill>
+                      <a:prstDash val="solid"/>
+                      <a:round/>
+                      <a:headEnd type="none" w="med" len="med"/>
+                      <a:tailEnd type="none" w="med" len="med"/>
+                    </a:lnT>
+                    <a:lnB w="6350" cap="flat" cmpd="sng" algn="ctr">
+                      <a:solidFill>
+                        <a:srgbClr val="E2E8F0"/>
+                      </a:solidFill>
+                      <a:prstDash val="solid"/>
+                      <a:round/>
+                      <a:headEnd type="none" w="med" len="med"/>
+                      <a:tailEnd type="none" w="med" len="med"/>
+                    </a:lnB>
+                    <a:solidFill>
+                      <a:srgbClr val="F8FAFC"/>
+                    </a:solidFill>
+                  </a:tcPr>
+                </a:tc>
+              </a:tr>
+              <a:tr h="0">
+                <a:tc>
+                  <a:txBody>
+                    <a:bodyPr/>
+                    <a:lstStyle/>
+                    <a:p>
+                      <a:pPr indent="0" marL="0">
+                        <a:buNone/>
+                      </a:pPr>
+                      <a:r>
+                        <a:rPr lang="en-US" sz="1000" dirty="0">
+                          <a:solidFill>
+                            <a:srgbClr val="1E293B"/>
+                          </a:solidFill>
+                          <a:latin typeface="Calibri" pitchFamily="34" charset="0"/>
+                          <a:ea typeface="Calibri" pitchFamily="34" charset="-122"/>
+                          <a:cs typeface="Calibri" pitchFamily="34" charset="-120"/>
+                        </a:rPr>
+                        <a:t>Family offices &amp; MFOs</a:t>
                       </a:r>
                       <a:endParaRPr lang="en-US" sz="1000" dirty="0">
                         <a:latin typeface="Calibri" charset="0"/>
@@ -3971,7 +4693,7 @@
                           <a:ea typeface="Calibri" pitchFamily="34" charset="-122"/>
                           <a:cs typeface="Calibri" pitchFamily="34" charset="-120"/>
                         </a:rPr>
-                        <a:t>Family leadership</a:t>
+                        <a:t>Enterprise professional firms</a:t>
                       </a:r>
                       <a:endParaRPr lang="en-US" sz="1000" dirty="0">
                         <a:latin typeface="Calibri" charset="0"/>
@@ -4019,144 +4741,6 @@
                     </a:lnB>
                     <a:solidFill>
                       <a:srgbClr val="F8FAFC"/>
-                    </a:solidFill>
-                  </a:tcPr>
-                </a:tc>
-                <a:tc>
-                  <a:txBody>
-                    <a:bodyPr/>
-                    <a:lstStyle/>
-                    <a:p>
-                      <a:pPr indent="0" marL="0">
-                        <a:buNone/>
-                      </a:pPr>
-                      <a:r>
-                        <a:rPr lang="en-US" sz="1000" dirty="0">
-                          <a:solidFill>
-                            <a:srgbClr val="1E293B"/>
-                          </a:solidFill>
-                          <a:latin typeface="Calibri" pitchFamily="34" charset="0"/>
-                          <a:ea typeface="Calibri" pitchFamily="34" charset="-122"/>
-                          <a:cs typeface="Calibri" pitchFamily="34" charset="-120"/>
-                        </a:rPr>
-                        <a:t>Succession readiness &amp; decision frameworks</a:t>
-                      </a:r>
-                      <a:endParaRPr lang="en-US" sz="1000" dirty="0">
-                        <a:latin typeface="Calibri" charset="0"/>
-                        <a:ea typeface="Calibri" charset="0"/>
-                        <a:cs typeface="Calibri" charset="0"/>
-                      </a:endParaRPr>
-                    </a:p>
-                  </a:txBody>
-                  <a:tcPr marL="91440" marR="91440" marT="45720" marB="45720" anchor="t">
-                    <a:lnL w="6350" cap="flat" cmpd="sng" algn="ctr">
-                      <a:solidFill>
-                        <a:srgbClr val="E2E8F0"/>
-                      </a:solidFill>
-                      <a:prstDash val="solid"/>
-                      <a:round/>
-                      <a:headEnd type="none" w="med" len="med"/>
-                      <a:tailEnd type="none" w="med" len="med"/>
-                    </a:lnL>
-                    <a:lnR w="6350" cap="flat" cmpd="sng" algn="ctr">
-                      <a:solidFill>
-                        <a:srgbClr val="E2E8F0"/>
-                      </a:solidFill>
-                      <a:prstDash val="solid"/>
-                      <a:round/>
-                      <a:headEnd type="none" w="med" len="med"/>
-                      <a:tailEnd type="none" w="med" len="med"/>
-                    </a:lnR>
-                    <a:lnT w="6350" cap="flat" cmpd="sng" algn="ctr">
-                      <a:solidFill>
-                        <a:srgbClr val="E2E8F0"/>
-                      </a:solidFill>
-                      <a:prstDash val="solid"/>
-                      <a:round/>
-                      <a:headEnd type="none" w="med" len="med"/>
-                      <a:tailEnd type="none" w="med" len="med"/>
-                    </a:lnT>
-                    <a:lnB w="6350" cap="flat" cmpd="sng" algn="ctr">
-                      <a:solidFill>
-                        <a:srgbClr val="E2E8F0"/>
-                      </a:solidFill>
-                      <a:prstDash val="solid"/>
-                      <a:round/>
-                      <a:headEnd type="none" w="med" len="med"/>
-                      <a:tailEnd type="none" w="med" len="med"/>
-                    </a:lnB>
-                    <a:solidFill>
-                      <a:srgbClr val="F8FAFC"/>
-                    </a:solidFill>
-                  </a:tcPr>
-                </a:tc>
-              </a:tr>
-              <a:tr h="0">
-                <a:tc>
-                  <a:txBody>
-                    <a:bodyPr/>
-                    <a:lstStyle/>
-                    <a:p>
-                      <a:pPr indent="0" marL="0">
-                        <a:buNone/>
-                      </a:pPr>
-                      <a:r>
-                        <a:rPr lang="en-US" sz="1000" dirty="0">
-                          <a:solidFill>
-                            <a:srgbClr val="1E293B"/>
-                          </a:solidFill>
-                          <a:latin typeface="Calibri" pitchFamily="34" charset="0"/>
-                          <a:ea typeface="Calibri" pitchFamily="34" charset="-122"/>
-                          <a:cs typeface="Calibri" pitchFamily="34" charset="-120"/>
-                        </a:rPr>
-                        <a:t>Enterprise firms</a:t>
-                      </a:r>
-                      <a:endParaRPr lang="en-US" sz="1000" dirty="0">
-                        <a:latin typeface="Calibri" charset="0"/>
-                        <a:ea typeface="Calibri" charset="0"/>
-                        <a:cs typeface="Calibri" charset="0"/>
-                      </a:endParaRPr>
-                    </a:p>
-                  </a:txBody>
-                  <a:tcPr marL="91440" marR="91440" marT="45720" marB="45720" anchor="t">
-                    <a:lnL w="6350" cap="flat" cmpd="sng" algn="ctr">
-                      <a:solidFill>
-                        <a:srgbClr val="E2E8F0"/>
-                      </a:solidFill>
-                      <a:prstDash val="solid"/>
-                      <a:round/>
-                      <a:headEnd type="none" w="med" len="med"/>
-                      <a:tailEnd type="none" w="med" len="med"/>
-                    </a:lnL>
-                    <a:lnR w="6350" cap="flat" cmpd="sng" algn="ctr">
-                      <a:solidFill>
-                        <a:srgbClr val="E2E8F0"/>
-                      </a:solidFill>
-                      <a:prstDash val="solid"/>
-                      <a:round/>
-                      <a:headEnd type="none" w="med" len="med"/>
-                      <a:tailEnd type="none" w="med" len="med"/>
-                    </a:lnR>
-                    <a:lnT w="6350" cap="flat" cmpd="sng" algn="ctr">
-                      <a:solidFill>
-                        <a:srgbClr val="E2E8F0"/>
-                      </a:solidFill>
-                      <a:prstDash val="solid"/>
-                      <a:round/>
-                      <a:headEnd type="none" w="med" len="med"/>
-                      <a:tailEnd type="none" w="med" len="med"/>
-                    </a:lnT>
-                    <a:lnB w="6350" cap="flat" cmpd="sng" algn="ctr">
-                      <a:solidFill>
-                        <a:srgbClr val="E2E8F0"/>
-                      </a:solidFill>
-                      <a:prstDash val="solid"/>
-                      <a:round/>
-                      <a:headEnd type="none" w="med" len="med"/>
-                      <a:tailEnd type="none" w="med" len="med"/>
-                    </a:lnB>
-                    <a:solidFill>
-                      <a:srgbClr val="FFFFFF"/>
                     </a:solidFill>
                   </a:tcPr>
                 </a:tc>
@@ -4224,7 +4808,7 @@
                       <a:tailEnd type="none" w="med" len="med"/>
                     </a:lnB>
                     <a:solidFill>
-                      <a:srgbClr val="FFFFFF"/>
+                      <a:srgbClr val="F8FAFC"/>
                     </a:solidFill>
                   </a:tcPr>
                 </a:tc>
@@ -4241,9 +4825,9 @@
 </p:sld>
 </file>
 
-<file path=ppt/slides/slide12.xml><?xml version="1.0" encoding="utf-8"?>
+<file path=ppt/slides/slide13.xml><?xml version="1.0" encoding="utf-8"?>
 <p:sld xmlns:a="http://schemas.openxmlformats.org/drawingml/2006/main" xmlns:r="http://schemas.openxmlformats.org/officeDocument/2006/relationships" xmlns:p="http://schemas.openxmlformats.org/presentationml/2006/main">
-  <p:cSld name="Slide 12">
+  <p:cSld name="Slide 13">
     <p:bg>
       <p:bgPr>
         <a:solidFill>
@@ -4444,7 +5028,7 @@
       </p:sp>
       <p:graphicFrame>
         <p:nvGraphicFramePr>
-          <p:cNvPr id="13" name="Table 0"/>
+          <p:cNvPr id="14" name="Table 0"/>
           <p:cNvGraphicFramePr>
             <a:graphicFrameLocks noGrp="1"/>
           </p:cNvGraphicFramePr>
@@ -4693,7 +5277,7 @@
                           <a:ea typeface="Calibri" pitchFamily="34" charset="-122"/>
                           <a:cs typeface="Calibri" pitchFamily="34" charset="-120"/>
                         </a:rPr>
-                        <a:t>Starter</a:t>
+                        <a:t>Essentials</a:t>
                       </a:r>
                       <a:endParaRPr lang="en-US" sz="1000" dirty="0">
                         <a:latin typeface="Calibri" charset="0"/>
@@ -4829,7 +5413,7 @@
                           <a:ea typeface="Calibri" pitchFamily="34" charset="-122"/>
                           <a:cs typeface="Calibri" pitchFamily="34" charset="-120"/>
                         </a:rPr>
-                        <a:t>Solo advisors</a:t>
+                        <a:t>Solo practitioner</a:t>
                       </a:r>
                       <a:endParaRPr lang="en-US" sz="1000" dirty="0">
                         <a:latin typeface="Calibri" charset="0"/>
@@ -4899,7 +5483,7 @@
                           <a:ea typeface="Calibri" pitchFamily="34" charset="-122"/>
                           <a:cs typeface="Calibri" pitchFamily="34" charset="-120"/>
                         </a:rPr>
-                        <a:t>Growth</a:t>
+                        <a:t>Professional</a:t>
                       </a:r>
                       <a:endParaRPr lang="en-US" sz="1000" dirty="0">
                         <a:latin typeface="Calibri" charset="0"/>
@@ -5035,7 +5619,7 @@
                           <a:ea typeface="Calibri" pitchFamily="34" charset="-122"/>
                           <a:cs typeface="Calibri" pitchFamily="34" charset="-120"/>
                         </a:rPr>
-                        <a:t>Small practices</a:t>
+                        <a:t>Established firm + customization</a:t>
                       </a:r>
                       <a:endParaRPr lang="en-US" sz="1000" dirty="0">
                         <a:latin typeface="Calibri" charset="0"/>
@@ -5105,7 +5689,7 @@
                           <a:ea typeface="Calibri" pitchFamily="34" charset="-122"/>
                           <a:cs typeface="Calibri" pitchFamily="34" charset="-120"/>
                         </a:rPr>
-                        <a:t>Professional</a:t>
+                        <a:t>Business</a:t>
                       </a:r>
                       <a:endParaRPr lang="en-US" sz="1000" dirty="0">
                         <a:latin typeface="Calibri" charset="0"/>
@@ -5241,7 +5825,7 @@
                           <a:ea typeface="Calibri" pitchFamily="34" charset="-122"/>
                           <a:cs typeface="Calibri" pitchFamily="34" charset="-120"/>
                         </a:rPr>
-                        <a:t>Established firms</a:t>
+                        <a:t>Growing firm + branding</a:t>
                       </a:r>
                       <a:endParaRPr lang="en-US" sz="1000" dirty="0">
                         <a:latin typeface="Calibri" charset="0"/>
@@ -5289,6 +5873,212 @@
                     </a:lnB>
                     <a:solidFill>
                       <a:srgbClr val="F8FAFC"/>
+                    </a:solidFill>
+                  </a:tcPr>
+                </a:tc>
+              </a:tr>
+              <a:tr h="0">
+                <a:tc>
+                  <a:txBody>
+                    <a:bodyPr/>
+                    <a:lstStyle/>
+                    <a:p>
+                      <a:pPr indent="0" marL="0">
+                        <a:buNone/>
+                      </a:pPr>
+                      <a:r>
+                        <a:rPr lang="en-US" sz="1000" dirty="0">
+                          <a:solidFill>
+                            <a:srgbClr val="1E293B"/>
+                          </a:solidFill>
+                          <a:latin typeface="Calibri" pitchFamily="34" charset="0"/>
+                          <a:ea typeface="Calibri" pitchFamily="34" charset="-122"/>
+                          <a:cs typeface="Calibri" pitchFamily="34" charset="-120"/>
+                        </a:rPr>
+                        <a:t>Platinum</a:t>
+                      </a:r>
+                      <a:endParaRPr lang="en-US" sz="1000" dirty="0">
+                        <a:latin typeface="Calibri" charset="0"/>
+                        <a:ea typeface="Calibri" charset="0"/>
+                        <a:cs typeface="Calibri" charset="0"/>
+                      </a:endParaRPr>
+                    </a:p>
+                  </a:txBody>
+                  <a:tcPr marL="91440" marR="91440" marT="45720" marB="45720" anchor="t">
+                    <a:lnL w="6350" cap="flat" cmpd="sng" algn="ctr">
+                      <a:solidFill>
+                        <a:srgbClr val="E2E8F0"/>
+                      </a:solidFill>
+                      <a:prstDash val="solid"/>
+                      <a:round/>
+                      <a:headEnd type="none" w="med" len="med"/>
+                      <a:tailEnd type="none" w="med" len="med"/>
+                    </a:lnL>
+                    <a:lnR w="6350" cap="flat" cmpd="sng" algn="ctr">
+                      <a:solidFill>
+                        <a:srgbClr val="E2E8F0"/>
+                      </a:solidFill>
+                      <a:prstDash val="solid"/>
+                      <a:round/>
+                      <a:headEnd type="none" w="med" len="med"/>
+                      <a:tailEnd type="none" w="med" len="med"/>
+                    </a:lnR>
+                    <a:lnT w="6350" cap="flat" cmpd="sng" algn="ctr">
+                      <a:solidFill>
+                        <a:srgbClr val="E2E8F0"/>
+                      </a:solidFill>
+                      <a:prstDash val="solid"/>
+                      <a:round/>
+                      <a:headEnd type="none" w="med" len="med"/>
+                      <a:tailEnd type="none" w="med" len="med"/>
+                    </a:lnT>
+                    <a:lnB w="6350" cap="flat" cmpd="sng" algn="ctr">
+                      <a:solidFill>
+                        <a:srgbClr val="E2E8F0"/>
+                      </a:solidFill>
+                      <a:prstDash val="solid"/>
+                      <a:round/>
+                      <a:headEnd type="none" w="med" len="med"/>
+                      <a:tailEnd type="none" w="med" len="med"/>
+                    </a:lnB>
+                    <a:solidFill>
+                      <a:srgbClr val="FFFFFF"/>
+                    </a:solidFill>
+                  </a:tcPr>
+                </a:tc>
+                <a:tc>
+                  <a:txBody>
+                    <a:bodyPr/>
+                    <a:lstStyle/>
+                    <a:p>
+                      <a:pPr indent="0" marL="0">
+                        <a:buNone/>
+                      </a:pPr>
+                      <a:r>
+                        <a:rPr lang="en-US" sz="1000" dirty="0">
+                          <a:solidFill>
+                            <a:srgbClr val="1E293B"/>
+                          </a:solidFill>
+                          <a:latin typeface="Calibri" pitchFamily="34" charset="0"/>
+                          <a:ea typeface="Calibri" pitchFamily="34" charset="-122"/>
+                          <a:cs typeface="Calibri" pitchFamily="34" charset="-120"/>
+                        </a:rPr>
+                        <a:t>250</a:t>
+                      </a:r>
+                      <a:endParaRPr lang="en-US" sz="1000" dirty="0">
+                        <a:latin typeface="Calibri" charset="0"/>
+                        <a:ea typeface="Calibri" charset="0"/>
+                        <a:cs typeface="Calibri" charset="0"/>
+                      </a:endParaRPr>
+                    </a:p>
+                  </a:txBody>
+                  <a:tcPr marL="91440" marR="91440" marT="45720" marB="45720" anchor="t">
+                    <a:lnL w="6350" cap="flat" cmpd="sng" algn="ctr">
+                      <a:solidFill>
+                        <a:srgbClr val="E2E8F0"/>
+                      </a:solidFill>
+                      <a:prstDash val="solid"/>
+                      <a:round/>
+                      <a:headEnd type="none" w="med" len="med"/>
+                      <a:tailEnd type="none" w="med" len="med"/>
+                    </a:lnL>
+                    <a:lnR w="6350" cap="flat" cmpd="sng" algn="ctr">
+                      <a:solidFill>
+                        <a:srgbClr val="E2E8F0"/>
+                      </a:solidFill>
+                      <a:prstDash val="solid"/>
+                      <a:round/>
+                      <a:headEnd type="none" w="med" len="med"/>
+                      <a:tailEnd type="none" w="med" len="med"/>
+                    </a:lnR>
+                    <a:lnT w="6350" cap="flat" cmpd="sng" algn="ctr">
+                      <a:solidFill>
+                        <a:srgbClr val="E2E8F0"/>
+                      </a:solidFill>
+                      <a:prstDash val="solid"/>
+                      <a:round/>
+                      <a:headEnd type="none" w="med" len="med"/>
+                      <a:tailEnd type="none" w="med" len="med"/>
+                    </a:lnT>
+                    <a:lnB w="6350" cap="flat" cmpd="sng" algn="ctr">
+                      <a:solidFill>
+                        <a:srgbClr val="E2E8F0"/>
+                      </a:solidFill>
+                      <a:prstDash val="solid"/>
+                      <a:round/>
+                      <a:headEnd type="none" w="med" len="med"/>
+                      <a:tailEnd type="none" w="med" len="med"/>
+                    </a:lnB>
+                    <a:solidFill>
+                      <a:srgbClr val="FFFFFF"/>
+                    </a:solidFill>
+                  </a:tcPr>
+                </a:tc>
+                <a:tc>
+                  <a:txBody>
+                    <a:bodyPr/>
+                    <a:lstStyle/>
+                    <a:p>
+                      <a:pPr indent="0" marL="0">
+                        <a:buNone/>
+                      </a:pPr>
+                      <a:r>
+                        <a:rPr lang="en-US" sz="1000" dirty="0">
+                          <a:solidFill>
+                            <a:srgbClr val="1E293B"/>
+                          </a:solidFill>
+                          <a:latin typeface="Calibri" pitchFamily="34" charset="0"/>
+                          <a:ea typeface="Calibri" pitchFamily="34" charset="-122"/>
+                          <a:cs typeface="Calibri" pitchFamily="34" charset="-120"/>
+                        </a:rPr>
+                        <a:t>High-volume firm</a:t>
+                      </a:r>
+                      <a:endParaRPr lang="en-US" sz="1000" dirty="0">
+                        <a:latin typeface="Calibri" charset="0"/>
+                        <a:ea typeface="Calibri" charset="0"/>
+                        <a:cs typeface="Calibri" charset="0"/>
+                      </a:endParaRPr>
+                    </a:p>
+                  </a:txBody>
+                  <a:tcPr marL="91440" marR="91440" marT="45720" marB="45720" anchor="t">
+                    <a:lnL w="6350" cap="flat" cmpd="sng" algn="ctr">
+                      <a:solidFill>
+                        <a:srgbClr val="E2E8F0"/>
+                      </a:solidFill>
+                      <a:prstDash val="solid"/>
+                      <a:round/>
+                      <a:headEnd type="none" w="med" len="med"/>
+                      <a:tailEnd type="none" w="med" len="med"/>
+                    </a:lnL>
+                    <a:lnR w="6350" cap="flat" cmpd="sng" algn="ctr">
+                      <a:solidFill>
+                        <a:srgbClr val="E2E8F0"/>
+                      </a:solidFill>
+                      <a:prstDash val="solid"/>
+                      <a:round/>
+                      <a:headEnd type="none" w="med" len="med"/>
+                      <a:tailEnd type="none" w="med" len="med"/>
+                    </a:lnR>
+                    <a:lnT w="6350" cap="flat" cmpd="sng" algn="ctr">
+                      <a:solidFill>
+                        <a:srgbClr val="E2E8F0"/>
+                      </a:solidFill>
+                      <a:prstDash val="solid"/>
+                      <a:round/>
+                      <a:headEnd type="none" w="med" len="med"/>
+                      <a:tailEnd type="none" w="med" len="med"/>
+                    </a:lnT>
+                    <a:lnB w="6350" cap="flat" cmpd="sng" algn="ctr">
+                      <a:solidFill>
+                        <a:srgbClr val="E2E8F0"/>
+                      </a:solidFill>
+                      <a:prstDash val="solid"/>
+                      <a:round/>
+                      <a:headEnd type="none" w="med" len="med"/>
+                      <a:tailEnd type="none" w="med" len="med"/>
+                    </a:lnB>
+                    <a:solidFill>
+                      <a:srgbClr val="FFFFFF"/>
                     </a:solidFill>
                   </a:tcPr>
                 </a:tc>
@@ -5358,7 +6148,7 @@
                       <a:tailEnd type="none" w="med" len="med"/>
                     </a:lnB>
                     <a:solidFill>
-                      <a:srgbClr val="FFFFFF"/>
+                      <a:srgbClr val="F8FAFC"/>
                     </a:solidFill>
                   </a:tcPr>
                 </a:tc>
@@ -5426,7 +6216,7 @@
                       <a:tailEnd type="none" w="med" len="med"/>
                     </a:lnB>
                     <a:solidFill>
-                      <a:srgbClr val="FFFFFF"/>
+                      <a:srgbClr val="F8FAFC"/>
                     </a:solidFill>
                   </a:tcPr>
                 </a:tc>
@@ -5447,7 +6237,7 @@
                           <a:ea typeface="Calibri" pitchFamily="34" charset="-122"/>
                           <a:cs typeface="Calibri" pitchFamily="34" charset="-120"/>
                         </a:rPr>
-                        <a:t>Multi-advisor firms</a:t>
+                        <a:t>Multi-seat firms</a:t>
                       </a:r>
                       <a:endParaRPr lang="en-US" sz="1000" dirty="0">
                         <a:latin typeface="Calibri" charset="0"/>
@@ -5494,7 +6284,7 @@
                       <a:tailEnd type="none" w="med" len="med"/>
                     </a:lnB>
                     <a:solidFill>
-                      <a:srgbClr val="FFFFFF"/>
+                      <a:srgbClr val="F8FAFC"/>
                     </a:solidFill>
                   </a:tcPr>
                 </a:tc>
@@ -5503,360 +6293,6 @@
           </a:graphicData>
         </a:graphic>
       </p:graphicFrame>
-    </p:spTree>
-  </p:cSld>
-  <p:clrMapOvr>
-    <a:masterClrMapping/>
-  </p:clrMapOvr>
-</p:sld>
-</file>
-
-<file path=ppt/slides/slide13.xml><?xml version="1.0" encoding="utf-8"?>
-<p:sld xmlns:a="http://schemas.openxmlformats.org/drawingml/2006/main" xmlns:r="http://schemas.openxmlformats.org/officeDocument/2006/relationships" xmlns:p="http://schemas.openxmlformats.org/presentationml/2006/main">
-  <p:cSld name="Slide 13">
-    <p:bg>
-      <p:bgPr>
-        <a:solidFill>
-          <a:srgbClr val="FFFFFF"/>
-        </a:solidFill>
-      </p:bgPr>
-    </p:bg>
-    <p:spTree>
-      <p:nvGrpSpPr>
-        <p:cNvPr id="1" name=""/>
-        <p:cNvGrpSpPr/>
-        <p:nvPr/>
-      </p:nvGrpSpPr>
-      <p:grpSpPr>
-        <a:xfrm>
-          <a:off x="0" y="0"/>
-          <a:ext cx="0" cy="0"/>
-          <a:chOff x="0" y="0"/>
-          <a:chExt cx="0" cy="0"/>
-        </a:xfrm>
-      </p:grpSpPr>
-      <p:sp>
-        <p:nvSpPr>
-          <p:cNvPr id="2" name="Shape 0"/>
-          <p:cNvSpPr/>
-          <p:nvPr/>
-        </p:nvSpPr>
-        <p:spPr>
-          <a:xfrm>
-            <a:off x="0" y="0"/>
-            <a:ext cx="9144000" cy="73152"/>
-          </a:xfrm>
-          <a:prstGeom prst="rect">
-            <a:avLst/>
-          </a:prstGeom>
-          <a:solidFill>
-            <a:srgbClr val="4EA5D9"/>
-          </a:solidFill>
-          <a:ln w="12700">
-            <a:solidFill>
-              <a:srgbClr val="4EA5D9"/>
-            </a:solidFill>
-            <a:prstDash val="solid"/>
-          </a:ln>
-        </p:spPr>
-      </p:sp>
-      <p:sp>
-        <p:nvSpPr>
-          <p:cNvPr id="3" name="Shape 1"/>
-          <p:cNvSpPr/>
-          <p:nvPr/>
-        </p:nvSpPr>
-        <p:spPr>
-          <a:xfrm>
-            <a:off x="320040" y="502920"/>
-            <a:ext cx="54864" cy="502920"/>
-          </a:xfrm>
-          <a:prstGeom prst="rect">
-            <a:avLst/>
-          </a:prstGeom>
-          <a:solidFill>
-            <a:srgbClr val="D97706"/>
-          </a:solidFill>
-          <a:ln w="12700">
-            <a:solidFill>
-              <a:srgbClr val="D97706"/>
-            </a:solidFill>
-            <a:prstDash val="solid"/>
-          </a:ln>
-        </p:spPr>
-      </p:sp>
-      <p:sp>
-        <p:nvSpPr>
-          <p:cNvPr id="4" name="Text 2"/>
-          <p:cNvSpPr/>
-          <p:nvPr/>
-        </p:nvSpPr>
-        <p:spPr>
-          <a:xfrm>
-            <a:off x="502920" y="411480"/>
-            <a:ext cx="8138160" cy="685800"/>
-          </a:xfrm>
-          <a:prstGeom prst="rect">
-            <a:avLst/>
-          </a:prstGeom>
-          <a:noFill/>
-          <a:ln/>
-        </p:spPr>
-        <p:txBody>
-          <a:bodyPr wrap="square" rtlCol="0" anchor="t"/>
-          <a:lstStyle/>
-          <a:p>
-            <a:pPr indent="0" marL="0">
-              <a:buNone/>
-            </a:pPr>
-            <a:r>
-              <a:rPr lang="en-US" sz="2800" b="1" dirty="0">
-                <a:solidFill>
-                  <a:srgbClr val="1E293B"/>
-                </a:solidFill>
-                <a:latin typeface="Calibri Light" pitchFamily="34" charset="0"/>
-                <a:ea typeface="Calibri Light" pitchFamily="34" charset="-122"/>
-                <a:cs typeface="Calibri Light" pitchFamily="34" charset="-120"/>
-              </a:rPr>
-              <a:t>Product Status</a:t>
-            </a:r>
-            <a:endParaRPr lang="en-US" sz="2800" dirty="0"/>
-          </a:p>
-        </p:txBody>
-      </p:sp>
-      <p:sp>
-        <p:nvSpPr>
-          <p:cNvPr id="5" name="Text 3"/>
-          <p:cNvSpPr/>
-          <p:nvPr/>
-        </p:nvSpPr>
-        <p:spPr>
-          <a:xfrm>
-            <a:off x="502920" y="1051560"/>
-            <a:ext cx="8138160" cy="365760"/>
-          </a:xfrm>
-          <a:prstGeom prst="rect">
-            <a:avLst/>
-          </a:prstGeom>
-          <a:noFill/>
-          <a:ln/>
-        </p:spPr>
-        <p:txBody>
-          <a:bodyPr wrap="square" rtlCol="0" anchor="ctr"/>
-          <a:lstStyle/>
-          <a:p>
-            <a:pPr indent="0" marL="0">
-              <a:buNone/>
-            </a:pPr>
-            <a:r>
-              <a:rPr lang="en-US" sz="1400" i="1" dirty="0">
-                <a:solidFill>
-                  <a:srgbClr val="64748B"/>
-                </a:solidFill>
-                <a:latin typeface="Calibri" pitchFamily="34" charset="0"/>
-                <a:ea typeface="Calibri" pitchFamily="34" charset="-122"/>
-                <a:cs typeface="Calibri" pitchFamily="34" charset="-120"/>
-              </a:rPr>
-              <a:t>Live in production today</a:t>
-            </a:r>
-            <a:endParaRPr lang="en-US" sz="1400" dirty="0"/>
-          </a:p>
-        </p:txBody>
-      </p:sp>
-      <p:sp>
-        <p:nvSpPr>
-          <p:cNvPr id="6" name="Shape 4"/>
-          <p:cNvSpPr/>
-          <p:nvPr/>
-        </p:nvSpPr>
-        <p:spPr>
-          <a:xfrm>
-            <a:off x="0" y="4709160"/>
-            <a:ext cx="9144000" cy="320040"/>
-          </a:xfrm>
-          <a:prstGeom prst="rect">
-            <a:avLst/>
-          </a:prstGeom>
-          <a:solidFill>
-            <a:srgbClr val="F8FAFC"/>
-          </a:solidFill>
-          <a:ln w="12700">
-            <a:solidFill>
-              <a:srgbClr val="F8FAFC"/>
-            </a:solidFill>
-            <a:prstDash val="solid"/>
-          </a:ln>
-        </p:spPr>
-      </p:sp>
-      <p:pic>
-        <p:nvPicPr>
-          <p:cNvPr id="7" name="Image 0" descr="/Users/bwoodtalton/Projects/AkiliRisk/logo/akili-horizontal-compact.png">    </p:cNvPr>
-          <p:cNvPicPr>
-            <a:picLocks noChangeAspect="1"/>
-          </p:cNvPicPr>
-          <p:nvPr/>
-        </p:nvPicPr>
-        <p:blipFill>
-          <a:blip r:embed="rId1"/>
-          <a:stretch>
-            <a:fillRect/>
-          </a:stretch>
-        </p:blipFill>
-        <p:spPr>
-          <a:xfrm>
-            <a:off x="320040" y="4754880"/>
-            <a:ext cx="1234440" cy="256032"/>
-          </a:xfrm>
-          <a:prstGeom prst="rect">
-            <a:avLst/>
-          </a:prstGeom>
-        </p:spPr>
-      </p:pic>
-      <p:sp>
-        <p:nvSpPr>
-          <p:cNvPr id="8" name="Text 5"/>
-          <p:cNvSpPr/>
-          <p:nvPr/>
-        </p:nvSpPr>
-        <p:spPr>
-          <a:xfrm>
-            <a:off x="7498080" y="4773168"/>
-            <a:ext cx="1280160" cy="228600"/>
-          </a:xfrm>
-          <a:prstGeom prst="rect">
-            <a:avLst/>
-          </a:prstGeom>
-          <a:noFill/>
-          <a:ln/>
-        </p:spPr>
-        <p:txBody>
-          <a:bodyPr wrap="square" rtlCol="0" anchor="ctr"/>
-          <a:lstStyle/>
-          <a:p>
-            <a:pPr algn="r" indent="0" marL="0">
-              <a:buNone/>
-            </a:pPr>
-            <a:r>
-              <a:rPr lang="en-US" sz="900" dirty="0">
-                <a:solidFill>
-                  <a:srgbClr val="64748B"/>
-                </a:solidFill>
-                <a:latin typeface="Calibri" pitchFamily="34" charset="0"/>
-                <a:ea typeface="Calibri" pitchFamily="34" charset="-122"/>
-                <a:cs typeface="Calibri" pitchFamily="34" charset="-120"/>
-              </a:rPr>
-              <a:t>akilirisk.com</a:t>
-            </a:r>
-            <a:endParaRPr lang="en-US" sz="900" dirty="0"/>
-          </a:p>
-        </p:txBody>
-      </p:sp>
-      <p:sp>
-        <p:nvSpPr>
-          <p:cNvPr id="9" name="Text 6"/>
-          <p:cNvSpPr/>
-          <p:nvPr/>
-        </p:nvSpPr>
-        <p:spPr>
-          <a:xfrm>
-            <a:off x="502920" y="1600200"/>
-            <a:ext cx="8138160" cy="3429000"/>
-          </a:xfrm>
-          <a:prstGeom prst="rect">
-            <a:avLst/>
-          </a:prstGeom>
-          <a:noFill/>
-          <a:ln/>
-        </p:spPr>
-        <p:txBody>
-          <a:bodyPr wrap="square" rtlCol="0" anchor="t"/>
-          <a:lstStyle/>
-          <a:p>
-            <a:pPr marL="342900" indent="-342900">
-              <a:spcAft>
-                <a:spcPts val="800"/>
-              </a:spcAft>
-              <a:buSzPct val="100000"/>
-              <a:buChar char="•"/>
-            </a:pPr>
-            <a:r>
-              <a:rPr lang="en-US" sz="1500" dirty="0">
-                <a:solidFill>
-                  <a:srgbClr val="1E293B"/>
-                </a:solidFill>
-                <a:latin typeface="Calibri" pitchFamily="34" charset="0"/>
-                <a:ea typeface="Calibri" pitchFamily="34" charset="-122"/>
-                <a:cs typeface="Calibri" pitchFamily="34" charset="-120"/>
-              </a:rPr>
-              <a:t>Belvedere — first enterprise client on white-label platform</a:t>
-            </a:r>
-            <a:endParaRPr lang="en-US" sz="1500" dirty="0"/>
-          </a:p>
-          <a:p>
-            <a:pPr marL="342900" indent="-342900">
-              <a:spcAft>
-                <a:spcPts val="800"/>
-              </a:spcAft>
-              <a:buSzPct val="100000"/>
-              <a:buChar char="•"/>
-            </a:pPr>
-            <a:r>
-              <a:rPr lang="en-US" sz="1500" dirty="0">
-                <a:solidFill>
-                  <a:srgbClr val="1E293B"/>
-                </a:solidFill>
-                <a:latin typeface="Calibri" pitchFamily="34" charset="0"/>
-                <a:ea typeface="Calibri" pitchFamily="34" charset="-122"/>
-                <a:cs typeface="Calibri" pitchFamily="34" charset="-120"/>
-              </a:rPr>
-              <a:t>10-pillar framework · 150+ questions · full advisor lifecycle</a:t>
-            </a:r>
-            <a:endParaRPr lang="en-US" sz="1500" dirty="0"/>
-          </a:p>
-          <a:p>
-            <a:pPr marL="342900" indent="-342900">
-              <a:spcAft>
-                <a:spcPts val="800"/>
-              </a:spcAft>
-              <a:buSzPct val="100000"/>
-              <a:buChar char="•"/>
-            </a:pPr>
-            <a:r>
-              <a:rPr lang="en-US" sz="1500" dirty="0">
-                <a:solidFill>
-                  <a:srgbClr val="1E293B"/>
-                </a:solidFill>
-                <a:latin typeface="Calibri" pitchFamily="34" charset="0"/>
-                <a:ea typeface="Calibri" pitchFamily="34" charset="-122"/>
-                <a:cs typeface="Calibri" pitchFamily="34" charset="-120"/>
-              </a:rPr>
-              <a:t>Scoring engine, enterprise architecture, Stripe billing</a:t>
-            </a:r>
-            <a:endParaRPr lang="en-US" sz="1500" dirty="0"/>
-          </a:p>
-          <a:p>
-            <a:pPr marL="342900" indent="-342900">
-              <a:spcAft>
-                <a:spcPts val="800"/>
-              </a:spcAft>
-              <a:buSzPct val="100000"/>
-              <a:buChar char="•"/>
-            </a:pPr>
-            <a:r>
-              <a:rPr lang="en-US" sz="1500" dirty="0">
-                <a:solidFill>
-                  <a:srgbClr val="1E293B"/>
-                </a:solidFill>
-                <a:latin typeface="Calibri" pitchFamily="34" charset="0"/>
-                <a:ea typeface="Calibri" pitchFamily="34" charset="-122"/>
-                <a:cs typeface="Calibri" pitchFamily="34" charset="-120"/>
-              </a:rPr>
-              <a:t>In flight: composite scoring, cross-pillar AI insights, action plans</a:t>
-            </a:r>
-            <a:endParaRPr lang="en-US" sz="1500" dirty="0"/>
-          </a:p>
-        </p:txBody>
-      </p:sp>
     </p:spTree>
   </p:cSld>
   <p:clrMapOvr>
@@ -5972,7 +6408,7 @@
                 <a:ea typeface="Calibri Light" pitchFamily="34" charset="-122"/>
                 <a:cs typeface="Calibri Light" pitchFamily="34" charset="-120"/>
               </a:rPr>
-              <a:t>Platform Vision</a:t>
+              <a:t>Product Status</a:t>
             </a:r>
             <a:endParaRPr lang="en-US" sz="2800" dirty="0"/>
           </a:p>
@@ -5980,7 +6416,46 @@
       </p:sp>
       <p:sp>
         <p:nvSpPr>
-          <p:cNvPr id="5" name="Shape 3"/>
+          <p:cNvPr id="5" name="Text 3"/>
+          <p:cNvSpPr/>
+          <p:nvPr/>
+        </p:nvSpPr>
+        <p:spPr>
+          <a:xfrm>
+            <a:off x="502920" y="1051560"/>
+            <a:ext cx="8138160" cy="365760"/>
+          </a:xfrm>
+          <a:prstGeom prst="rect">
+            <a:avLst/>
+          </a:prstGeom>
+          <a:noFill/>
+          <a:ln/>
+        </p:spPr>
+        <p:txBody>
+          <a:bodyPr wrap="square" rtlCol="0" anchor="ctr"/>
+          <a:lstStyle/>
+          <a:p>
+            <a:pPr indent="0" marL="0">
+              <a:buNone/>
+            </a:pPr>
+            <a:r>
+              <a:rPr lang="en-US" sz="1400" i="1" dirty="0">
+                <a:solidFill>
+                  <a:srgbClr val="64748B"/>
+                </a:solidFill>
+                <a:latin typeface="Calibri" pitchFamily="34" charset="0"/>
+                <a:ea typeface="Calibri" pitchFamily="34" charset="-122"/>
+                <a:cs typeface="Calibri" pitchFamily="34" charset="-120"/>
+              </a:rPr>
+              <a:t>Live in production today</a:t>
+            </a:r>
+            <a:endParaRPr lang="en-US" sz="1400" dirty="0"/>
+          </a:p>
+        </p:txBody>
+      </p:sp>
+      <p:sp>
+        <p:nvSpPr>
+          <p:cNvPr id="6" name="Shape 4"/>
           <p:cNvSpPr/>
           <p:nvPr/>
         </p:nvSpPr>
@@ -6005,7 +6480,7 @@
       </p:sp>
       <p:pic>
         <p:nvPicPr>
-          <p:cNvPr id="6" name="Image 0" descr="/Users/bwoodtalton/Projects/AkiliRisk/logo/akili-horizontal-compact.png">    </p:cNvPr>
+          <p:cNvPr id="7" name="Image 0" descr="/Users/bwoodtalton/Projects/AkiliRisk/logo/akili-horizontal-compact.png">    </p:cNvPr>
           <p:cNvPicPr>
             <a:picLocks noChangeAspect="1"/>
           </p:cNvPicPr>
@@ -6029,7 +6504,7 @@
       </p:pic>
       <p:sp>
         <p:nvSpPr>
-          <p:cNvPr id="7" name="Text 4"/>
+          <p:cNvPr id="8" name="Text 5"/>
           <p:cNvSpPr/>
           <p:nvPr/>
         </p:nvSpPr>
@@ -6068,14 +6543,14 @@
       </p:sp>
       <p:sp>
         <p:nvSpPr>
-          <p:cNvPr id="8" name="Text 5"/>
-          <p:cNvSpPr/>
-          <p:nvPr/>
-        </p:nvSpPr>
-        <p:spPr>
-          <a:xfrm>
-            <a:off x="502920" y="1508760"/>
-            <a:ext cx="8138160" cy="3520440"/>
+          <p:cNvPr id="9" name="Text 6"/>
+          <p:cNvSpPr/>
+          <p:nvPr/>
+        </p:nvSpPr>
+        <p:spPr>
+          <a:xfrm>
+            <a:off x="502920" y="1600200"/>
+            <a:ext cx="8138160" cy="3429000"/>
           </a:xfrm>
           <a:prstGeom prst="rect">
             <a:avLst/>
@@ -6103,7 +6578,322 @@
                 <a:ea typeface="Calibri" pitchFamily="34" charset="-122"/>
                 <a:cs typeface="Calibri" pitchFamily="34" charset="-120"/>
               </a:rPr>
-              <a:t>Risk assessment is the first application</a:t>
+              <a:t>Belvedere — first enterprise client on white-label platform</a:t>
+            </a:r>
+            <a:endParaRPr lang="en-US" sz="1500" dirty="0"/>
+          </a:p>
+          <a:p>
+            <a:pPr marL="342900" indent="-342900">
+              <a:spcAft>
+                <a:spcPts val="800"/>
+              </a:spcAft>
+              <a:buSzPct val="100000"/>
+              <a:buChar char="•"/>
+            </a:pPr>
+            <a:r>
+              <a:rPr lang="en-US" sz="1500" dirty="0">
+                <a:solidFill>
+                  <a:srgbClr val="1E293B"/>
+                </a:solidFill>
+                <a:latin typeface="Calibri" pitchFamily="34" charset="0"/>
+                <a:ea typeface="Calibri" pitchFamily="34" charset="-122"/>
+                <a:cs typeface="Calibri" pitchFamily="34" charset="-120"/>
+              </a:rPr>
+              <a:t>10-pillar framework · 150+ questions · full professional lifecycle</a:t>
+            </a:r>
+            <a:endParaRPr lang="en-US" sz="1500" dirty="0"/>
+          </a:p>
+          <a:p>
+            <a:pPr marL="342900" indent="-342900">
+              <a:spcAft>
+                <a:spcPts val="800"/>
+              </a:spcAft>
+              <a:buSzPct val="100000"/>
+              <a:buChar char="•"/>
+            </a:pPr>
+            <a:r>
+              <a:rPr lang="en-US" sz="1500" dirty="0">
+                <a:solidFill>
+                  <a:srgbClr val="1E293B"/>
+                </a:solidFill>
+                <a:latin typeface="Calibri" pitchFamily="34" charset="0"/>
+                <a:ea typeface="Calibri" pitchFamily="34" charset="-122"/>
+                <a:cs typeface="Calibri" pitchFamily="34" charset="-120"/>
+              </a:rPr>
+              <a:t>Scoring engine, enterprise architecture, Stripe billing</a:t>
+            </a:r>
+            <a:endParaRPr lang="en-US" sz="1500" dirty="0"/>
+          </a:p>
+          <a:p>
+            <a:pPr marL="342900" indent="-342900">
+              <a:spcAft>
+                <a:spcPts val="800"/>
+              </a:spcAft>
+              <a:buSzPct val="100000"/>
+              <a:buChar char="•"/>
+            </a:pPr>
+            <a:r>
+              <a:rPr lang="en-US" sz="1500" dirty="0">
+                <a:solidFill>
+                  <a:srgbClr val="1E293B"/>
+                </a:solidFill>
+                <a:latin typeface="Calibri" pitchFamily="34" charset="0"/>
+                <a:ea typeface="Calibri" pitchFamily="34" charset="-122"/>
+                <a:cs typeface="Calibri" pitchFamily="34" charset="-120"/>
+              </a:rPr>
+              <a:t>In flight: executive PDF reporting, cross-pillar AI insights</a:t>
+            </a:r>
+            <a:endParaRPr lang="en-US" sz="1500" dirty="0"/>
+          </a:p>
+        </p:txBody>
+      </p:sp>
+    </p:spTree>
+  </p:cSld>
+  <p:clrMapOvr>
+    <a:masterClrMapping/>
+  </p:clrMapOvr>
+</p:sld>
+</file>
+
+<file path=ppt/slides/slide15.xml><?xml version="1.0" encoding="utf-8"?>
+<p:sld xmlns:a="http://schemas.openxmlformats.org/drawingml/2006/main" xmlns:r="http://schemas.openxmlformats.org/officeDocument/2006/relationships" xmlns:p="http://schemas.openxmlformats.org/presentationml/2006/main">
+  <p:cSld name="Slide 15">
+    <p:bg>
+      <p:bgPr>
+        <a:solidFill>
+          <a:srgbClr val="FFFFFF"/>
+        </a:solidFill>
+      </p:bgPr>
+    </p:bg>
+    <p:spTree>
+      <p:nvGrpSpPr>
+        <p:cNvPr id="1" name=""/>
+        <p:cNvGrpSpPr/>
+        <p:nvPr/>
+      </p:nvGrpSpPr>
+      <p:grpSpPr>
+        <a:xfrm>
+          <a:off x="0" y="0"/>
+          <a:ext cx="0" cy="0"/>
+          <a:chOff x="0" y="0"/>
+          <a:chExt cx="0" cy="0"/>
+        </a:xfrm>
+      </p:grpSpPr>
+      <p:sp>
+        <p:nvSpPr>
+          <p:cNvPr id="2" name="Shape 0"/>
+          <p:cNvSpPr/>
+          <p:nvPr/>
+        </p:nvSpPr>
+        <p:spPr>
+          <a:xfrm>
+            <a:off x="0" y="0"/>
+            <a:ext cx="9144000" cy="73152"/>
+          </a:xfrm>
+          <a:prstGeom prst="rect">
+            <a:avLst/>
+          </a:prstGeom>
+          <a:solidFill>
+            <a:srgbClr val="4EA5D9"/>
+          </a:solidFill>
+          <a:ln w="12700">
+            <a:solidFill>
+              <a:srgbClr val="4EA5D9"/>
+            </a:solidFill>
+            <a:prstDash val="solid"/>
+          </a:ln>
+        </p:spPr>
+      </p:sp>
+      <p:sp>
+        <p:nvSpPr>
+          <p:cNvPr id="3" name="Shape 1"/>
+          <p:cNvSpPr/>
+          <p:nvPr/>
+        </p:nvSpPr>
+        <p:spPr>
+          <a:xfrm>
+            <a:off x="320040" y="502920"/>
+            <a:ext cx="54864" cy="502920"/>
+          </a:xfrm>
+          <a:prstGeom prst="rect">
+            <a:avLst/>
+          </a:prstGeom>
+          <a:solidFill>
+            <a:srgbClr val="D97706"/>
+          </a:solidFill>
+          <a:ln w="12700">
+            <a:solidFill>
+              <a:srgbClr val="D97706"/>
+            </a:solidFill>
+            <a:prstDash val="solid"/>
+          </a:ln>
+        </p:spPr>
+      </p:sp>
+      <p:sp>
+        <p:nvSpPr>
+          <p:cNvPr id="4" name="Text 2"/>
+          <p:cNvSpPr/>
+          <p:nvPr/>
+        </p:nvSpPr>
+        <p:spPr>
+          <a:xfrm>
+            <a:off x="502920" y="411480"/>
+            <a:ext cx="8138160" cy="685800"/>
+          </a:xfrm>
+          <a:prstGeom prst="rect">
+            <a:avLst/>
+          </a:prstGeom>
+          <a:noFill/>
+          <a:ln/>
+        </p:spPr>
+        <p:txBody>
+          <a:bodyPr wrap="square" rtlCol="0" anchor="t"/>
+          <a:lstStyle/>
+          <a:p>
+            <a:pPr indent="0" marL="0">
+              <a:buNone/>
+            </a:pPr>
+            <a:r>
+              <a:rPr lang="en-US" sz="2800" b="1" dirty="0">
+                <a:solidFill>
+                  <a:srgbClr val="1E293B"/>
+                </a:solidFill>
+                <a:latin typeface="Calibri Light" pitchFamily="34" charset="0"/>
+                <a:ea typeface="Calibri Light" pitchFamily="34" charset="-122"/>
+                <a:cs typeface="Calibri Light" pitchFamily="34" charset="-120"/>
+              </a:rPr>
+              <a:t>Platform Vision</a:t>
+            </a:r>
+            <a:endParaRPr lang="en-US" sz="2800" dirty="0"/>
+          </a:p>
+        </p:txBody>
+      </p:sp>
+      <p:sp>
+        <p:nvSpPr>
+          <p:cNvPr id="5" name="Shape 3"/>
+          <p:cNvSpPr/>
+          <p:nvPr/>
+        </p:nvSpPr>
+        <p:spPr>
+          <a:xfrm>
+            <a:off x="0" y="4709160"/>
+            <a:ext cx="9144000" cy="320040"/>
+          </a:xfrm>
+          <a:prstGeom prst="rect">
+            <a:avLst/>
+          </a:prstGeom>
+          <a:solidFill>
+            <a:srgbClr val="F8FAFC"/>
+          </a:solidFill>
+          <a:ln w="12700">
+            <a:solidFill>
+              <a:srgbClr val="F8FAFC"/>
+            </a:solidFill>
+            <a:prstDash val="solid"/>
+          </a:ln>
+        </p:spPr>
+      </p:sp>
+      <p:pic>
+        <p:nvPicPr>
+          <p:cNvPr id="6" name="Image 0" descr="/Users/bwoodtalton/Projects/AkiliRisk/logo/akili-horizontal-compact.png">    </p:cNvPr>
+          <p:cNvPicPr>
+            <a:picLocks noChangeAspect="1"/>
+          </p:cNvPicPr>
+          <p:nvPr/>
+        </p:nvPicPr>
+        <p:blipFill>
+          <a:blip r:embed="rId1"/>
+          <a:stretch>
+            <a:fillRect/>
+          </a:stretch>
+        </p:blipFill>
+        <p:spPr>
+          <a:xfrm>
+            <a:off x="320040" y="4754880"/>
+            <a:ext cx="1234440" cy="256032"/>
+          </a:xfrm>
+          <a:prstGeom prst="rect">
+            <a:avLst/>
+          </a:prstGeom>
+        </p:spPr>
+      </p:pic>
+      <p:sp>
+        <p:nvSpPr>
+          <p:cNvPr id="7" name="Text 4"/>
+          <p:cNvSpPr/>
+          <p:nvPr/>
+        </p:nvSpPr>
+        <p:spPr>
+          <a:xfrm>
+            <a:off x="7498080" y="4773168"/>
+            <a:ext cx="1280160" cy="228600"/>
+          </a:xfrm>
+          <a:prstGeom prst="rect">
+            <a:avLst/>
+          </a:prstGeom>
+          <a:noFill/>
+          <a:ln/>
+        </p:spPr>
+        <p:txBody>
+          <a:bodyPr wrap="square" rtlCol="0" anchor="ctr"/>
+          <a:lstStyle/>
+          <a:p>
+            <a:pPr algn="r" indent="0" marL="0">
+              <a:buNone/>
+            </a:pPr>
+            <a:r>
+              <a:rPr lang="en-US" sz="900" dirty="0">
+                <a:solidFill>
+                  <a:srgbClr val="64748B"/>
+                </a:solidFill>
+                <a:latin typeface="Calibri" pitchFamily="34" charset="0"/>
+                <a:ea typeface="Calibri" pitchFamily="34" charset="-122"/>
+                <a:cs typeface="Calibri" pitchFamily="34" charset="-120"/>
+              </a:rPr>
+              <a:t>akilirisk.com</a:t>
+            </a:r>
+            <a:endParaRPr lang="en-US" sz="900" dirty="0"/>
+          </a:p>
+        </p:txBody>
+      </p:sp>
+      <p:sp>
+        <p:nvSpPr>
+          <p:cNvPr id="8" name="Text 5"/>
+          <p:cNvSpPr/>
+          <p:nvPr/>
+        </p:nvSpPr>
+        <p:spPr>
+          <a:xfrm>
+            <a:off x="502920" y="1508760"/>
+            <a:ext cx="8138160" cy="3520440"/>
+          </a:xfrm>
+          <a:prstGeom prst="rect">
+            <a:avLst/>
+          </a:prstGeom>
+          <a:noFill/>
+          <a:ln/>
+        </p:spPr>
+        <p:txBody>
+          <a:bodyPr wrap="square" rtlCol="0" anchor="t"/>
+          <a:lstStyle/>
+          <a:p>
+            <a:pPr marL="342900" indent="-342900">
+              <a:spcAft>
+                <a:spcPts val="800"/>
+              </a:spcAft>
+              <a:buSzPct val="100000"/>
+              <a:buChar char="•"/>
+            </a:pPr>
+            <a:r>
+              <a:rPr lang="en-US" sz="1500" dirty="0">
+                <a:solidFill>
+                  <a:srgbClr val="1E293B"/>
+                </a:solidFill>
+                <a:latin typeface="Calibri" pitchFamily="34" charset="0"/>
+                <a:ea typeface="Calibri" pitchFamily="34" charset="-122"/>
+                <a:cs typeface="Calibri" pitchFamily="34" charset="-120"/>
+              </a:rPr>
+              <a:t>Governance infrastructure for the professional ecosystem around family wealth</a:t>
             </a:r>
             <a:endParaRPr lang="en-US" sz="1500" dirty="0"/>
           </a:p>
@@ -6145,7 +6935,7 @@
                 <a:ea typeface="Calibri" pitchFamily="34" charset="-122"/>
                 <a:cs typeface="Calibri" pitchFamily="34" charset="-120"/>
               </a:rPr>
-              <a:t>Annual reassessments &amp; continuous monitoring</a:t>
+              <a:t>Continuous reassessment &amp; measurable risk reduction</a:t>
             </a:r>
             <a:endParaRPr lang="en-US" sz="1500" dirty="0"/>
           </a:p>
@@ -6201,9 +6991,9 @@
 </p:sld>
 </file>
 
-<file path=ppt/slides/slide15.xml><?xml version="1.0" encoding="utf-8"?>
+<file path=ppt/slides/slide16.xml><?xml version="1.0" encoding="utf-8"?>
 <p:sld xmlns:a="http://schemas.openxmlformats.org/drawingml/2006/main" xmlns:r="http://schemas.openxmlformats.org/officeDocument/2006/relationships" xmlns:p="http://schemas.openxmlformats.org/presentationml/2006/main">
-  <p:cSld name="Slide 15">
+  <p:cSld name="Slide 16">
     <p:bg>
       <p:bgPr>
         <a:solidFill>
@@ -6315,7 +7105,7 @@
       </p:sp>
       <p:graphicFrame>
         <p:nvGraphicFramePr>
-          <p:cNvPr id="16" name="Table 0"/>
+          <p:cNvPr id="17" name="Table 0"/>
           <p:cNvGraphicFramePr>
             <a:graphicFrameLocks noGrp="1"/>
           </p:cNvGraphicFramePr>
@@ -6495,7 +7285,7 @@
                           <a:ea typeface="Calibri" pitchFamily="34" charset="-122"/>
                           <a:cs typeface="Calibri" pitchFamily="34" charset="-120"/>
                         </a:rPr>
-                        <a:t>Advisors</a:t>
+                        <a:t>Professional firms</a:t>
                       </a:r>
                       <a:endParaRPr lang="en-US" sz="1000" dirty="0">
                         <a:latin typeface="Calibri" charset="0"/>
@@ -7271,7 +8061,7 @@
                 <a:ea typeface="Calibri" pitchFamily="34" charset="-122"/>
                 <a:cs typeface="Calibri" pitchFamily="34" charset="-120"/>
               </a:rPr>
-              <a:t>We give families and advisors a structured way to surface risks, align decision frameworks, and act with intention.</a:t>
+              <a:t>We give families and the professionals who serve them a structured way to surface risks, align decision frameworks, and act with intention.</a:t>
             </a:r>
             <a:endParaRPr lang="en-US" sz="1500" dirty="0"/>
           </a:p>
@@ -7431,7 +8221,7 @@
                 <a:ea typeface="Calibri" pitchFamily="34" charset="-122"/>
                 <a:cs typeface="Calibri" pitchFamily="34" charset="-120"/>
               </a:rPr>
-              <a:t>Wealth is managed. Governance is assumed.</a:t>
+              <a:t>Every professional protects a piece. Nobody owns the whole picture.</a:t>
             </a:r>
             <a:endParaRPr lang="en-US" sz="1400" dirty="0"/>
           </a:p>
@@ -7562,7 +8352,7 @@
                 <a:ea typeface="Calibri" pitchFamily="34" charset="-122"/>
                 <a:cs typeface="Calibri" pitchFamily="34" charset="-120"/>
               </a:rPr>
-              <a:t>HNW families rarely have a systematic view of non-financial risk</a:t>
+              <a:t>HNW families rarely have a systematic view of operational risk across domains</a:t>
             </a:r>
             <a:endParaRPr lang="en-US" sz="1500" dirty="0"/>
           </a:p>
@@ -7583,7 +8373,7 @@
                 <a:ea typeface="Calibri" pitchFamily="34" charset="-122"/>
                 <a:cs typeface="Calibri" pitchFamily="34" charset="-120"/>
               </a:rPr>
-              <a:t>Advisors lack a repeatable way to surface governance, cyber, succession, and continuity gaps</a:t>
+              <a:t>Wealth, tax, legal, and succession professionals each see a slice — not a shared scored profile</a:t>
             </a:r>
             <a:endParaRPr lang="en-US" sz="1500" dirty="0"/>
           </a:p>
@@ -7625,7 +8415,7 @@
                 <a:ea typeface="Calibri" pitchFamily="34" charset="-122"/>
                 <a:cs typeface="Calibri" pitchFamily="34" charset="-120"/>
               </a:rPr>
-              <a:t>Families need one coherent risk profile, not scattered conversations</a:t>
+              <a:t>Families need one coherent risk profile, not scattered conversations and siloed checklists</a:t>
             </a:r>
             <a:endParaRPr lang="en-US" sz="1500" dirty="0"/>
           </a:p>
@@ -7979,7 +8769,7 @@
                 <a:ea typeface="Calibri" pitchFamily="34" charset="-122"/>
                 <a:cs typeface="Calibri" pitchFamily="34" charset="-120"/>
               </a:rPr>
-              <a:t>Delivers advisor-ready reports, policy templates, and recommendations</a:t>
+              <a:t>Delivers firm-ready reports, policy templates, and recommendations</a:t>
             </a:r>
             <a:endParaRPr lang="en-US" sz="1500" dirty="0"/>
           </a:p>
@@ -8001,6 +8791,27 @@
                 <a:cs typeface="Calibri" pitchFamily="34" charset="-120"/>
               </a:rPr>
               <a:t>Tracks progress over time — living intelligence, not a one-time PDF</a:t>
+            </a:r>
+            <a:endParaRPr lang="en-US" sz="1500" dirty="0"/>
+          </a:p>
+          <a:p>
+            <a:pPr marL="342900" indent="-342900">
+              <a:spcAft>
+                <a:spcPts val="800"/>
+              </a:spcAft>
+              <a:buSzPct val="100000"/>
+              <a:buChar char="•"/>
+            </a:pPr>
+            <a:r>
+              <a:rPr lang="en-US" sz="1500" dirty="0">
+                <a:solidFill>
+                  <a:srgbClr val="1E293B"/>
+                </a:solidFill>
+                <a:latin typeface="Calibri" pitchFamily="34" charset="0"/>
+                <a:ea typeface="Calibri" pitchFamily="34" charset="-122"/>
+                <a:cs typeface="Calibri" pitchFamily="34" charset="-120"/>
+              </a:rPr>
+              <a:t>Brands under your firm — white-label subdomains, custom intake, firm methodology</a:t>
             </a:r>
             <a:endParaRPr lang="en-US" sz="1500" dirty="0"/>
           </a:p>
@@ -8121,7 +8932,7 @@
                 <a:ea typeface="Calibri Light" pitchFamily="34" charset="-122"/>
                 <a:cs typeface="Calibri Light" pitchFamily="34" charset="-120"/>
               </a:rPr>
-              <a:t>How It Works</a:t>
+              <a:t>Why Firms Trust AKILI</a:t>
             </a:r>
             <a:endParaRPr lang="en-US" sz="2800" dirty="0"/>
           </a:p>
@@ -8129,7 +8940,46 @@
       </p:sp>
       <p:sp>
         <p:nvSpPr>
-          <p:cNvPr id="5" name="Shape 3"/>
+          <p:cNvPr id="5" name="Text 3"/>
+          <p:cNvSpPr/>
+          <p:nvPr/>
+        </p:nvSpPr>
+        <p:spPr>
+          <a:xfrm>
+            <a:off x="502920" y="1051560"/>
+            <a:ext cx="8138160" cy="365760"/>
+          </a:xfrm>
+          <a:prstGeom prst="rect">
+            <a:avLst/>
+          </a:prstGeom>
+          <a:noFill/>
+          <a:ln/>
+        </p:spPr>
+        <p:txBody>
+          <a:bodyPr wrap="square" rtlCol="0" anchor="ctr"/>
+          <a:lstStyle/>
+          <a:p>
+            <a:pPr indent="0" marL="0">
+              <a:buNone/>
+            </a:pPr>
+            <a:r>
+              <a:rPr lang="en-US" sz="1400" i="1" dirty="0">
+                <a:solidFill>
+                  <a:srgbClr val="64748B"/>
+                </a:solidFill>
+                <a:latin typeface="Calibri" pitchFamily="34" charset="0"/>
+                <a:ea typeface="Calibri" pitchFamily="34" charset="-122"/>
+                <a:cs typeface="Calibri" pitchFamily="34" charset="-120"/>
+              </a:rPr>
+              <a:t>Your brand. Your methodology. Your client relationship.</a:t>
+            </a:r>
+            <a:endParaRPr lang="en-US" sz="1400" dirty="0"/>
+          </a:p>
+        </p:txBody>
+      </p:sp>
+      <p:sp>
+        <p:nvSpPr>
+          <p:cNvPr id="6" name="Shape 4"/>
           <p:cNvSpPr/>
           <p:nvPr/>
         </p:nvSpPr>
@@ -8154,7 +9004,7 @@
       </p:sp>
       <p:pic>
         <p:nvPicPr>
-          <p:cNvPr id="6" name="Image 0" descr="/Users/bwoodtalton/Projects/AkiliRisk/logo/akili-horizontal-compact.png">    </p:cNvPr>
+          <p:cNvPr id="7" name="Image 0" descr="/Users/bwoodtalton/Projects/AkiliRisk/logo/akili-horizontal-compact.png">    </p:cNvPr>
           <p:cNvPicPr>
             <a:picLocks noChangeAspect="1"/>
           </p:cNvPicPr>
@@ -8178,7 +9028,7 @@
       </p:pic>
       <p:sp>
         <p:nvSpPr>
-          <p:cNvPr id="7" name="Text 4"/>
+          <p:cNvPr id="8" name="Text 5"/>
           <p:cNvSpPr/>
           <p:nvPr/>
         </p:nvSpPr>
@@ -8217,652 +9067,14 @@
       </p:sp>
       <p:sp>
         <p:nvSpPr>
-          <p:cNvPr id="8" name="Shape 5"/>
-          <p:cNvSpPr/>
-          <p:nvPr/>
-        </p:nvSpPr>
-        <p:spPr>
-          <a:xfrm>
-            <a:off x="320040" y="1325880"/>
-            <a:ext cx="1234440" cy="502920"/>
-          </a:xfrm>
-          <a:prstGeom prst="roundRect">
-            <a:avLst>
-              <a:gd name="adj" fmla="val 14545"/>
-            </a:avLst>
-          </a:prstGeom>
-          <a:solidFill>
-            <a:srgbClr val="4EA5D9"/>
-          </a:solidFill>
-          <a:ln w="12700">
-            <a:solidFill>
-              <a:srgbClr val="1E293B"/>
-            </a:solidFill>
-            <a:prstDash val="solid"/>
-          </a:ln>
-        </p:spPr>
-      </p:sp>
-      <p:sp>
-        <p:nvSpPr>
           <p:cNvPr id="9" name="Text 6"/>
           <p:cNvSpPr/>
           <p:nvPr/>
         </p:nvSpPr>
         <p:spPr>
           <a:xfrm>
-            <a:off x="320040" y="1399032"/>
-            <a:ext cx="1234440" cy="365760"/>
-          </a:xfrm>
-          <a:prstGeom prst="rect">
-            <a:avLst/>
-          </a:prstGeom>
-          <a:noFill/>
-          <a:ln/>
-        </p:spPr>
-        <p:txBody>
-          <a:bodyPr wrap="square" rtlCol="0" anchor="ctr"/>
-          <a:lstStyle/>
-          <a:p>
-            <a:pPr algn="ctr" indent="0" marL="0">
-              <a:buNone/>
-            </a:pPr>
-            <a:r>
-              <a:rPr lang="en-US" sz="900" b="1" dirty="0">
-                <a:solidFill>
-                  <a:srgbClr val="FFFFFF"/>
-                </a:solidFill>
-                <a:latin typeface="Calibri" pitchFamily="34" charset="0"/>
-                <a:ea typeface="Calibri" pitchFamily="34" charset="-122"/>
-                <a:cs typeface="Calibri" pitchFamily="34" charset="-120"/>
-              </a:rPr>
-              <a:t>Discovery</a:t>
-            </a:r>
-            <a:endParaRPr lang="en-US" sz="900" dirty="0"/>
-          </a:p>
-        </p:txBody>
-      </p:sp>
-      <p:sp>
-        <p:nvSpPr>
-          <p:cNvPr id="10" name="Text 7"/>
-          <p:cNvSpPr/>
-          <p:nvPr/>
-        </p:nvSpPr>
-        <p:spPr>
-          <a:xfrm>
-            <a:off x="1554480" y="1417320"/>
-            <a:ext cx="109728" cy="320040"/>
-          </a:xfrm>
-          <a:prstGeom prst="rect">
-            <a:avLst/>
-          </a:prstGeom>
-          <a:noFill/>
-          <a:ln/>
-        </p:spPr>
-        <p:txBody>
-          <a:bodyPr wrap="square" rtlCol="0" anchor="ctr"/>
-          <a:lstStyle/>
-          <a:p>
-            <a:pPr algn="ctr" indent="0" marL="0">
-              <a:buNone/>
-            </a:pPr>
-            <a:r>
-              <a:rPr lang="en-US" sz="1200" dirty="0">
-                <a:solidFill>
-                  <a:srgbClr val="64748B"/>
-                </a:solidFill>
-              </a:rPr>
-              <a:t>→</a:t>
-            </a:r>
-            <a:endParaRPr lang="en-US" sz="1200" dirty="0"/>
-          </a:p>
-        </p:txBody>
-      </p:sp>
-      <p:sp>
-        <p:nvSpPr>
-          <p:cNvPr id="11" name="Shape 8"/>
-          <p:cNvSpPr/>
-          <p:nvPr/>
-        </p:nvSpPr>
-        <p:spPr>
-          <a:xfrm>
-            <a:off x="1664208" y="1325880"/>
-            <a:ext cx="1234440" cy="502920"/>
-          </a:xfrm>
-          <a:prstGeom prst="roundRect">
-            <a:avLst>
-              <a:gd name="adj" fmla="val 14545"/>
-            </a:avLst>
-          </a:prstGeom>
-          <a:solidFill>
-            <a:srgbClr val="4EA5D9"/>
-          </a:solidFill>
-          <a:ln w="12700">
-            <a:solidFill>
-              <a:srgbClr val="1E293B"/>
-            </a:solidFill>
-            <a:prstDash val="solid"/>
-          </a:ln>
-        </p:spPr>
-      </p:sp>
-      <p:sp>
-        <p:nvSpPr>
-          <p:cNvPr id="12" name="Text 9"/>
-          <p:cNvSpPr/>
-          <p:nvPr/>
-        </p:nvSpPr>
-        <p:spPr>
-          <a:xfrm>
-            <a:off x="1664208" y="1399032"/>
-            <a:ext cx="1234440" cy="365760"/>
-          </a:xfrm>
-          <a:prstGeom prst="rect">
-            <a:avLst/>
-          </a:prstGeom>
-          <a:noFill/>
-          <a:ln/>
-        </p:spPr>
-        <p:txBody>
-          <a:bodyPr wrap="square" rtlCol="0" anchor="ctr"/>
-          <a:lstStyle/>
-          <a:p>
-            <a:pPr algn="ctr" indent="0" marL="0">
-              <a:buNone/>
-            </a:pPr>
-            <a:r>
-              <a:rPr lang="en-US" sz="900" b="1" dirty="0">
-                <a:solidFill>
-                  <a:srgbClr val="FFFFFF"/>
-                </a:solidFill>
-                <a:latin typeface="Calibri" pitchFamily="34" charset="0"/>
-                <a:ea typeface="Calibri" pitchFamily="34" charset="-122"/>
-                <a:cs typeface="Calibri" pitchFamily="34" charset="-120"/>
-              </a:rPr>
-              <a:t>Assessment</a:t>
-            </a:r>
-            <a:endParaRPr lang="en-US" sz="900" dirty="0"/>
-          </a:p>
-        </p:txBody>
-      </p:sp>
-      <p:sp>
-        <p:nvSpPr>
-          <p:cNvPr id="13" name="Text 10"/>
-          <p:cNvSpPr/>
-          <p:nvPr/>
-        </p:nvSpPr>
-        <p:spPr>
-          <a:xfrm>
-            <a:off x="2898648" y="1417320"/>
-            <a:ext cx="109728" cy="320040"/>
-          </a:xfrm>
-          <a:prstGeom prst="rect">
-            <a:avLst/>
-          </a:prstGeom>
-          <a:noFill/>
-          <a:ln/>
-        </p:spPr>
-        <p:txBody>
-          <a:bodyPr wrap="square" rtlCol="0" anchor="ctr"/>
-          <a:lstStyle/>
-          <a:p>
-            <a:pPr algn="ctr" indent="0" marL="0">
-              <a:buNone/>
-            </a:pPr>
-            <a:r>
-              <a:rPr lang="en-US" sz="1200" dirty="0">
-                <a:solidFill>
-                  <a:srgbClr val="64748B"/>
-                </a:solidFill>
-              </a:rPr>
-              <a:t>→</a:t>
-            </a:r>
-            <a:endParaRPr lang="en-US" sz="1200" dirty="0"/>
-          </a:p>
-        </p:txBody>
-      </p:sp>
-      <p:sp>
-        <p:nvSpPr>
-          <p:cNvPr id="14" name="Shape 11"/>
-          <p:cNvSpPr/>
-          <p:nvPr/>
-        </p:nvSpPr>
-        <p:spPr>
-          <a:xfrm>
-            <a:off x="3008376" y="1325880"/>
-            <a:ext cx="1234440" cy="502920"/>
-          </a:xfrm>
-          <a:prstGeom prst="roundRect">
-            <a:avLst>
-              <a:gd name="adj" fmla="val 14545"/>
-            </a:avLst>
-          </a:prstGeom>
-          <a:solidFill>
-            <a:srgbClr val="4EA5D9"/>
-          </a:solidFill>
-          <a:ln w="12700">
-            <a:solidFill>
-              <a:srgbClr val="1E293B"/>
-            </a:solidFill>
-            <a:prstDash val="solid"/>
-          </a:ln>
-        </p:spPr>
-      </p:sp>
-      <p:sp>
-        <p:nvSpPr>
-          <p:cNvPr id="15" name="Text 12"/>
-          <p:cNvSpPr/>
-          <p:nvPr/>
-        </p:nvSpPr>
-        <p:spPr>
-          <a:xfrm>
-            <a:off x="3008376" y="1399032"/>
-            <a:ext cx="1234440" cy="365760"/>
-          </a:xfrm>
-          <a:prstGeom prst="rect">
-            <a:avLst/>
-          </a:prstGeom>
-          <a:noFill/>
-          <a:ln/>
-        </p:spPr>
-        <p:txBody>
-          <a:bodyPr wrap="square" rtlCol="0" anchor="ctr"/>
-          <a:lstStyle/>
-          <a:p>
-            <a:pPr algn="ctr" indent="0" marL="0">
-              <a:buNone/>
-            </a:pPr>
-            <a:r>
-              <a:rPr lang="en-US" sz="900" b="1" dirty="0">
-                <a:solidFill>
-                  <a:srgbClr val="FFFFFF"/>
-                </a:solidFill>
-                <a:latin typeface="Calibri" pitchFamily="34" charset="0"/>
-                <a:ea typeface="Calibri" pitchFamily="34" charset="-122"/>
-                <a:cs typeface="Calibri" pitchFamily="34" charset="-120"/>
-              </a:rPr>
-              <a:t>Insights</a:t>
-            </a:r>
-            <a:endParaRPr lang="en-US" sz="900" dirty="0"/>
-          </a:p>
-        </p:txBody>
-      </p:sp>
-      <p:sp>
-        <p:nvSpPr>
-          <p:cNvPr id="16" name="Text 13"/>
-          <p:cNvSpPr/>
-          <p:nvPr/>
-        </p:nvSpPr>
-        <p:spPr>
-          <a:xfrm>
-            <a:off x="4242816" y="1417320"/>
-            <a:ext cx="109728" cy="320040"/>
-          </a:xfrm>
-          <a:prstGeom prst="rect">
-            <a:avLst/>
-          </a:prstGeom>
-          <a:noFill/>
-          <a:ln/>
-        </p:spPr>
-        <p:txBody>
-          <a:bodyPr wrap="square" rtlCol="0" anchor="ctr"/>
-          <a:lstStyle/>
-          <a:p>
-            <a:pPr algn="ctr" indent="0" marL="0">
-              <a:buNone/>
-            </a:pPr>
-            <a:r>
-              <a:rPr lang="en-US" sz="1200" dirty="0">
-                <a:solidFill>
-                  <a:srgbClr val="64748B"/>
-                </a:solidFill>
-              </a:rPr>
-              <a:t>→</a:t>
-            </a:r>
-            <a:endParaRPr lang="en-US" sz="1200" dirty="0"/>
-          </a:p>
-        </p:txBody>
-      </p:sp>
-      <p:sp>
-        <p:nvSpPr>
-          <p:cNvPr id="17" name="Shape 14"/>
-          <p:cNvSpPr/>
-          <p:nvPr/>
-        </p:nvSpPr>
-        <p:spPr>
-          <a:xfrm>
-            <a:off x="4352544" y="1325880"/>
-            <a:ext cx="1234440" cy="502920"/>
-          </a:xfrm>
-          <a:prstGeom prst="roundRect">
-            <a:avLst>
-              <a:gd name="adj" fmla="val 14545"/>
-            </a:avLst>
-          </a:prstGeom>
-          <a:solidFill>
-            <a:srgbClr val="4EA5D9"/>
-          </a:solidFill>
-          <a:ln w="12700">
-            <a:solidFill>
-              <a:srgbClr val="1E293B"/>
-            </a:solidFill>
-            <a:prstDash val="solid"/>
-          </a:ln>
-        </p:spPr>
-      </p:sp>
-      <p:sp>
-        <p:nvSpPr>
-          <p:cNvPr id="18" name="Text 15"/>
-          <p:cNvSpPr/>
-          <p:nvPr/>
-        </p:nvSpPr>
-        <p:spPr>
-          <a:xfrm>
-            <a:off x="4352544" y="1399032"/>
-            <a:ext cx="1234440" cy="365760"/>
-          </a:xfrm>
-          <a:prstGeom prst="rect">
-            <a:avLst/>
-          </a:prstGeom>
-          <a:noFill/>
-          <a:ln/>
-        </p:spPr>
-        <p:txBody>
-          <a:bodyPr wrap="square" rtlCol="0" anchor="ctr"/>
-          <a:lstStyle/>
-          <a:p>
-            <a:pPr algn="ctr" indent="0" marL="0">
-              <a:buNone/>
-            </a:pPr>
-            <a:r>
-              <a:rPr lang="en-US" sz="900" b="1" dirty="0">
-                <a:solidFill>
-                  <a:srgbClr val="FFFFFF"/>
-                </a:solidFill>
-                <a:latin typeface="Calibri" pitchFamily="34" charset="0"/>
-                <a:ea typeface="Calibri" pitchFamily="34" charset="-122"/>
-                <a:cs typeface="Calibri" pitchFamily="34" charset="-120"/>
-              </a:rPr>
-              <a:t>Recommendations</a:t>
-            </a:r>
-            <a:endParaRPr lang="en-US" sz="900" dirty="0"/>
-          </a:p>
-        </p:txBody>
-      </p:sp>
-      <p:sp>
-        <p:nvSpPr>
-          <p:cNvPr id="19" name="Text 16"/>
-          <p:cNvSpPr/>
-          <p:nvPr/>
-        </p:nvSpPr>
-        <p:spPr>
-          <a:xfrm>
-            <a:off x="5586984" y="1417320"/>
-            <a:ext cx="109728" cy="320040"/>
-          </a:xfrm>
-          <a:prstGeom prst="rect">
-            <a:avLst/>
-          </a:prstGeom>
-          <a:noFill/>
-          <a:ln/>
-        </p:spPr>
-        <p:txBody>
-          <a:bodyPr wrap="square" rtlCol="0" anchor="ctr"/>
-          <a:lstStyle/>
-          <a:p>
-            <a:pPr algn="ctr" indent="0" marL="0">
-              <a:buNone/>
-            </a:pPr>
-            <a:r>
-              <a:rPr lang="en-US" sz="1200" dirty="0">
-                <a:solidFill>
-                  <a:srgbClr val="64748B"/>
-                </a:solidFill>
-              </a:rPr>
-              <a:t>→</a:t>
-            </a:r>
-            <a:endParaRPr lang="en-US" sz="1200" dirty="0"/>
-          </a:p>
-        </p:txBody>
-      </p:sp>
-      <p:sp>
-        <p:nvSpPr>
-          <p:cNvPr id="20" name="Shape 17"/>
-          <p:cNvSpPr/>
-          <p:nvPr/>
-        </p:nvSpPr>
-        <p:spPr>
-          <a:xfrm>
-            <a:off x="5696712" y="1325880"/>
-            <a:ext cx="1234440" cy="502920"/>
-          </a:xfrm>
-          <a:prstGeom prst="roundRect">
-            <a:avLst>
-              <a:gd name="adj" fmla="val 14545"/>
-            </a:avLst>
-          </a:prstGeom>
-          <a:solidFill>
-            <a:srgbClr val="4EA5D9"/>
-          </a:solidFill>
-          <a:ln w="12700">
-            <a:solidFill>
-              <a:srgbClr val="1E293B"/>
-            </a:solidFill>
-            <a:prstDash val="solid"/>
-          </a:ln>
-        </p:spPr>
-      </p:sp>
-      <p:sp>
-        <p:nvSpPr>
-          <p:cNvPr id="21" name="Text 18"/>
-          <p:cNvSpPr/>
-          <p:nvPr/>
-        </p:nvSpPr>
-        <p:spPr>
-          <a:xfrm>
-            <a:off x="5696712" y="1399032"/>
-            <a:ext cx="1234440" cy="365760"/>
-          </a:xfrm>
-          <a:prstGeom prst="rect">
-            <a:avLst/>
-          </a:prstGeom>
-          <a:noFill/>
-          <a:ln/>
-        </p:spPr>
-        <p:txBody>
-          <a:bodyPr wrap="square" rtlCol="0" anchor="ctr"/>
-          <a:lstStyle/>
-          <a:p>
-            <a:pPr algn="ctr" indent="0" marL="0">
-              <a:buNone/>
-            </a:pPr>
-            <a:r>
-              <a:rPr lang="en-US" sz="900" b="1" dirty="0">
-                <a:solidFill>
-                  <a:srgbClr val="FFFFFF"/>
-                </a:solidFill>
-                <a:latin typeface="Calibri" pitchFamily="34" charset="0"/>
-                <a:ea typeface="Calibri" pitchFamily="34" charset="-122"/>
-                <a:cs typeface="Calibri" pitchFamily="34" charset="-120"/>
-              </a:rPr>
-              <a:t>Action Plan</a:t>
-            </a:r>
-            <a:endParaRPr lang="en-US" sz="900" dirty="0"/>
-          </a:p>
-        </p:txBody>
-      </p:sp>
-      <p:sp>
-        <p:nvSpPr>
-          <p:cNvPr id="22" name="Text 19"/>
-          <p:cNvSpPr/>
-          <p:nvPr/>
-        </p:nvSpPr>
-        <p:spPr>
-          <a:xfrm>
-            <a:off x="6931152" y="1417320"/>
-            <a:ext cx="109728" cy="320040"/>
-          </a:xfrm>
-          <a:prstGeom prst="rect">
-            <a:avLst/>
-          </a:prstGeom>
-          <a:noFill/>
-          <a:ln/>
-        </p:spPr>
-        <p:txBody>
-          <a:bodyPr wrap="square" rtlCol="0" anchor="ctr"/>
-          <a:lstStyle/>
-          <a:p>
-            <a:pPr algn="ctr" indent="0" marL="0">
-              <a:buNone/>
-            </a:pPr>
-            <a:r>
-              <a:rPr lang="en-US" sz="1200" dirty="0">
-                <a:solidFill>
-                  <a:srgbClr val="64748B"/>
-                </a:solidFill>
-              </a:rPr>
-              <a:t>→</a:t>
-            </a:r>
-            <a:endParaRPr lang="en-US" sz="1200" dirty="0"/>
-          </a:p>
-        </p:txBody>
-      </p:sp>
-      <p:sp>
-        <p:nvSpPr>
-          <p:cNvPr id="23" name="Shape 20"/>
-          <p:cNvSpPr/>
-          <p:nvPr/>
-        </p:nvSpPr>
-        <p:spPr>
-          <a:xfrm>
-            <a:off x="7040880" y="1325880"/>
-            <a:ext cx="1234440" cy="502920"/>
-          </a:xfrm>
-          <a:prstGeom prst="roundRect">
-            <a:avLst>
-              <a:gd name="adj" fmla="val 14545"/>
-            </a:avLst>
-          </a:prstGeom>
-          <a:solidFill>
-            <a:srgbClr val="D97706"/>
-          </a:solidFill>
-          <a:ln w="12700">
-            <a:solidFill>
-              <a:srgbClr val="1E293B"/>
-            </a:solidFill>
-            <a:prstDash val="solid"/>
-          </a:ln>
-        </p:spPr>
-      </p:sp>
-      <p:sp>
-        <p:nvSpPr>
-          <p:cNvPr id="24" name="Text 21"/>
-          <p:cNvSpPr/>
-          <p:nvPr/>
-        </p:nvSpPr>
-        <p:spPr>
-          <a:xfrm>
-            <a:off x="7040880" y="1399032"/>
-            <a:ext cx="1234440" cy="365760"/>
-          </a:xfrm>
-          <a:prstGeom prst="rect">
-            <a:avLst/>
-          </a:prstGeom>
-          <a:noFill/>
-          <a:ln/>
-        </p:spPr>
-        <p:txBody>
-          <a:bodyPr wrap="square" rtlCol="0" anchor="ctr"/>
-          <a:lstStyle/>
-          <a:p>
-            <a:pPr algn="ctr" indent="0" marL="0">
-              <a:buNone/>
-            </a:pPr>
-            <a:r>
-              <a:rPr lang="en-US" sz="900" b="1" dirty="0">
-                <a:solidFill>
-                  <a:srgbClr val="FFFFFF"/>
-                </a:solidFill>
-                <a:latin typeface="Calibri" pitchFamily="34" charset="0"/>
-                <a:ea typeface="Calibri" pitchFamily="34" charset="-122"/>
-                <a:cs typeface="Calibri" pitchFamily="34" charset="-120"/>
-              </a:rPr>
-              <a:t>Monitoring</a:t>
-            </a:r>
-            <a:endParaRPr lang="en-US" sz="900" dirty="0"/>
-          </a:p>
-        </p:txBody>
-      </p:sp>
-      <p:sp>
-        <p:nvSpPr>
-          <p:cNvPr id="25" name="Shape 22"/>
-          <p:cNvSpPr/>
-          <p:nvPr/>
-        </p:nvSpPr>
-        <p:spPr>
-          <a:xfrm>
-            <a:off x="2926080" y="2011680"/>
-            <a:ext cx="3291840" cy="411480"/>
-          </a:xfrm>
-          <a:prstGeom prst="arc">
-            <a:avLst/>
-          </a:prstGeom>
-          <a:noFill/>
-          <a:ln w="19050">
-            <a:solidFill>
-              <a:srgbClr val="4EA5D9"/>
-            </a:solidFill>
-            <a:prstDash val="dash"/>
-          </a:ln>
-        </p:spPr>
-      </p:sp>
-      <p:sp>
-        <p:nvSpPr>
-          <p:cNvPr id="26" name="Text 23"/>
-          <p:cNvSpPr/>
-          <p:nvPr/>
-        </p:nvSpPr>
-        <p:spPr>
-          <a:xfrm>
-            <a:off x="2926080" y="2377440"/>
-            <a:ext cx="3291840" cy="274320"/>
-          </a:xfrm>
-          <a:prstGeom prst="rect">
-            <a:avLst/>
-          </a:prstGeom>
-          <a:noFill/>
-          <a:ln/>
-        </p:spPr>
-        <p:txBody>
-          <a:bodyPr wrap="square" rtlCol="0" anchor="ctr"/>
-          <a:lstStyle/>
-          <a:p>
-            <a:pPr algn="ctr" indent="0" marL="0">
-              <a:buNone/>
-            </a:pPr>
-            <a:r>
-              <a:rPr lang="en-US" sz="900" i="1" dirty="0">
-                <a:solidFill>
-                  <a:srgbClr val="64748B"/>
-                </a:solidFill>
-                <a:latin typeface="Calibri" pitchFamily="34" charset="0"/>
-                <a:ea typeface="Calibri" pitchFamily="34" charset="-122"/>
-                <a:cs typeface="Calibri" pitchFamily="34" charset="-120"/>
-              </a:rPr>
-              <a:t>annual reassessment · trend alerts</a:t>
-            </a:r>
-            <a:endParaRPr lang="en-US" sz="900" dirty="0"/>
-          </a:p>
-        </p:txBody>
-      </p:sp>
-      <p:sp>
-        <p:nvSpPr>
-          <p:cNvPr id="27" name="Text 24"/>
-          <p:cNvSpPr/>
-          <p:nvPr/>
-        </p:nvSpPr>
-        <p:spPr>
-          <a:xfrm>
-            <a:off x="502920" y="2697480"/>
-            <a:ext cx="8138160" cy="2331720"/>
+            <a:off x="502920" y="1600200"/>
+            <a:ext cx="8138160" cy="3429000"/>
           </a:xfrm>
           <a:prstGeom prst="rect">
             <a:avLst/>
@@ -8882,7 +9094,7 @@
               <a:buChar char="•"/>
             </a:pPr>
             <a:r>
-              <a:rPr lang="en-US" sz="1200" dirty="0">
+              <a:rPr lang="en-US" sz="1500" dirty="0">
                 <a:solidFill>
                   <a:srgbClr val="1E293B"/>
                 </a:solidFill>
@@ -8890,9 +9102,9 @@
                 <a:ea typeface="Calibri" pitchFamily="34" charset="-122"/>
                 <a:cs typeface="Calibri" pitchFamily="34" charset="-120"/>
               </a:rPr>
-              <a:t>Discovery: branded invitation, secure onboarding, AI-assisted intake</a:t>
+              <a:t>Private by design — encrypted responses, firm-controlled visibility</a:t>
             </a:r>
-            <a:endParaRPr lang="en-US" sz="1200" dirty="0"/>
+            <a:endParaRPr lang="en-US" sz="1500" dirty="0"/>
           </a:p>
           <a:p>
             <a:pPr marL="342900" indent="-342900">
@@ -8903,7 +9115,7 @@
               <a:buChar char="•"/>
             </a:pPr>
             <a:r>
-              <a:rPr lang="en-US" sz="1200" dirty="0">
+              <a:rPr lang="en-US" sz="1500" dirty="0">
                 <a:solidFill>
                   <a:srgbClr val="1E293B"/>
                 </a:solidFill>
@@ -8911,9 +9123,9 @@
                 <a:ea typeface="Calibri" pitchFamily="34" charset="-122"/>
                 <a:cs typeface="Calibri" pitchFamily="34" charset="-120"/>
               </a:rPr>
-              <a:t>Assessment: advisor-scoped pillars (1–10), emphasis weighting</a:t>
+              <a:t>Structured methodology — governed pillars, not a generic survey</a:t>
             </a:r>
-            <a:endParaRPr lang="en-US" sz="1200" dirty="0"/>
+            <a:endParaRPr lang="en-US" sz="1500" dirty="0"/>
           </a:p>
           <a:p>
             <a:pPr marL="342900" indent="-342900">
@@ -8924,7 +9136,7 @@
               <a:buChar char="•"/>
             </a:pPr>
             <a:r>
-              <a:rPr lang="en-US" sz="1200" dirty="0">
+              <a:rPr lang="en-US" sz="1500" dirty="0">
                 <a:solidFill>
                   <a:srgbClr val="1E293B"/>
                 </a:solidFill>
@@ -8932,9 +9144,9 @@
                 <a:ea typeface="Calibri" pitchFamily="34" charset="-122"/>
                 <a:cs typeface="Calibri" pitchFamily="34" charset="-120"/>
               </a:rPr>
-              <a:t>Insights → Recommendations → Action plan → Monitoring</a:t>
+              <a:t>White-label &amp; customizable — branding, subdomain, intake, and methodology overlays</a:t>
             </a:r>
-            <a:endParaRPr lang="en-US" sz="1200" dirty="0"/>
+            <a:endParaRPr lang="en-US" sz="1500" dirty="0"/>
           </a:p>
           <a:p>
             <a:pPr marL="342900" indent="-342900">
@@ -8945,7 +9157,7 @@
               <a:buChar char="•"/>
             </a:pPr>
             <a:r>
-              <a:rPr lang="en-US" sz="1200" dirty="0">
+              <a:rPr lang="en-US" sz="1500" dirty="0">
                 <a:solidFill>
                   <a:srgbClr val="1E293B"/>
                 </a:solidFill>
@@ -8953,9 +9165,30 @@
                 <a:ea typeface="Calibri" pitchFamily="34" charset="-122"/>
                 <a:cs typeface="Calibri" pitchFamily="34" charset="-120"/>
               </a:rPr>
-              <a:t>Typical engagement: 12–15 minutes per pillar</a:t>
+              <a:t>Action-oriented — prioritized risks, recommendations, measurable improvement</a:t>
             </a:r>
-            <a:endParaRPr lang="en-US" sz="1200" dirty="0"/>
+            <a:endParaRPr lang="en-US" sz="1500" dirty="0"/>
+          </a:p>
+          <a:p>
+            <a:pPr marL="342900" indent="-342900">
+              <a:spcAft>
+                <a:spcPts val="800"/>
+              </a:spcAft>
+              <a:buSzPct val="100000"/>
+              <a:buChar char="•"/>
+            </a:pPr>
+            <a:r>
+              <a:rPr lang="en-US" sz="1500" dirty="0">
+                <a:solidFill>
+                  <a:srgbClr val="1E293B"/>
+                </a:solidFill>
+                <a:latin typeface="Calibri" pitchFamily="34" charset="0"/>
+                <a:ea typeface="Calibri" pitchFamily="34" charset="-122"/>
+                <a:cs typeface="Calibri" pitchFamily="34" charset="-120"/>
+              </a:rPr>
+              <a:t>Differentiator: firms deliver governance intelligence as their own — not a resold vendor product</a:t>
+            </a:r>
+            <a:endParaRPr lang="en-US" sz="1500" dirty="0"/>
           </a:p>
         </p:txBody>
       </p:sp>
@@ -9074,7 +9307,7 @@
                 <a:ea typeface="Calibri Light" pitchFamily="34" charset="-122"/>
                 <a:cs typeface="Calibri Light" pitchFamily="34" charset="-120"/>
               </a:rPr>
-              <a:t>Dual Experience</a:t>
+              <a:t>How It Works</a:t>
             </a:r>
             <a:endParaRPr lang="en-US" sz="2800" dirty="0"/>
           </a:p>
@@ -9168,9 +9401,962 @@
           </a:p>
         </p:txBody>
       </p:sp>
+      <p:sp>
+        <p:nvSpPr>
+          <p:cNvPr id="8" name="Shape 5"/>
+          <p:cNvSpPr/>
+          <p:nvPr/>
+        </p:nvSpPr>
+        <p:spPr>
+          <a:xfrm>
+            <a:off x="320040" y="1325880"/>
+            <a:ext cx="1234440" cy="502920"/>
+          </a:xfrm>
+          <a:prstGeom prst="roundRect">
+            <a:avLst>
+              <a:gd name="adj" fmla="val 14545"/>
+            </a:avLst>
+          </a:prstGeom>
+          <a:solidFill>
+            <a:srgbClr val="4EA5D9"/>
+          </a:solidFill>
+          <a:ln w="12700">
+            <a:solidFill>
+              <a:srgbClr val="1E293B"/>
+            </a:solidFill>
+            <a:prstDash val="solid"/>
+          </a:ln>
+        </p:spPr>
+      </p:sp>
+      <p:sp>
+        <p:nvSpPr>
+          <p:cNvPr id="9" name="Text 6"/>
+          <p:cNvSpPr/>
+          <p:nvPr/>
+        </p:nvSpPr>
+        <p:spPr>
+          <a:xfrm>
+            <a:off x="320040" y="1399032"/>
+            <a:ext cx="1234440" cy="365760"/>
+          </a:xfrm>
+          <a:prstGeom prst="rect">
+            <a:avLst/>
+          </a:prstGeom>
+          <a:noFill/>
+          <a:ln/>
+        </p:spPr>
+        <p:txBody>
+          <a:bodyPr wrap="square" rtlCol="0" anchor="ctr"/>
+          <a:lstStyle/>
+          <a:p>
+            <a:pPr algn="ctr" indent="0" marL="0">
+              <a:buNone/>
+            </a:pPr>
+            <a:r>
+              <a:rPr lang="en-US" sz="900" b="1" dirty="0">
+                <a:solidFill>
+                  <a:srgbClr val="FFFFFF"/>
+                </a:solidFill>
+                <a:latin typeface="Calibri" pitchFamily="34" charset="0"/>
+                <a:ea typeface="Calibri" pitchFamily="34" charset="-122"/>
+                <a:cs typeface="Calibri" pitchFamily="34" charset="-120"/>
+              </a:rPr>
+              <a:t>Discovery</a:t>
+            </a:r>
+            <a:endParaRPr lang="en-US" sz="900" dirty="0"/>
+          </a:p>
+        </p:txBody>
+      </p:sp>
+      <p:sp>
+        <p:nvSpPr>
+          <p:cNvPr id="10" name="Text 7"/>
+          <p:cNvSpPr/>
+          <p:nvPr/>
+        </p:nvSpPr>
+        <p:spPr>
+          <a:xfrm>
+            <a:off x="1554480" y="1417320"/>
+            <a:ext cx="109728" cy="320040"/>
+          </a:xfrm>
+          <a:prstGeom prst="rect">
+            <a:avLst/>
+          </a:prstGeom>
+          <a:noFill/>
+          <a:ln/>
+        </p:spPr>
+        <p:txBody>
+          <a:bodyPr wrap="square" rtlCol="0" anchor="ctr"/>
+          <a:lstStyle/>
+          <a:p>
+            <a:pPr algn="ctr" indent="0" marL="0">
+              <a:buNone/>
+            </a:pPr>
+            <a:r>
+              <a:rPr lang="en-US" sz="1200" dirty="0">
+                <a:solidFill>
+                  <a:srgbClr val="64748B"/>
+                </a:solidFill>
+              </a:rPr>
+              <a:t>→</a:t>
+            </a:r>
+            <a:endParaRPr lang="en-US" sz="1200" dirty="0"/>
+          </a:p>
+        </p:txBody>
+      </p:sp>
+      <p:sp>
+        <p:nvSpPr>
+          <p:cNvPr id="11" name="Shape 8"/>
+          <p:cNvSpPr/>
+          <p:nvPr/>
+        </p:nvSpPr>
+        <p:spPr>
+          <a:xfrm>
+            <a:off x="1664208" y="1325880"/>
+            <a:ext cx="1234440" cy="502920"/>
+          </a:xfrm>
+          <a:prstGeom prst="roundRect">
+            <a:avLst>
+              <a:gd name="adj" fmla="val 14545"/>
+            </a:avLst>
+          </a:prstGeom>
+          <a:solidFill>
+            <a:srgbClr val="4EA5D9"/>
+          </a:solidFill>
+          <a:ln w="12700">
+            <a:solidFill>
+              <a:srgbClr val="1E293B"/>
+            </a:solidFill>
+            <a:prstDash val="solid"/>
+          </a:ln>
+        </p:spPr>
+      </p:sp>
+      <p:sp>
+        <p:nvSpPr>
+          <p:cNvPr id="12" name="Text 9"/>
+          <p:cNvSpPr/>
+          <p:nvPr/>
+        </p:nvSpPr>
+        <p:spPr>
+          <a:xfrm>
+            <a:off x="1664208" y="1399032"/>
+            <a:ext cx="1234440" cy="365760"/>
+          </a:xfrm>
+          <a:prstGeom prst="rect">
+            <a:avLst/>
+          </a:prstGeom>
+          <a:noFill/>
+          <a:ln/>
+        </p:spPr>
+        <p:txBody>
+          <a:bodyPr wrap="square" rtlCol="0" anchor="ctr"/>
+          <a:lstStyle/>
+          <a:p>
+            <a:pPr algn="ctr" indent="0" marL="0">
+              <a:buNone/>
+            </a:pPr>
+            <a:r>
+              <a:rPr lang="en-US" sz="900" b="1" dirty="0">
+                <a:solidFill>
+                  <a:srgbClr val="FFFFFF"/>
+                </a:solidFill>
+                <a:latin typeface="Calibri" pitchFamily="34" charset="0"/>
+                <a:ea typeface="Calibri" pitchFamily="34" charset="-122"/>
+                <a:cs typeface="Calibri" pitchFamily="34" charset="-120"/>
+              </a:rPr>
+              <a:t>Assessment</a:t>
+            </a:r>
+            <a:endParaRPr lang="en-US" sz="900" dirty="0"/>
+          </a:p>
+        </p:txBody>
+      </p:sp>
+      <p:sp>
+        <p:nvSpPr>
+          <p:cNvPr id="13" name="Text 10"/>
+          <p:cNvSpPr/>
+          <p:nvPr/>
+        </p:nvSpPr>
+        <p:spPr>
+          <a:xfrm>
+            <a:off x="2898648" y="1417320"/>
+            <a:ext cx="109728" cy="320040"/>
+          </a:xfrm>
+          <a:prstGeom prst="rect">
+            <a:avLst/>
+          </a:prstGeom>
+          <a:noFill/>
+          <a:ln/>
+        </p:spPr>
+        <p:txBody>
+          <a:bodyPr wrap="square" rtlCol="0" anchor="ctr"/>
+          <a:lstStyle/>
+          <a:p>
+            <a:pPr algn="ctr" indent="0" marL="0">
+              <a:buNone/>
+            </a:pPr>
+            <a:r>
+              <a:rPr lang="en-US" sz="1200" dirty="0">
+                <a:solidFill>
+                  <a:srgbClr val="64748B"/>
+                </a:solidFill>
+              </a:rPr>
+              <a:t>→</a:t>
+            </a:r>
+            <a:endParaRPr lang="en-US" sz="1200" dirty="0"/>
+          </a:p>
+        </p:txBody>
+      </p:sp>
+      <p:sp>
+        <p:nvSpPr>
+          <p:cNvPr id="14" name="Shape 11"/>
+          <p:cNvSpPr/>
+          <p:nvPr/>
+        </p:nvSpPr>
+        <p:spPr>
+          <a:xfrm>
+            <a:off x="3008376" y="1325880"/>
+            <a:ext cx="1234440" cy="502920"/>
+          </a:xfrm>
+          <a:prstGeom prst="roundRect">
+            <a:avLst>
+              <a:gd name="adj" fmla="val 14545"/>
+            </a:avLst>
+          </a:prstGeom>
+          <a:solidFill>
+            <a:srgbClr val="4EA5D9"/>
+          </a:solidFill>
+          <a:ln w="12700">
+            <a:solidFill>
+              <a:srgbClr val="1E293B"/>
+            </a:solidFill>
+            <a:prstDash val="solid"/>
+          </a:ln>
+        </p:spPr>
+      </p:sp>
+      <p:sp>
+        <p:nvSpPr>
+          <p:cNvPr id="15" name="Text 12"/>
+          <p:cNvSpPr/>
+          <p:nvPr/>
+        </p:nvSpPr>
+        <p:spPr>
+          <a:xfrm>
+            <a:off x="3008376" y="1399032"/>
+            <a:ext cx="1234440" cy="365760"/>
+          </a:xfrm>
+          <a:prstGeom prst="rect">
+            <a:avLst/>
+          </a:prstGeom>
+          <a:noFill/>
+          <a:ln/>
+        </p:spPr>
+        <p:txBody>
+          <a:bodyPr wrap="square" rtlCol="0" anchor="ctr"/>
+          <a:lstStyle/>
+          <a:p>
+            <a:pPr algn="ctr" indent="0" marL="0">
+              <a:buNone/>
+            </a:pPr>
+            <a:r>
+              <a:rPr lang="en-US" sz="900" b="1" dirty="0">
+                <a:solidFill>
+                  <a:srgbClr val="FFFFFF"/>
+                </a:solidFill>
+                <a:latin typeface="Calibri" pitchFamily="34" charset="0"/>
+                <a:ea typeface="Calibri" pitchFamily="34" charset="-122"/>
+                <a:cs typeface="Calibri" pitchFamily="34" charset="-120"/>
+              </a:rPr>
+              <a:t>Insights</a:t>
+            </a:r>
+            <a:endParaRPr lang="en-US" sz="900" dirty="0"/>
+          </a:p>
+        </p:txBody>
+      </p:sp>
+      <p:sp>
+        <p:nvSpPr>
+          <p:cNvPr id="16" name="Text 13"/>
+          <p:cNvSpPr/>
+          <p:nvPr/>
+        </p:nvSpPr>
+        <p:spPr>
+          <a:xfrm>
+            <a:off x="4242816" y="1417320"/>
+            <a:ext cx="109728" cy="320040"/>
+          </a:xfrm>
+          <a:prstGeom prst="rect">
+            <a:avLst/>
+          </a:prstGeom>
+          <a:noFill/>
+          <a:ln/>
+        </p:spPr>
+        <p:txBody>
+          <a:bodyPr wrap="square" rtlCol="0" anchor="ctr"/>
+          <a:lstStyle/>
+          <a:p>
+            <a:pPr algn="ctr" indent="0" marL="0">
+              <a:buNone/>
+            </a:pPr>
+            <a:r>
+              <a:rPr lang="en-US" sz="1200" dirty="0">
+                <a:solidFill>
+                  <a:srgbClr val="64748B"/>
+                </a:solidFill>
+              </a:rPr>
+              <a:t>→</a:t>
+            </a:r>
+            <a:endParaRPr lang="en-US" sz="1200" dirty="0"/>
+          </a:p>
+        </p:txBody>
+      </p:sp>
+      <p:sp>
+        <p:nvSpPr>
+          <p:cNvPr id="17" name="Shape 14"/>
+          <p:cNvSpPr/>
+          <p:nvPr/>
+        </p:nvSpPr>
+        <p:spPr>
+          <a:xfrm>
+            <a:off x="4352544" y="1325880"/>
+            <a:ext cx="1234440" cy="502920"/>
+          </a:xfrm>
+          <a:prstGeom prst="roundRect">
+            <a:avLst>
+              <a:gd name="adj" fmla="val 14545"/>
+            </a:avLst>
+          </a:prstGeom>
+          <a:solidFill>
+            <a:srgbClr val="4EA5D9"/>
+          </a:solidFill>
+          <a:ln w="12700">
+            <a:solidFill>
+              <a:srgbClr val="1E293B"/>
+            </a:solidFill>
+            <a:prstDash val="solid"/>
+          </a:ln>
+        </p:spPr>
+      </p:sp>
+      <p:sp>
+        <p:nvSpPr>
+          <p:cNvPr id="18" name="Text 15"/>
+          <p:cNvSpPr/>
+          <p:nvPr/>
+        </p:nvSpPr>
+        <p:spPr>
+          <a:xfrm>
+            <a:off x="4352544" y="1399032"/>
+            <a:ext cx="1234440" cy="365760"/>
+          </a:xfrm>
+          <a:prstGeom prst="rect">
+            <a:avLst/>
+          </a:prstGeom>
+          <a:noFill/>
+          <a:ln/>
+        </p:spPr>
+        <p:txBody>
+          <a:bodyPr wrap="square" rtlCol="0" anchor="ctr"/>
+          <a:lstStyle/>
+          <a:p>
+            <a:pPr algn="ctr" indent="0" marL="0">
+              <a:buNone/>
+            </a:pPr>
+            <a:r>
+              <a:rPr lang="en-US" sz="900" b="1" dirty="0">
+                <a:solidFill>
+                  <a:srgbClr val="FFFFFF"/>
+                </a:solidFill>
+                <a:latin typeface="Calibri" pitchFamily="34" charset="0"/>
+                <a:ea typeface="Calibri" pitchFamily="34" charset="-122"/>
+                <a:cs typeface="Calibri" pitchFamily="34" charset="-120"/>
+              </a:rPr>
+              <a:t>Recommendations</a:t>
+            </a:r>
+            <a:endParaRPr lang="en-US" sz="900" dirty="0"/>
+          </a:p>
+        </p:txBody>
+      </p:sp>
+      <p:sp>
+        <p:nvSpPr>
+          <p:cNvPr id="19" name="Text 16"/>
+          <p:cNvSpPr/>
+          <p:nvPr/>
+        </p:nvSpPr>
+        <p:spPr>
+          <a:xfrm>
+            <a:off x="5586984" y="1417320"/>
+            <a:ext cx="109728" cy="320040"/>
+          </a:xfrm>
+          <a:prstGeom prst="rect">
+            <a:avLst/>
+          </a:prstGeom>
+          <a:noFill/>
+          <a:ln/>
+        </p:spPr>
+        <p:txBody>
+          <a:bodyPr wrap="square" rtlCol="0" anchor="ctr"/>
+          <a:lstStyle/>
+          <a:p>
+            <a:pPr algn="ctr" indent="0" marL="0">
+              <a:buNone/>
+            </a:pPr>
+            <a:r>
+              <a:rPr lang="en-US" sz="1200" dirty="0">
+                <a:solidFill>
+                  <a:srgbClr val="64748B"/>
+                </a:solidFill>
+              </a:rPr>
+              <a:t>→</a:t>
+            </a:r>
+            <a:endParaRPr lang="en-US" sz="1200" dirty="0"/>
+          </a:p>
+        </p:txBody>
+      </p:sp>
+      <p:sp>
+        <p:nvSpPr>
+          <p:cNvPr id="20" name="Shape 17"/>
+          <p:cNvSpPr/>
+          <p:nvPr/>
+        </p:nvSpPr>
+        <p:spPr>
+          <a:xfrm>
+            <a:off x="5696712" y="1325880"/>
+            <a:ext cx="1234440" cy="502920"/>
+          </a:xfrm>
+          <a:prstGeom prst="roundRect">
+            <a:avLst>
+              <a:gd name="adj" fmla="val 14545"/>
+            </a:avLst>
+          </a:prstGeom>
+          <a:solidFill>
+            <a:srgbClr val="4EA5D9"/>
+          </a:solidFill>
+          <a:ln w="12700">
+            <a:solidFill>
+              <a:srgbClr val="1E293B"/>
+            </a:solidFill>
+            <a:prstDash val="solid"/>
+          </a:ln>
+        </p:spPr>
+      </p:sp>
+      <p:sp>
+        <p:nvSpPr>
+          <p:cNvPr id="21" name="Text 18"/>
+          <p:cNvSpPr/>
+          <p:nvPr/>
+        </p:nvSpPr>
+        <p:spPr>
+          <a:xfrm>
+            <a:off x="5696712" y="1399032"/>
+            <a:ext cx="1234440" cy="365760"/>
+          </a:xfrm>
+          <a:prstGeom prst="rect">
+            <a:avLst/>
+          </a:prstGeom>
+          <a:noFill/>
+          <a:ln/>
+        </p:spPr>
+        <p:txBody>
+          <a:bodyPr wrap="square" rtlCol="0" anchor="ctr"/>
+          <a:lstStyle/>
+          <a:p>
+            <a:pPr algn="ctr" indent="0" marL="0">
+              <a:buNone/>
+            </a:pPr>
+            <a:r>
+              <a:rPr lang="en-US" sz="900" b="1" dirty="0">
+                <a:solidFill>
+                  <a:srgbClr val="FFFFFF"/>
+                </a:solidFill>
+                <a:latin typeface="Calibri" pitchFamily="34" charset="0"/>
+                <a:ea typeface="Calibri" pitchFamily="34" charset="-122"/>
+                <a:cs typeface="Calibri" pitchFamily="34" charset="-120"/>
+              </a:rPr>
+              <a:t>Action Plan</a:t>
+            </a:r>
+            <a:endParaRPr lang="en-US" sz="900" dirty="0"/>
+          </a:p>
+        </p:txBody>
+      </p:sp>
+      <p:sp>
+        <p:nvSpPr>
+          <p:cNvPr id="22" name="Text 19"/>
+          <p:cNvSpPr/>
+          <p:nvPr/>
+        </p:nvSpPr>
+        <p:spPr>
+          <a:xfrm>
+            <a:off x="6931152" y="1417320"/>
+            <a:ext cx="109728" cy="320040"/>
+          </a:xfrm>
+          <a:prstGeom prst="rect">
+            <a:avLst/>
+          </a:prstGeom>
+          <a:noFill/>
+          <a:ln/>
+        </p:spPr>
+        <p:txBody>
+          <a:bodyPr wrap="square" rtlCol="0" anchor="ctr"/>
+          <a:lstStyle/>
+          <a:p>
+            <a:pPr algn="ctr" indent="0" marL="0">
+              <a:buNone/>
+            </a:pPr>
+            <a:r>
+              <a:rPr lang="en-US" sz="1200" dirty="0">
+                <a:solidFill>
+                  <a:srgbClr val="64748B"/>
+                </a:solidFill>
+              </a:rPr>
+              <a:t>→</a:t>
+            </a:r>
+            <a:endParaRPr lang="en-US" sz="1200" dirty="0"/>
+          </a:p>
+        </p:txBody>
+      </p:sp>
+      <p:sp>
+        <p:nvSpPr>
+          <p:cNvPr id="23" name="Shape 20"/>
+          <p:cNvSpPr/>
+          <p:nvPr/>
+        </p:nvSpPr>
+        <p:spPr>
+          <a:xfrm>
+            <a:off x="7040880" y="1325880"/>
+            <a:ext cx="1234440" cy="502920"/>
+          </a:xfrm>
+          <a:prstGeom prst="roundRect">
+            <a:avLst>
+              <a:gd name="adj" fmla="val 14545"/>
+            </a:avLst>
+          </a:prstGeom>
+          <a:solidFill>
+            <a:srgbClr val="D97706"/>
+          </a:solidFill>
+          <a:ln w="12700">
+            <a:solidFill>
+              <a:srgbClr val="1E293B"/>
+            </a:solidFill>
+            <a:prstDash val="solid"/>
+          </a:ln>
+        </p:spPr>
+      </p:sp>
+      <p:sp>
+        <p:nvSpPr>
+          <p:cNvPr id="24" name="Text 21"/>
+          <p:cNvSpPr/>
+          <p:nvPr/>
+        </p:nvSpPr>
+        <p:spPr>
+          <a:xfrm>
+            <a:off x="7040880" y="1399032"/>
+            <a:ext cx="1234440" cy="365760"/>
+          </a:xfrm>
+          <a:prstGeom prst="rect">
+            <a:avLst/>
+          </a:prstGeom>
+          <a:noFill/>
+          <a:ln/>
+        </p:spPr>
+        <p:txBody>
+          <a:bodyPr wrap="square" rtlCol="0" anchor="ctr"/>
+          <a:lstStyle/>
+          <a:p>
+            <a:pPr algn="ctr" indent="0" marL="0">
+              <a:buNone/>
+            </a:pPr>
+            <a:r>
+              <a:rPr lang="en-US" sz="900" b="1" dirty="0">
+                <a:solidFill>
+                  <a:srgbClr val="FFFFFF"/>
+                </a:solidFill>
+                <a:latin typeface="Calibri" pitchFamily="34" charset="0"/>
+                <a:ea typeface="Calibri" pitchFamily="34" charset="-122"/>
+                <a:cs typeface="Calibri" pitchFamily="34" charset="-120"/>
+              </a:rPr>
+              <a:t>Monitoring</a:t>
+            </a:r>
+            <a:endParaRPr lang="en-US" sz="900" dirty="0"/>
+          </a:p>
+        </p:txBody>
+      </p:sp>
+      <p:sp>
+        <p:nvSpPr>
+          <p:cNvPr id="25" name="Shape 22"/>
+          <p:cNvSpPr/>
+          <p:nvPr/>
+        </p:nvSpPr>
+        <p:spPr>
+          <a:xfrm>
+            <a:off x="2926080" y="2011680"/>
+            <a:ext cx="3291840" cy="411480"/>
+          </a:xfrm>
+          <a:prstGeom prst="arc">
+            <a:avLst/>
+          </a:prstGeom>
+          <a:noFill/>
+          <a:ln w="19050">
+            <a:solidFill>
+              <a:srgbClr val="4EA5D9"/>
+            </a:solidFill>
+            <a:prstDash val="dash"/>
+          </a:ln>
+        </p:spPr>
+      </p:sp>
+      <p:sp>
+        <p:nvSpPr>
+          <p:cNvPr id="26" name="Text 23"/>
+          <p:cNvSpPr/>
+          <p:nvPr/>
+        </p:nvSpPr>
+        <p:spPr>
+          <a:xfrm>
+            <a:off x="2926080" y="2377440"/>
+            <a:ext cx="3291840" cy="274320"/>
+          </a:xfrm>
+          <a:prstGeom prst="rect">
+            <a:avLst/>
+          </a:prstGeom>
+          <a:noFill/>
+          <a:ln/>
+        </p:spPr>
+        <p:txBody>
+          <a:bodyPr wrap="square" rtlCol="0" anchor="ctr"/>
+          <a:lstStyle/>
+          <a:p>
+            <a:pPr algn="ctr" indent="0" marL="0">
+              <a:buNone/>
+            </a:pPr>
+            <a:r>
+              <a:rPr lang="en-US" sz="900" i="1" dirty="0">
+                <a:solidFill>
+                  <a:srgbClr val="64748B"/>
+                </a:solidFill>
+                <a:latin typeface="Calibri" pitchFamily="34" charset="0"/>
+                <a:ea typeface="Calibri" pitchFamily="34" charset="-122"/>
+                <a:cs typeface="Calibri" pitchFamily="34" charset="-120"/>
+              </a:rPr>
+              <a:t>annual reassessment · trend alerts</a:t>
+            </a:r>
+            <a:endParaRPr lang="en-US" sz="900" dirty="0"/>
+          </a:p>
+        </p:txBody>
+      </p:sp>
+      <p:sp>
+        <p:nvSpPr>
+          <p:cNvPr id="27" name="Text 24"/>
+          <p:cNvSpPr/>
+          <p:nvPr/>
+        </p:nvSpPr>
+        <p:spPr>
+          <a:xfrm>
+            <a:off x="502920" y="2697480"/>
+            <a:ext cx="8138160" cy="2331720"/>
+          </a:xfrm>
+          <a:prstGeom prst="rect">
+            <a:avLst/>
+          </a:prstGeom>
+          <a:noFill/>
+          <a:ln/>
+        </p:spPr>
+        <p:txBody>
+          <a:bodyPr wrap="square" rtlCol="0" anchor="t"/>
+          <a:lstStyle/>
+          <a:p>
+            <a:pPr marL="342900" indent="-342900">
+              <a:spcAft>
+                <a:spcPts val="800"/>
+              </a:spcAft>
+              <a:buSzPct val="100000"/>
+              <a:buChar char="•"/>
+            </a:pPr>
+            <a:r>
+              <a:rPr lang="en-US" sz="1200" dirty="0">
+                <a:solidFill>
+                  <a:srgbClr val="1E293B"/>
+                </a:solidFill>
+                <a:latin typeface="Calibri" pitchFamily="34" charset="0"/>
+                <a:ea typeface="Calibri" pitchFamily="34" charset="-122"/>
+                <a:cs typeface="Calibri" pitchFamily="34" charset="-120"/>
+              </a:rPr>
+              <a:t>Discovery: branded invitation, secure onboarding, AI-assisted intake</a:t>
+            </a:r>
+            <a:endParaRPr lang="en-US" sz="1200" dirty="0"/>
+          </a:p>
+          <a:p>
+            <a:pPr marL="342900" indent="-342900">
+              <a:spcAft>
+                <a:spcPts val="800"/>
+              </a:spcAft>
+              <a:buSzPct val="100000"/>
+              <a:buChar char="•"/>
+            </a:pPr>
+            <a:r>
+              <a:rPr lang="en-US" sz="1200" dirty="0">
+                <a:solidFill>
+                  <a:srgbClr val="1E293B"/>
+                </a:solidFill>
+                <a:latin typeface="Calibri" pitchFamily="34" charset="0"/>
+                <a:ea typeface="Calibri" pitchFamily="34" charset="-122"/>
+                <a:cs typeface="Calibri" pitchFamily="34" charset="-120"/>
+              </a:rPr>
+              <a:t>Assessment: firm-scoped pillars (1–10), emphasis weighting</a:t>
+            </a:r>
+            <a:endParaRPr lang="en-US" sz="1200" dirty="0"/>
+          </a:p>
+          <a:p>
+            <a:pPr marL="342900" indent="-342900">
+              <a:spcAft>
+                <a:spcPts val="800"/>
+              </a:spcAft>
+              <a:buSzPct val="100000"/>
+              <a:buChar char="•"/>
+            </a:pPr>
+            <a:r>
+              <a:rPr lang="en-US" sz="1200" dirty="0">
+                <a:solidFill>
+                  <a:srgbClr val="1E293B"/>
+                </a:solidFill>
+                <a:latin typeface="Calibri" pitchFamily="34" charset="0"/>
+                <a:ea typeface="Calibri" pitchFamily="34" charset="-122"/>
+                <a:cs typeface="Calibri" pitchFamily="34" charset="-120"/>
+              </a:rPr>
+              <a:t>Insights → Recommendations → Action plan → Monitoring → Reassessment</a:t>
+            </a:r>
+            <a:endParaRPr lang="en-US" sz="1200" dirty="0"/>
+          </a:p>
+          <a:p>
+            <a:pPr marL="342900" indent="-342900">
+              <a:spcAft>
+                <a:spcPts val="800"/>
+              </a:spcAft>
+              <a:buSzPct val="100000"/>
+              <a:buChar char="•"/>
+            </a:pPr>
+            <a:r>
+              <a:rPr lang="en-US" sz="1200" dirty="0">
+                <a:solidFill>
+                  <a:srgbClr val="1E293B"/>
+                </a:solidFill>
+                <a:latin typeface="Calibri" pitchFamily="34" charset="0"/>
+                <a:ea typeface="Calibri" pitchFamily="34" charset="-122"/>
+                <a:cs typeface="Calibri" pitchFamily="34" charset="-120"/>
+              </a:rPr>
+              <a:t>Typical engagement: 12–15 minutes per pillar</a:t>
+            </a:r>
+            <a:endParaRPr lang="en-US" sz="1200" dirty="0"/>
+          </a:p>
+        </p:txBody>
+      </p:sp>
+    </p:spTree>
+  </p:cSld>
+  <p:clrMapOvr>
+    <a:masterClrMapping/>
+  </p:clrMapOvr>
+</p:sld>
+</file>
+
+<file path=ppt/slides/slide7.xml><?xml version="1.0" encoding="utf-8"?>
+<p:sld xmlns:a="http://schemas.openxmlformats.org/drawingml/2006/main" xmlns:r="http://schemas.openxmlformats.org/officeDocument/2006/relationships" xmlns:p="http://schemas.openxmlformats.org/presentationml/2006/main">
+  <p:cSld name="Slide 7">
+    <p:bg>
+      <p:bgPr>
+        <a:solidFill>
+          <a:srgbClr val="FFFFFF"/>
+        </a:solidFill>
+      </p:bgPr>
+    </p:bg>
+    <p:spTree>
+      <p:nvGrpSpPr>
+        <p:cNvPr id="1" name=""/>
+        <p:cNvGrpSpPr/>
+        <p:nvPr/>
+      </p:nvGrpSpPr>
+      <p:grpSpPr>
+        <a:xfrm>
+          <a:off x="0" y="0"/>
+          <a:ext cx="0" cy="0"/>
+          <a:chOff x="0" y="0"/>
+          <a:chExt cx="0" cy="0"/>
+        </a:xfrm>
+      </p:grpSpPr>
+      <p:sp>
+        <p:nvSpPr>
+          <p:cNvPr id="2" name="Shape 0"/>
+          <p:cNvSpPr/>
+          <p:nvPr/>
+        </p:nvSpPr>
+        <p:spPr>
+          <a:xfrm>
+            <a:off x="0" y="0"/>
+            <a:ext cx="9144000" cy="73152"/>
+          </a:xfrm>
+          <a:prstGeom prst="rect">
+            <a:avLst/>
+          </a:prstGeom>
+          <a:solidFill>
+            <a:srgbClr val="4EA5D9"/>
+          </a:solidFill>
+          <a:ln w="12700">
+            <a:solidFill>
+              <a:srgbClr val="4EA5D9"/>
+            </a:solidFill>
+            <a:prstDash val="solid"/>
+          </a:ln>
+        </p:spPr>
+      </p:sp>
+      <p:sp>
+        <p:nvSpPr>
+          <p:cNvPr id="3" name="Shape 1"/>
+          <p:cNvSpPr/>
+          <p:nvPr/>
+        </p:nvSpPr>
+        <p:spPr>
+          <a:xfrm>
+            <a:off x="320040" y="502920"/>
+            <a:ext cx="54864" cy="502920"/>
+          </a:xfrm>
+          <a:prstGeom prst="rect">
+            <a:avLst/>
+          </a:prstGeom>
+          <a:solidFill>
+            <a:srgbClr val="D97706"/>
+          </a:solidFill>
+          <a:ln w="12700">
+            <a:solidFill>
+              <a:srgbClr val="D97706"/>
+            </a:solidFill>
+            <a:prstDash val="solid"/>
+          </a:ln>
+        </p:spPr>
+      </p:sp>
+      <p:sp>
+        <p:nvSpPr>
+          <p:cNvPr id="4" name="Text 2"/>
+          <p:cNvSpPr/>
+          <p:nvPr/>
+        </p:nvSpPr>
+        <p:spPr>
+          <a:xfrm>
+            <a:off x="502920" y="411480"/>
+            <a:ext cx="8138160" cy="685800"/>
+          </a:xfrm>
+          <a:prstGeom prst="rect">
+            <a:avLst/>
+          </a:prstGeom>
+          <a:noFill/>
+          <a:ln/>
+        </p:spPr>
+        <p:txBody>
+          <a:bodyPr wrap="square" rtlCol="0" anchor="t"/>
+          <a:lstStyle/>
+          <a:p>
+            <a:pPr indent="0" marL="0">
+              <a:buNone/>
+            </a:pPr>
+            <a:r>
+              <a:rPr lang="en-US" sz="2800" b="1" dirty="0">
+                <a:solidFill>
+                  <a:srgbClr val="1E293B"/>
+                </a:solidFill>
+                <a:latin typeface="Calibri Light" pitchFamily="34" charset="0"/>
+                <a:ea typeface="Calibri Light" pitchFamily="34" charset="-122"/>
+                <a:cs typeface="Calibri Light" pitchFamily="34" charset="-120"/>
+              </a:rPr>
+              <a:t>Dual Experience</a:t>
+            </a:r>
+            <a:endParaRPr lang="en-US" sz="2800" dirty="0"/>
+          </a:p>
+        </p:txBody>
+      </p:sp>
+      <p:sp>
+        <p:nvSpPr>
+          <p:cNvPr id="5" name="Shape 3"/>
+          <p:cNvSpPr/>
+          <p:nvPr/>
+        </p:nvSpPr>
+        <p:spPr>
+          <a:xfrm>
+            <a:off x="0" y="4709160"/>
+            <a:ext cx="9144000" cy="320040"/>
+          </a:xfrm>
+          <a:prstGeom prst="rect">
+            <a:avLst/>
+          </a:prstGeom>
+          <a:solidFill>
+            <a:srgbClr val="F8FAFC"/>
+          </a:solidFill>
+          <a:ln w="12700">
+            <a:solidFill>
+              <a:srgbClr val="F8FAFC"/>
+            </a:solidFill>
+            <a:prstDash val="solid"/>
+          </a:ln>
+        </p:spPr>
+      </p:sp>
+      <p:pic>
+        <p:nvPicPr>
+          <p:cNvPr id="6" name="Image 0" descr="/Users/bwoodtalton/Projects/AkiliRisk/logo/akili-horizontal-compact.png">    </p:cNvPr>
+          <p:cNvPicPr>
+            <a:picLocks noChangeAspect="1"/>
+          </p:cNvPicPr>
+          <p:nvPr/>
+        </p:nvPicPr>
+        <p:blipFill>
+          <a:blip r:embed="rId1"/>
+          <a:stretch>
+            <a:fillRect/>
+          </a:stretch>
+        </p:blipFill>
+        <p:spPr>
+          <a:xfrm>
+            <a:off x="320040" y="4754880"/>
+            <a:ext cx="1234440" cy="256032"/>
+          </a:xfrm>
+          <a:prstGeom prst="rect">
+            <a:avLst/>
+          </a:prstGeom>
+        </p:spPr>
+      </p:pic>
+      <p:sp>
+        <p:nvSpPr>
+          <p:cNvPr id="7" name="Text 4"/>
+          <p:cNvSpPr/>
+          <p:nvPr/>
+        </p:nvSpPr>
+        <p:spPr>
+          <a:xfrm>
+            <a:off x="7498080" y="4773168"/>
+            <a:ext cx="1280160" cy="228600"/>
+          </a:xfrm>
+          <a:prstGeom prst="rect">
+            <a:avLst/>
+          </a:prstGeom>
+          <a:noFill/>
+          <a:ln/>
+        </p:spPr>
+        <p:txBody>
+          <a:bodyPr wrap="square" rtlCol="0" anchor="ctr"/>
+          <a:lstStyle/>
+          <a:p>
+            <a:pPr algn="r" indent="0" marL="0">
+              <a:buNone/>
+            </a:pPr>
+            <a:r>
+              <a:rPr lang="en-US" sz="900" dirty="0">
+                <a:solidFill>
+                  <a:srgbClr val="64748B"/>
+                </a:solidFill>
+                <a:latin typeface="Calibri" pitchFamily="34" charset="0"/>
+                <a:ea typeface="Calibri" pitchFamily="34" charset="-122"/>
+                <a:cs typeface="Calibri" pitchFamily="34" charset="-120"/>
+              </a:rPr>
+              <a:t>akilirisk.com</a:t>
+            </a:r>
+            <a:endParaRPr lang="en-US" sz="900" dirty="0"/>
+          </a:p>
+        </p:txBody>
+      </p:sp>
       <p:graphicFrame>
         <p:nvGraphicFramePr>
-          <p:cNvPr id="7" name="Table 0"/>
+          <p:cNvPr id="8" name="Table 0"/>
           <p:cNvGraphicFramePr>
             <a:graphicFrameLocks noGrp="1"/>
           </p:cNvGraphicFramePr>
@@ -9212,7 +10398,7 @@
                           <a:ea typeface="Calibri" pitchFamily="34" charset="-122"/>
                           <a:cs typeface="Calibri" pitchFamily="34" charset="-120"/>
                         </a:rPr>
-                        <a:t>Advisors</a:t>
+                        <a:t>Professional firms</a:t>
                       </a:r>
                       <a:endParaRPr lang="en-US" sz="1100" dirty="0">
                         <a:latin typeface="Calibri" charset="0"/>
@@ -9832,7 +11018,7 @@
                           <a:ea typeface="Calibri" pitchFamily="34" charset="-122"/>
                           <a:cs typeface="Calibri" pitchFamily="34" charset="-120"/>
                         </a:rPr>
-                        <a:t>Documents, policies, advisor visibility</a:t>
+                        <a:t>Documents, policies, firm visibility</a:t>
                       </a:r>
                       <a:endParaRPr lang="en-US" sz="1000" dirty="0">
                         <a:latin typeface="Calibri" charset="0"/>
@@ -9888,1225 +11074,6 @@
           </a:graphicData>
         </a:graphic>
       </p:graphicFrame>
-    </p:spTree>
-  </p:cSld>
-  <p:clrMapOvr>
-    <a:masterClrMapping/>
-  </p:clrMapOvr>
-</p:sld>
-</file>
-
-<file path=ppt/slides/slide7.xml><?xml version="1.0" encoding="utf-8"?>
-<p:sld xmlns:a="http://schemas.openxmlformats.org/drawingml/2006/main" xmlns:r="http://schemas.openxmlformats.org/officeDocument/2006/relationships" xmlns:p="http://schemas.openxmlformats.org/presentationml/2006/main">
-  <p:cSld name="Slide 7">
-    <p:bg>
-      <p:bgPr>
-        <a:solidFill>
-          <a:srgbClr val="FFFFFF"/>
-        </a:solidFill>
-      </p:bgPr>
-    </p:bg>
-    <p:spTree>
-      <p:nvGrpSpPr>
-        <p:cNvPr id="1" name=""/>
-        <p:cNvGrpSpPr/>
-        <p:nvPr/>
-      </p:nvGrpSpPr>
-      <p:grpSpPr>
-        <a:xfrm>
-          <a:off x="0" y="0"/>
-          <a:ext cx="0" cy="0"/>
-          <a:chOff x="0" y="0"/>
-          <a:chExt cx="0" cy="0"/>
-        </a:xfrm>
-      </p:grpSpPr>
-      <p:sp>
-        <p:nvSpPr>
-          <p:cNvPr id="2" name="Shape 0"/>
-          <p:cNvSpPr/>
-          <p:nvPr/>
-        </p:nvSpPr>
-        <p:spPr>
-          <a:xfrm>
-            <a:off x="0" y="0"/>
-            <a:ext cx="9144000" cy="73152"/>
-          </a:xfrm>
-          <a:prstGeom prst="rect">
-            <a:avLst/>
-          </a:prstGeom>
-          <a:solidFill>
-            <a:srgbClr val="4EA5D9"/>
-          </a:solidFill>
-          <a:ln w="12700">
-            <a:solidFill>
-              <a:srgbClr val="4EA5D9"/>
-            </a:solidFill>
-            <a:prstDash val="solid"/>
-          </a:ln>
-        </p:spPr>
-      </p:sp>
-      <p:sp>
-        <p:nvSpPr>
-          <p:cNvPr id="3" name="Shape 1"/>
-          <p:cNvSpPr/>
-          <p:nvPr/>
-        </p:nvSpPr>
-        <p:spPr>
-          <a:xfrm>
-            <a:off x="320040" y="502920"/>
-            <a:ext cx="54864" cy="502920"/>
-          </a:xfrm>
-          <a:prstGeom prst="rect">
-            <a:avLst/>
-          </a:prstGeom>
-          <a:solidFill>
-            <a:srgbClr val="D97706"/>
-          </a:solidFill>
-          <a:ln w="12700">
-            <a:solidFill>
-              <a:srgbClr val="D97706"/>
-            </a:solidFill>
-            <a:prstDash val="solid"/>
-          </a:ln>
-        </p:spPr>
-      </p:sp>
-      <p:sp>
-        <p:nvSpPr>
-          <p:cNvPr id="4" name="Text 2"/>
-          <p:cNvSpPr/>
-          <p:nvPr/>
-        </p:nvSpPr>
-        <p:spPr>
-          <a:xfrm>
-            <a:off x="502920" y="411480"/>
-            <a:ext cx="8138160" cy="685800"/>
-          </a:xfrm>
-          <a:prstGeom prst="rect">
-            <a:avLst/>
-          </a:prstGeom>
-          <a:noFill/>
-          <a:ln/>
-        </p:spPr>
-        <p:txBody>
-          <a:bodyPr wrap="square" rtlCol="0" anchor="t"/>
-          <a:lstStyle/>
-          <a:p>
-            <a:pPr indent="0" marL="0">
-              <a:buNone/>
-            </a:pPr>
-            <a:r>
-              <a:rPr lang="en-US" sz="2800" b="1" dirty="0">
-                <a:solidFill>
-                  <a:srgbClr val="1E293B"/>
-                </a:solidFill>
-                <a:latin typeface="Calibri Light" pitchFamily="34" charset="0"/>
-                <a:ea typeface="Calibri Light" pitchFamily="34" charset="-122"/>
-                <a:cs typeface="Calibri Light" pitchFamily="34" charset="-120"/>
-              </a:rPr>
-              <a:t>10-Pillar Framework</a:t>
-            </a:r>
-            <a:endParaRPr lang="en-US" sz="2800" dirty="0"/>
-          </a:p>
-        </p:txBody>
-      </p:sp>
-      <p:sp>
-        <p:nvSpPr>
-          <p:cNvPr id="5" name="Text 3"/>
-          <p:cNvSpPr/>
-          <p:nvPr/>
-        </p:nvSpPr>
-        <p:spPr>
-          <a:xfrm>
-            <a:off x="502920" y="1051560"/>
-            <a:ext cx="8138160" cy="365760"/>
-          </a:xfrm>
-          <a:prstGeom prst="rect">
-            <a:avLst/>
-          </a:prstGeom>
-          <a:noFill/>
-          <a:ln/>
-        </p:spPr>
-        <p:txBody>
-          <a:bodyPr wrap="square" rtlCol="0" anchor="ctr"/>
-          <a:lstStyle/>
-          <a:p>
-            <a:pPr indent="0" marL="0">
-              <a:buNone/>
-            </a:pPr>
-            <a:r>
-              <a:rPr lang="en-US" sz="1400" i="1" dirty="0">
-                <a:solidFill>
-                  <a:srgbClr val="64748B"/>
-                </a:solidFill>
-                <a:latin typeface="Calibri" pitchFamily="34" charset="0"/>
-                <a:ea typeface="Calibri" pitchFamily="34" charset="-122"/>
-                <a:cs typeface="Calibri" pitchFamily="34" charset="-120"/>
-              </a:rPr>
-              <a:t>Shipped today. Ten domains. One household profile.</a:t>
-            </a:r>
-            <a:endParaRPr lang="en-US" sz="1400" dirty="0"/>
-          </a:p>
-        </p:txBody>
-      </p:sp>
-      <p:sp>
-        <p:nvSpPr>
-          <p:cNvPr id="6" name="Shape 4"/>
-          <p:cNvSpPr/>
-          <p:nvPr/>
-        </p:nvSpPr>
-        <p:spPr>
-          <a:xfrm>
-            <a:off x="0" y="4709160"/>
-            <a:ext cx="9144000" cy="320040"/>
-          </a:xfrm>
-          <a:prstGeom prst="rect">
-            <a:avLst/>
-          </a:prstGeom>
-          <a:solidFill>
-            <a:srgbClr val="F8FAFC"/>
-          </a:solidFill>
-          <a:ln w="12700">
-            <a:solidFill>
-              <a:srgbClr val="F8FAFC"/>
-            </a:solidFill>
-            <a:prstDash val="solid"/>
-          </a:ln>
-        </p:spPr>
-      </p:sp>
-      <p:pic>
-        <p:nvPicPr>
-          <p:cNvPr id="7" name="Image 0" descr="/Users/bwoodtalton/Projects/AkiliRisk/logo/akili-horizontal-compact.png">    </p:cNvPr>
-          <p:cNvPicPr>
-            <a:picLocks noChangeAspect="1"/>
-          </p:cNvPicPr>
-          <p:nvPr/>
-        </p:nvPicPr>
-        <p:blipFill>
-          <a:blip r:embed="rId1"/>
-          <a:stretch>
-            <a:fillRect/>
-          </a:stretch>
-        </p:blipFill>
-        <p:spPr>
-          <a:xfrm>
-            <a:off x="320040" y="4754880"/>
-            <a:ext cx="1234440" cy="256032"/>
-          </a:xfrm>
-          <a:prstGeom prst="rect">
-            <a:avLst/>
-          </a:prstGeom>
-        </p:spPr>
-      </p:pic>
-      <p:sp>
-        <p:nvSpPr>
-          <p:cNvPr id="8" name="Text 5"/>
-          <p:cNvSpPr/>
-          <p:nvPr/>
-        </p:nvSpPr>
-        <p:spPr>
-          <a:xfrm>
-            <a:off x="7498080" y="4773168"/>
-            <a:ext cx="1280160" cy="228600"/>
-          </a:xfrm>
-          <a:prstGeom prst="rect">
-            <a:avLst/>
-          </a:prstGeom>
-          <a:noFill/>
-          <a:ln/>
-        </p:spPr>
-        <p:txBody>
-          <a:bodyPr wrap="square" rtlCol="0" anchor="ctr"/>
-          <a:lstStyle/>
-          <a:p>
-            <a:pPr algn="r" indent="0" marL="0">
-              <a:buNone/>
-            </a:pPr>
-            <a:r>
-              <a:rPr lang="en-US" sz="900" dirty="0">
-                <a:solidFill>
-                  <a:srgbClr val="64748B"/>
-                </a:solidFill>
-                <a:latin typeface="Calibri" pitchFamily="34" charset="0"/>
-                <a:ea typeface="Calibri" pitchFamily="34" charset="-122"/>
-                <a:cs typeface="Calibri" pitchFamily="34" charset="-120"/>
-              </a:rPr>
-              <a:t>akilirisk.com</a:t>
-            </a:r>
-            <a:endParaRPr lang="en-US" sz="900" dirty="0"/>
-          </a:p>
-        </p:txBody>
-      </p:sp>
-      <p:sp>
-        <p:nvSpPr>
-          <p:cNvPr id="9" name="Shape 6"/>
-          <p:cNvSpPr/>
-          <p:nvPr/>
-        </p:nvSpPr>
-        <p:spPr>
-          <a:xfrm>
-            <a:off x="3703320" y="2148840"/>
-            <a:ext cx="1737360" cy="1737360"/>
-          </a:xfrm>
-          <a:prstGeom prst="ellipse">
-            <a:avLst/>
-          </a:prstGeom>
-          <a:solidFill>
-            <a:srgbClr val="1E293B"/>
-          </a:solidFill>
-          <a:ln w="25400">
-            <a:solidFill>
-              <a:srgbClr val="4EA5D9"/>
-            </a:solidFill>
-            <a:prstDash val="solid"/>
-          </a:ln>
-        </p:spPr>
-      </p:sp>
-      <p:sp>
-        <p:nvSpPr>
-          <p:cNvPr id="10" name="Text 7"/>
-          <p:cNvSpPr/>
-          <p:nvPr/>
-        </p:nvSpPr>
-        <p:spPr>
-          <a:xfrm>
-            <a:off x="3703320" y="2514600"/>
-            <a:ext cx="1737360" cy="1005840"/>
-          </a:xfrm>
-          <a:prstGeom prst="rect">
-            <a:avLst/>
-          </a:prstGeom>
-          <a:noFill/>
-          <a:ln/>
-        </p:spPr>
-        <p:txBody>
-          <a:bodyPr wrap="square" rtlCol="0" anchor="ctr"/>
-          <a:lstStyle/>
-          <a:p>
-            <a:pPr algn="ctr" indent="0" marL="0">
-              <a:buNone/>
-            </a:pPr>
-            <a:r>
-              <a:rPr lang="en-US" sz="1600" b="1" dirty="0">
-                <a:solidFill>
-                  <a:srgbClr val="FFFFFF"/>
-                </a:solidFill>
-                <a:latin typeface="Calibri" pitchFamily="34" charset="0"/>
-                <a:ea typeface="Calibri" pitchFamily="34" charset="-122"/>
-                <a:cs typeface="Calibri" pitchFamily="34" charset="-120"/>
-              </a:rPr>
-              <a:t>10</a:t>
-            </a:r>
-            <a:endParaRPr lang="en-US" sz="1600" dirty="0"/>
-          </a:p>
-          <a:p>
-            <a:pPr algn="ctr" indent="0" marL="0">
-              <a:buNone/>
-            </a:pPr>
-            <a:r>
-              <a:rPr lang="en-US" sz="1600" b="1" dirty="0">
-                <a:solidFill>
-                  <a:srgbClr val="FFFFFF"/>
-                </a:solidFill>
-                <a:latin typeface="Calibri" pitchFamily="34" charset="0"/>
-                <a:ea typeface="Calibri" pitchFamily="34" charset="-122"/>
-                <a:cs typeface="Calibri" pitchFamily="34" charset="-120"/>
-              </a:rPr>
-              <a:t>Pillars</a:t>
-            </a:r>
-            <a:endParaRPr lang="en-US" sz="1600" dirty="0"/>
-          </a:p>
-        </p:txBody>
-      </p:sp>
-      <p:sp>
-        <p:nvSpPr>
-          <p:cNvPr id="11" name="Shape 8"/>
-          <p:cNvSpPr/>
-          <p:nvPr/>
-        </p:nvSpPr>
-        <p:spPr>
-          <a:xfrm>
-            <a:off x="4069080" y="667512"/>
-            <a:ext cx="1005840" cy="402336"/>
-          </a:xfrm>
-          <a:prstGeom prst="roundRect">
-            <a:avLst>
-              <a:gd name="adj" fmla="val 11364"/>
-            </a:avLst>
-          </a:prstGeom>
-          <a:solidFill>
-            <a:srgbClr val="4EA5D9"/>
-          </a:solidFill>
-          <a:ln w="9525">
-            <a:solidFill>
-              <a:srgbClr val="4EA5D9"/>
-            </a:solidFill>
-            <a:prstDash val="solid"/>
-          </a:ln>
-        </p:spPr>
-      </p:sp>
-      <p:sp>
-        <p:nvSpPr>
-          <p:cNvPr id="12" name="Text 9"/>
-          <p:cNvSpPr/>
-          <p:nvPr/>
-        </p:nvSpPr>
-        <p:spPr>
-          <a:xfrm>
-            <a:off x="4069080" y="722376"/>
-            <a:ext cx="1005840" cy="292608"/>
-          </a:xfrm>
-          <a:prstGeom prst="rect">
-            <a:avLst/>
-          </a:prstGeom>
-          <a:noFill/>
-          <a:ln/>
-        </p:spPr>
-        <p:txBody>
-          <a:bodyPr wrap="square" rtlCol="0" anchor="ctr"/>
-          <a:lstStyle/>
-          <a:p>
-            <a:pPr algn="ctr" indent="0" marL="0">
-              <a:buNone/>
-            </a:pPr>
-            <a:r>
-              <a:rPr lang="en-US" sz="650" b="1" dirty="0">
-                <a:solidFill>
-                  <a:srgbClr val="FFFFFF"/>
-                </a:solidFill>
-                <a:latin typeface="Calibri" pitchFamily="34" charset="0"/>
-                <a:ea typeface="Calibri" pitchFamily="34" charset="-122"/>
-                <a:cs typeface="Calibri" pitchFamily="34" charset="-120"/>
-              </a:rPr>
-              <a:t>Governance</a:t>
-            </a:r>
-            <a:endParaRPr lang="en-US" sz="650" dirty="0"/>
-          </a:p>
-        </p:txBody>
-      </p:sp>
-      <p:sp>
-        <p:nvSpPr>
-          <p:cNvPr id="13" name="Shape 10"/>
-          <p:cNvSpPr/>
-          <p:nvPr/>
-        </p:nvSpPr>
-        <p:spPr>
-          <a:xfrm>
-            <a:off x="4572000" y="3017520"/>
-            <a:ext cx="0" cy="-2148840"/>
-          </a:xfrm>
-          <a:prstGeom prst="line">
-            <a:avLst/>
-          </a:prstGeom>
-          <a:noFill/>
-          <a:ln w="9525">
-            <a:solidFill>
-              <a:srgbClr val="E2E8F0"/>
-            </a:solidFill>
-            <a:prstDash val="solid"/>
-          </a:ln>
-        </p:spPr>
-      </p:sp>
-      <p:sp>
-        <p:nvSpPr>
-          <p:cNvPr id="14" name="Shape 11"/>
-          <p:cNvSpPr/>
-          <p:nvPr/>
-        </p:nvSpPr>
-        <p:spPr>
-          <a:xfrm>
-            <a:off x="5332136" y="1077904"/>
-            <a:ext cx="1005840" cy="402336"/>
-          </a:xfrm>
-          <a:prstGeom prst="roundRect">
-            <a:avLst>
-              <a:gd name="adj" fmla="val 11364"/>
-            </a:avLst>
-          </a:prstGeom>
-          <a:solidFill>
-            <a:srgbClr val="F8FAFC"/>
-          </a:solidFill>
-          <a:ln w="9525">
-            <a:solidFill>
-              <a:srgbClr val="4EA5D9"/>
-            </a:solidFill>
-            <a:prstDash val="solid"/>
-          </a:ln>
-        </p:spPr>
-      </p:sp>
-      <p:sp>
-        <p:nvSpPr>
-          <p:cNvPr id="15" name="Text 12"/>
-          <p:cNvSpPr/>
-          <p:nvPr/>
-        </p:nvSpPr>
-        <p:spPr>
-          <a:xfrm>
-            <a:off x="5332136" y="1132768"/>
-            <a:ext cx="1005840" cy="292608"/>
-          </a:xfrm>
-          <a:prstGeom prst="rect">
-            <a:avLst/>
-          </a:prstGeom>
-          <a:noFill/>
-          <a:ln/>
-        </p:spPr>
-        <p:txBody>
-          <a:bodyPr wrap="square" rtlCol="0" anchor="ctr"/>
-          <a:lstStyle/>
-          <a:p>
-            <a:pPr algn="ctr" indent="0" marL="0">
-              <a:buNone/>
-            </a:pPr>
-            <a:r>
-              <a:rPr lang="en-US" sz="650" b="1" dirty="0">
-                <a:solidFill>
-                  <a:srgbClr val="1E293B"/>
-                </a:solidFill>
-                <a:latin typeface="Calibri" pitchFamily="34" charset="0"/>
-                <a:ea typeface="Calibri" pitchFamily="34" charset="-122"/>
-                <a:cs typeface="Calibri" pitchFamily="34" charset="-120"/>
-              </a:rPr>
-              <a:t>Cyber &amp; Digital</a:t>
-            </a:r>
-            <a:endParaRPr lang="en-US" sz="650" dirty="0"/>
-          </a:p>
-        </p:txBody>
-      </p:sp>
-      <p:sp>
-        <p:nvSpPr>
-          <p:cNvPr id="16" name="Shape 13"/>
-          <p:cNvSpPr/>
-          <p:nvPr/>
-        </p:nvSpPr>
-        <p:spPr>
-          <a:xfrm>
-            <a:off x="4572000" y="3017520"/>
-            <a:ext cx="1263056" cy="-1738448"/>
-          </a:xfrm>
-          <a:prstGeom prst="line">
-            <a:avLst/>
-          </a:prstGeom>
-          <a:noFill/>
-          <a:ln w="9525">
-            <a:solidFill>
-              <a:srgbClr val="E2E8F0"/>
-            </a:solidFill>
-            <a:prstDash val="solid"/>
-          </a:ln>
-        </p:spPr>
-      </p:sp>
-      <p:sp>
-        <p:nvSpPr>
-          <p:cNvPr id="17" name="Shape 14"/>
-          <p:cNvSpPr/>
-          <p:nvPr/>
-        </p:nvSpPr>
-        <p:spPr>
-          <a:xfrm>
-            <a:off x="6112748" y="2152324"/>
-            <a:ext cx="1005840" cy="402336"/>
-          </a:xfrm>
-          <a:prstGeom prst="roundRect">
-            <a:avLst>
-              <a:gd name="adj" fmla="val 11364"/>
-            </a:avLst>
-          </a:prstGeom>
-          <a:solidFill>
-            <a:srgbClr val="4EA5D9"/>
-          </a:solidFill>
-          <a:ln w="9525">
-            <a:solidFill>
-              <a:srgbClr val="4EA5D9"/>
-            </a:solidFill>
-            <a:prstDash val="solid"/>
-          </a:ln>
-        </p:spPr>
-      </p:sp>
-      <p:sp>
-        <p:nvSpPr>
-          <p:cNvPr id="18" name="Text 15"/>
-          <p:cNvSpPr/>
-          <p:nvPr/>
-        </p:nvSpPr>
-        <p:spPr>
-          <a:xfrm>
-            <a:off x="6112748" y="2207188"/>
-            <a:ext cx="1005840" cy="292608"/>
-          </a:xfrm>
-          <a:prstGeom prst="rect">
-            <a:avLst/>
-          </a:prstGeom>
-          <a:noFill/>
-          <a:ln/>
-        </p:spPr>
-        <p:txBody>
-          <a:bodyPr wrap="square" rtlCol="0" anchor="ctr"/>
-          <a:lstStyle/>
-          <a:p>
-            <a:pPr algn="ctr" indent="0" marL="0">
-              <a:buNone/>
-            </a:pPr>
-            <a:r>
-              <a:rPr lang="en-US" sz="650" b="1" dirty="0">
-                <a:solidFill>
-                  <a:srgbClr val="FFFFFF"/>
-                </a:solidFill>
-                <a:latin typeface="Calibri" pitchFamily="34" charset="0"/>
-                <a:ea typeface="Calibri" pitchFamily="34" charset="-122"/>
-                <a:cs typeface="Calibri" pitchFamily="34" charset="-120"/>
-              </a:rPr>
-              <a:t>Physical Security</a:t>
-            </a:r>
-            <a:endParaRPr lang="en-US" sz="650" dirty="0"/>
-          </a:p>
-        </p:txBody>
-      </p:sp>
-      <p:sp>
-        <p:nvSpPr>
-          <p:cNvPr id="19" name="Shape 16"/>
-          <p:cNvSpPr/>
-          <p:nvPr/>
-        </p:nvSpPr>
-        <p:spPr>
-          <a:xfrm>
-            <a:off x="4572000" y="3017520"/>
-            <a:ext cx="2043668" cy="-664028"/>
-          </a:xfrm>
-          <a:prstGeom prst="line">
-            <a:avLst/>
-          </a:prstGeom>
-          <a:noFill/>
-          <a:ln w="9525">
-            <a:solidFill>
-              <a:srgbClr val="E2E8F0"/>
-            </a:solidFill>
-            <a:prstDash val="solid"/>
-          </a:ln>
-        </p:spPr>
-      </p:sp>
-      <p:sp>
-        <p:nvSpPr>
-          <p:cNvPr id="20" name="Shape 17"/>
-          <p:cNvSpPr/>
-          <p:nvPr/>
-        </p:nvSpPr>
-        <p:spPr>
-          <a:xfrm>
-            <a:off x="6112748" y="3480380"/>
-            <a:ext cx="1005840" cy="402336"/>
-          </a:xfrm>
-          <a:prstGeom prst="roundRect">
-            <a:avLst>
-              <a:gd name="adj" fmla="val 11364"/>
-            </a:avLst>
-          </a:prstGeom>
-          <a:solidFill>
-            <a:srgbClr val="F8FAFC"/>
-          </a:solidFill>
-          <a:ln w="9525">
-            <a:solidFill>
-              <a:srgbClr val="4EA5D9"/>
-            </a:solidFill>
-            <a:prstDash val="solid"/>
-          </a:ln>
-        </p:spPr>
-      </p:sp>
-      <p:sp>
-        <p:nvSpPr>
-          <p:cNvPr id="21" name="Text 18"/>
-          <p:cNvSpPr/>
-          <p:nvPr/>
-        </p:nvSpPr>
-        <p:spPr>
-          <a:xfrm>
-            <a:off x="6112748" y="3535244"/>
-            <a:ext cx="1005840" cy="292608"/>
-          </a:xfrm>
-          <a:prstGeom prst="rect">
-            <a:avLst/>
-          </a:prstGeom>
-          <a:noFill/>
-          <a:ln/>
-        </p:spPr>
-        <p:txBody>
-          <a:bodyPr wrap="square" rtlCol="0" anchor="ctr"/>
-          <a:lstStyle/>
-          <a:p>
-            <a:pPr algn="ctr" indent="0" marL="0">
-              <a:buNone/>
-            </a:pPr>
-            <a:r>
-              <a:rPr lang="en-US" sz="650" b="1" dirty="0">
-                <a:solidFill>
-                  <a:srgbClr val="1E293B"/>
-                </a:solidFill>
-                <a:latin typeface="Calibri" pitchFamily="34" charset="0"/>
-                <a:ea typeface="Calibri" pitchFamily="34" charset="-122"/>
-                <a:cs typeface="Calibri" pitchFamily="34" charset="-120"/>
-              </a:rPr>
-              <a:t>Protection &amp; Risk Transfer</a:t>
-            </a:r>
-            <a:endParaRPr lang="en-US" sz="650" dirty="0"/>
-          </a:p>
-        </p:txBody>
-      </p:sp>
-      <p:sp>
-        <p:nvSpPr>
-          <p:cNvPr id="22" name="Shape 19"/>
-          <p:cNvSpPr/>
-          <p:nvPr/>
-        </p:nvSpPr>
-        <p:spPr>
-          <a:xfrm>
-            <a:off x="4572000" y="3017520"/>
-            <a:ext cx="2043668" cy="664028"/>
-          </a:xfrm>
-          <a:prstGeom prst="line">
-            <a:avLst/>
-          </a:prstGeom>
-          <a:noFill/>
-          <a:ln w="9525">
-            <a:solidFill>
-              <a:srgbClr val="E2E8F0"/>
-            </a:solidFill>
-            <a:prstDash val="solid"/>
-          </a:ln>
-        </p:spPr>
-      </p:sp>
-      <p:sp>
-        <p:nvSpPr>
-          <p:cNvPr id="23" name="Shape 20"/>
-          <p:cNvSpPr/>
-          <p:nvPr/>
-        </p:nvSpPr>
-        <p:spPr>
-          <a:xfrm>
-            <a:off x="5332136" y="4554800"/>
-            <a:ext cx="1005840" cy="402336"/>
-          </a:xfrm>
-          <a:prstGeom prst="roundRect">
-            <a:avLst>
-              <a:gd name="adj" fmla="val 11364"/>
-            </a:avLst>
-          </a:prstGeom>
-          <a:solidFill>
-            <a:srgbClr val="4EA5D9"/>
-          </a:solidFill>
-          <a:ln w="9525">
-            <a:solidFill>
-              <a:srgbClr val="4EA5D9"/>
-            </a:solidFill>
-            <a:prstDash val="solid"/>
-          </a:ln>
-        </p:spPr>
-      </p:sp>
-      <p:sp>
-        <p:nvSpPr>
-          <p:cNvPr id="24" name="Text 21"/>
-          <p:cNvSpPr/>
-          <p:nvPr/>
-        </p:nvSpPr>
-        <p:spPr>
-          <a:xfrm>
-            <a:off x="5332136" y="4609664"/>
-            <a:ext cx="1005840" cy="292608"/>
-          </a:xfrm>
-          <a:prstGeom prst="rect">
-            <a:avLst/>
-          </a:prstGeom>
-          <a:noFill/>
-          <a:ln/>
-        </p:spPr>
-        <p:txBody>
-          <a:bodyPr wrap="square" rtlCol="0" anchor="ctr"/>
-          <a:lstStyle/>
-          <a:p>
-            <a:pPr algn="ctr" indent="0" marL="0">
-              <a:buNone/>
-            </a:pPr>
-            <a:r>
-              <a:rPr lang="en-US" sz="650" b="1" dirty="0">
-                <a:solidFill>
-                  <a:srgbClr val="FFFFFF"/>
-                </a:solidFill>
-                <a:latin typeface="Calibri" pitchFamily="34" charset="0"/>
-                <a:ea typeface="Calibri" pitchFamily="34" charset="-122"/>
-                <a:cs typeface="Calibri" pitchFamily="34" charset="-120"/>
-              </a:rPr>
-              <a:t>Geographic &amp; Environmental</a:t>
-            </a:r>
-            <a:endParaRPr lang="en-US" sz="650" dirty="0"/>
-          </a:p>
-        </p:txBody>
-      </p:sp>
-      <p:sp>
-        <p:nvSpPr>
-          <p:cNvPr id="25" name="Shape 22"/>
-          <p:cNvSpPr/>
-          <p:nvPr/>
-        </p:nvSpPr>
-        <p:spPr>
-          <a:xfrm>
-            <a:off x="4572000" y="3017520"/>
-            <a:ext cx="1263056" cy="1738448"/>
-          </a:xfrm>
-          <a:prstGeom prst="line">
-            <a:avLst/>
-          </a:prstGeom>
-          <a:noFill/>
-          <a:ln w="9525">
-            <a:solidFill>
-              <a:srgbClr val="E2E8F0"/>
-            </a:solidFill>
-            <a:prstDash val="solid"/>
-          </a:ln>
-        </p:spPr>
-      </p:sp>
-      <p:sp>
-        <p:nvSpPr>
-          <p:cNvPr id="26" name="Shape 23"/>
-          <p:cNvSpPr/>
-          <p:nvPr/>
-        </p:nvSpPr>
-        <p:spPr>
-          <a:xfrm>
-            <a:off x="4069080" y="4965192"/>
-            <a:ext cx="1005840" cy="402336"/>
-          </a:xfrm>
-          <a:prstGeom prst="roundRect">
-            <a:avLst>
-              <a:gd name="adj" fmla="val 11364"/>
-            </a:avLst>
-          </a:prstGeom>
-          <a:solidFill>
-            <a:srgbClr val="F8FAFC"/>
-          </a:solidFill>
-          <a:ln w="9525">
-            <a:solidFill>
-              <a:srgbClr val="4EA5D9"/>
-            </a:solidFill>
-            <a:prstDash val="solid"/>
-          </a:ln>
-        </p:spPr>
-      </p:sp>
-      <p:sp>
-        <p:nvSpPr>
-          <p:cNvPr id="27" name="Text 24"/>
-          <p:cNvSpPr/>
-          <p:nvPr/>
-        </p:nvSpPr>
-        <p:spPr>
-          <a:xfrm>
-            <a:off x="4069080" y="5020056"/>
-            <a:ext cx="1005840" cy="292608"/>
-          </a:xfrm>
-          <a:prstGeom prst="rect">
-            <a:avLst/>
-          </a:prstGeom>
-          <a:noFill/>
-          <a:ln/>
-        </p:spPr>
-        <p:txBody>
-          <a:bodyPr wrap="square" rtlCol="0" anchor="ctr"/>
-          <a:lstStyle/>
-          <a:p>
-            <a:pPr algn="ctr" indent="0" marL="0">
-              <a:buNone/>
-            </a:pPr>
-            <a:r>
-              <a:rPr lang="en-US" sz="650" b="1" dirty="0">
-                <a:solidFill>
-                  <a:srgbClr val="1E293B"/>
-                </a:solidFill>
-                <a:latin typeface="Calibri" pitchFamily="34" charset="0"/>
-                <a:ea typeface="Calibri" pitchFamily="34" charset="-122"/>
-                <a:cs typeface="Calibri" pitchFamily="34" charset="-120"/>
-              </a:rPr>
-              <a:t>Reputation &amp; Social</a:t>
-            </a:r>
-            <a:endParaRPr lang="en-US" sz="650" dirty="0"/>
-          </a:p>
-        </p:txBody>
-      </p:sp>
-      <p:sp>
-        <p:nvSpPr>
-          <p:cNvPr id="28" name="Shape 25"/>
-          <p:cNvSpPr/>
-          <p:nvPr/>
-        </p:nvSpPr>
-        <p:spPr>
-          <a:xfrm>
-            <a:off x="4572000" y="3017520"/>
-            <a:ext cx="0" cy="2148840"/>
-          </a:xfrm>
-          <a:prstGeom prst="line">
-            <a:avLst/>
-          </a:prstGeom>
-          <a:noFill/>
-          <a:ln w="9525">
-            <a:solidFill>
-              <a:srgbClr val="E2E8F0"/>
-            </a:solidFill>
-            <a:prstDash val="solid"/>
-          </a:ln>
-        </p:spPr>
-      </p:sp>
-      <p:sp>
-        <p:nvSpPr>
-          <p:cNvPr id="29" name="Shape 26"/>
-          <p:cNvSpPr/>
-          <p:nvPr/>
-        </p:nvSpPr>
-        <p:spPr>
-          <a:xfrm>
-            <a:off x="2806024" y="4554800"/>
-            <a:ext cx="1005840" cy="402336"/>
-          </a:xfrm>
-          <a:prstGeom prst="roundRect">
-            <a:avLst>
-              <a:gd name="adj" fmla="val 11364"/>
-            </a:avLst>
-          </a:prstGeom>
-          <a:solidFill>
-            <a:srgbClr val="4EA5D9"/>
-          </a:solidFill>
-          <a:ln w="9525">
-            <a:solidFill>
-              <a:srgbClr val="4EA5D9"/>
-            </a:solidFill>
-            <a:prstDash val="solid"/>
-          </a:ln>
-        </p:spPr>
-      </p:sp>
-      <p:sp>
-        <p:nvSpPr>
-          <p:cNvPr id="30" name="Text 27"/>
-          <p:cNvSpPr/>
-          <p:nvPr/>
-        </p:nvSpPr>
-        <p:spPr>
-          <a:xfrm>
-            <a:off x="2806024" y="4609664"/>
-            <a:ext cx="1005840" cy="292608"/>
-          </a:xfrm>
-          <a:prstGeom prst="rect">
-            <a:avLst/>
-          </a:prstGeom>
-          <a:noFill/>
-          <a:ln/>
-        </p:spPr>
-        <p:txBody>
-          <a:bodyPr wrap="square" rtlCol="0" anchor="ctr"/>
-          <a:lstStyle/>
-          <a:p>
-            <a:pPr algn="ctr" indent="0" marL="0">
-              <a:buNone/>
-            </a:pPr>
-            <a:r>
-              <a:rPr lang="en-US" sz="650" b="1" dirty="0">
-                <a:solidFill>
-                  <a:srgbClr val="FFFFFF"/>
-                </a:solidFill>
-                <a:latin typeface="Calibri" pitchFamily="34" charset="0"/>
-                <a:ea typeface="Calibri" pitchFamily="34" charset="-122"/>
-                <a:cs typeface="Calibri" pitchFamily="34" charset="-120"/>
-              </a:rPr>
-              <a:t>Liquidity &amp; Cash</a:t>
-            </a:r>
-            <a:endParaRPr lang="en-US" sz="650" dirty="0"/>
-          </a:p>
-        </p:txBody>
-      </p:sp>
-      <p:sp>
-        <p:nvSpPr>
-          <p:cNvPr id="31" name="Shape 28"/>
-          <p:cNvSpPr/>
-          <p:nvPr/>
-        </p:nvSpPr>
-        <p:spPr>
-          <a:xfrm>
-            <a:off x="4572000" y="3017520"/>
-            <a:ext cx="-1263056" cy="1738448"/>
-          </a:xfrm>
-          <a:prstGeom prst="line">
-            <a:avLst/>
-          </a:prstGeom>
-          <a:noFill/>
-          <a:ln w="9525">
-            <a:solidFill>
-              <a:srgbClr val="E2E8F0"/>
-            </a:solidFill>
-            <a:prstDash val="solid"/>
-          </a:ln>
-        </p:spPr>
-      </p:sp>
-      <p:sp>
-        <p:nvSpPr>
-          <p:cNvPr id="32" name="Shape 29"/>
-          <p:cNvSpPr/>
-          <p:nvPr/>
-        </p:nvSpPr>
-        <p:spPr>
-          <a:xfrm>
-            <a:off x="2025412" y="3480380"/>
-            <a:ext cx="1005840" cy="402336"/>
-          </a:xfrm>
-          <a:prstGeom prst="roundRect">
-            <a:avLst>
-              <a:gd name="adj" fmla="val 11364"/>
-            </a:avLst>
-          </a:prstGeom>
-          <a:solidFill>
-            <a:srgbClr val="F8FAFC"/>
-          </a:solidFill>
-          <a:ln w="9525">
-            <a:solidFill>
-              <a:srgbClr val="4EA5D9"/>
-            </a:solidFill>
-            <a:prstDash val="solid"/>
-          </a:ln>
-        </p:spPr>
-      </p:sp>
-      <p:sp>
-        <p:nvSpPr>
-          <p:cNvPr id="33" name="Text 30"/>
-          <p:cNvSpPr/>
-          <p:nvPr/>
-        </p:nvSpPr>
-        <p:spPr>
-          <a:xfrm>
-            <a:off x="2025412" y="3535244"/>
-            <a:ext cx="1005840" cy="292608"/>
-          </a:xfrm>
-          <a:prstGeom prst="rect">
-            <a:avLst/>
-          </a:prstGeom>
-          <a:noFill/>
-          <a:ln/>
-        </p:spPr>
-        <p:txBody>
-          <a:bodyPr wrap="square" rtlCol="0" anchor="ctr"/>
-          <a:lstStyle/>
-          <a:p>
-            <a:pPr algn="ctr" indent="0" marL="0">
-              <a:buNone/>
-            </a:pPr>
-            <a:r>
-              <a:rPr lang="en-US" sz="650" b="1" dirty="0">
-                <a:solidFill>
-                  <a:srgbClr val="1E293B"/>
-                </a:solidFill>
-                <a:latin typeface="Calibri" pitchFamily="34" charset="0"/>
-                <a:ea typeface="Calibri" pitchFamily="34" charset="-122"/>
-                <a:cs typeface="Calibri" pitchFamily="34" charset="-120"/>
-              </a:rPr>
-              <a:t>Tax Exposure</a:t>
-            </a:r>
-            <a:endParaRPr lang="en-US" sz="650" dirty="0"/>
-          </a:p>
-        </p:txBody>
-      </p:sp>
-      <p:sp>
-        <p:nvSpPr>
-          <p:cNvPr id="34" name="Shape 31"/>
-          <p:cNvSpPr/>
-          <p:nvPr/>
-        </p:nvSpPr>
-        <p:spPr>
-          <a:xfrm>
-            <a:off x="4572000" y="3017520"/>
-            <a:ext cx="-2043668" cy="664028"/>
-          </a:xfrm>
-          <a:prstGeom prst="line">
-            <a:avLst/>
-          </a:prstGeom>
-          <a:noFill/>
-          <a:ln w="9525">
-            <a:solidFill>
-              <a:srgbClr val="E2E8F0"/>
-            </a:solidFill>
-            <a:prstDash val="solid"/>
-          </a:ln>
-        </p:spPr>
-      </p:sp>
-      <p:sp>
-        <p:nvSpPr>
-          <p:cNvPr id="35" name="Shape 32"/>
-          <p:cNvSpPr/>
-          <p:nvPr/>
-        </p:nvSpPr>
-        <p:spPr>
-          <a:xfrm>
-            <a:off x="2025412" y="2152324"/>
-            <a:ext cx="1005840" cy="402336"/>
-          </a:xfrm>
-          <a:prstGeom prst="roundRect">
-            <a:avLst>
-              <a:gd name="adj" fmla="val 11364"/>
-            </a:avLst>
-          </a:prstGeom>
-          <a:solidFill>
-            <a:srgbClr val="4EA5D9"/>
-          </a:solidFill>
-          <a:ln w="9525">
-            <a:solidFill>
-              <a:srgbClr val="4EA5D9"/>
-            </a:solidFill>
-            <a:prstDash val="solid"/>
-          </a:ln>
-        </p:spPr>
-      </p:sp>
-      <p:sp>
-        <p:nvSpPr>
-          <p:cNvPr id="36" name="Text 33"/>
-          <p:cNvSpPr/>
-          <p:nvPr/>
-        </p:nvSpPr>
-        <p:spPr>
-          <a:xfrm>
-            <a:off x="2025412" y="2207188"/>
-            <a:ext cx="1005840" cy="292608"/>
-          </a:xfrm>
-          <a:prstGeom prst="rect">
-            <a:avLst/>
-          </a:prstGeom>
-          <a:noFill/>
-          <a:ln/>
-        </p:spPr>
-        <p:txBody>
-          <a:bodyPr wrap="square" rtlCol="0" anchor="ctr"/>
-          <a:lstStyle/>
-          <a:p>
-            <a:pPr algn="ctr" indent="0" marL="0">
-              <a:buNone/>
-            </a:pPr>
-            <a:r>
-              <a:rPr lang="en-US" sz="650" b="1" dirty="0">
-                <a:solidFill>
-                  <a:srgbClr val="FFFFFF"/>
-                </a:solidFill>
-                <a:latin typeface="Calibri" pitchFamily="34" charset="0"/>
-                <a:ea typeface="Calibri" pitchFamily="34" charset="-122"/>
-                <a:cs typeface="Calibri" pitchFamily="34" charset="-120"/>
-              </a:rPr>
-              <a:t>Estate &amp; Succession</a:t>
-            </a:r>
-            <a:endParaRPr lang="en-US" sz="650" dirty="0"/>
-          </a:p>
-        </p:txBody>
-      </p:sp>
-      <p:sp>
-        <p:nvSpPr>
-          <p:cNvPr id="37" name="Shape 34"/>
-          <p:cNvSpPr/>
-          <p:nvPr/>
-        </p:nvSpPr>
-        <p:spPr>
-          <a:xfrm>
-            <a:off x="4572000" y="3017520"/>
-            <a:ext cx="-2043668" cy="-664028"/>
-          </a:xfrm>
-          <a:prstGeom prst="line">
-            <a:avLst/>
-          </a:prstGeom>
-          <a:noFill/>
-          <a:ln w="9525">
-            <a:solidFill>
-              <a:srgbClr val="E2E8F0"/>
-            </a:solidFill>
-            <a:prstDash val="solid"/>
-          </a:ln>
-        </p:spPr>
-      </p:sp>
-      <p:sp>
-        <p:nvSpPr>
-          <p:cNvPr id="38" name="Shape 35"/>
-          <p:cNvSpPr/>
-          <p:nvPr/>
-        </p:nvSpPr>
-        <p:spPr>
-          <a:xfrm>
-            <a:off x="2806024" y="1077904"/>
-            <a:ext cx="1005840" cy="402336"/>
-          </a:xfrm>
-          <a:prstGeom prst="roundRect">
-            <a:avLst>
-              <a:gd name="adj" fmla="val 11364"/>
-            </a:avLst>
-          </a:prstGeom>
-          <a:solidFill>
-            <a:srgbClr val="F8FAFC"/>
-          </a:solidFill>
-          <a:ln w="9525">
-            <a:solidFill>
-              <a:srgbClr val="4EA5D9"/>
-            </a:solidFill>
-            <a:prstDash val="solid"/>
-          </a:ln>
-        </p:spPr>
-      </p:sp>
-      <p:sp>
-        <p:nvSpPr>
-          <p:cNvPr id="39" name="Text 36"/>
-          <p:cNvSpPr/>
-          <p:nvPr/>
-        </p:nvSpPr>
-        <p:spPr>
-          <a:xfrm>
-            <a:off x="2806024" y="1132768"/>
-            <a:ext cx="1005840" cy="292608"/>
-          </a:xfrm>
-          <a:prstGeom prst="rect">
-            <a:avLst/>
-          </a:prstGeom>
-          <a:noFill/>
-          <a:ln/>
-        </p:spPr>
-        <p:txBody>
-          <a:bodyPr wrap="square" rtlCol="0" anchor="ctr"/>
-          <a:lstStyle/>
-          <a:p>
-            <a:pPr algn="ctr" indent="0" marL="0">
-              <a:buNone/>
-            </a:pPr>
-            <a:r>
-              <a:rPr lang="en-US" sz="650" b="1" dirty="0">
-                <a:solidFill>
-                  <a:srgbClr val="1E293B"/>
-                </a:solidFill>
-                <a:latin typeface="Calibri" pitchFamily="34" charset="0"/>
-                <a:ea typeface="Calibri" pitchFamily="34" charset="-122"/>
-                <a:cs typeface="Calibri" pitchFamily="34" charset="-120"/>
-              </a:rPr>
-              <a:t>Behavioral Resilience</a:t>
-            </a:r>
-            <a:endParaRPr lang="en-US" sz="650" dirty="0"/>
-          </a:p>
-        </p:txBody>
-      </p:sp>
-      <p:sp>
-        <p:nvSpPr>
-          <p:cNvPr id="40" name="Shape 37"/>
-          <p:cNvSpPr/>
-          <p:nvPr/>
-        </p:nvSpPr>
-        <p:spPr>
-          <a:xfrm>
-            <a:off x="4572000" y="3017520"/>
-            <a:ext cx="-1263056" cy="-1738448"/>
-          </a:xfrm>
-          <a:prstGeom prst="line">
-            <a:avLst/>
-          </a:prstGeom>
-          <a:noFill/>
-          <a:ln w="9525">
-            <a:solidFill>
-              <a:srgbClr val="E2E8F0"/>
-            </a:solidFill>
-            <a:prstDash val="solid"/>
-          </a:ln>
-        </p:spPr>
-      </p:sp>
     </p:spTree>
   </p:cSld>
   <p:clrMapOvr>
@@ -11222,7 +11189,7 @@
                 <a:ea typeface="Calibri Light" pitchFamily="34" charset="-122"/>
                 <a:cs typeface="Calibri Light" pitchFamily="34" charset="-120"/>
               </a:rPr>
-              <a:t>Advisor Workflow</a:t>
+              <a:t>10-Pillar Framework</a:t>
             </a:r>
             <a:endParaRPr lang="en-US" sz="2800" dirty="0"/>
           </a:p>
@@ -11230,7 +11197,46 @@
       </p:sp>
       <p:sp>
         <p:nvSpPr>
-          <p:cNvPr id="5" name="Shape 3"/>
+          <p:cNvPr id="5" name="Text 3"/>
+          <p:cNvSpPr/>
+          <p:nvPr/>
+        </p:nvSpPr>
+        <p:spPr>
+          <a:xfrm>
+            <a:off x="502920" y="1051560"/>
+            <a:ext cx="8138160" cy="365760"/>
+          </a:xfrm>
+          <a:prstGeom prst="rect">
+            <a:avLst/>
+          </a:prstGeom>
+          <a:noFill/>
+          <a:ln/>
+        </p:spPr>
+        <p:txBody>
+          <a:bodyPr wrap="square" rtlCol="0" anchor="ctr"/>
+          <a:lstStyle/>
+          <a:p>
+            <a:pPr indent="0" marL="0">
+              <a:buNone/>
+            </a:pPr>
+            <a:r>
+              <a:rPr lang="en-US" sz="1400" i="1" dirty="0">
+                <a:solidFill>
+                  <a:srgbClr val="64748B"/>
+                </a:solidFill>
+                <a:latin typeface="Calibri" pitchFamily="34" charset="0"/>
+                <a:ea typeface="Calibri" pitchFamily="34" charset="-122"/>
+                <a:cs typeface="Calibri" pitchFamily="34" charset="-120"/>
+              </a:rPr>
+              <a:t>Shipped today. Ten domains. One household profile.</a:t>
+            </a:r>
+            <a:endParaRPr lang="en-US" sz="1400" dirty="0"/>
+          </a:p>
+        </p:txBody>
+      </p:sp>
+      <p:sp>
+        <p:nvSpPr>
+          <p:cNvPr id="6" name="Shape 4"/>
           <p:cNvSpPr/>
           <p:nvPr/>
         </p:nvSpPr>
@@ -11255,7 +11261,7 @@
       </p:sp>
       <p:pic>
         <p:nvPicPr>
-          <p:cNvPr id="6" name="Image 0" descr="/Users/bwoodtalton/Projects/AkiliRisk/logo/akili-horizontal-compact.png">    </p:cNvPr>
+          <p:cNvPr id="7" name="Image 0" descr="/Users/bwoodtalton/Projects/AkiliRisk/logo/akili-horizontal-compact.png">    </p:cNvPr>
           <p:cNvPicPr>
             <a:picLocks noChangeAspect="1"/>
           </p:cNvPicPr>
@@ -11279,7 +11285,7 @@
       </p:pic>
       <p:sp>
         <p:nvSpPr>
-          <p:cNvPr id="7" name="Text 4"/>
+          <p:cNvPr id="8" name="Text 5"/>
           <p:cNvSpPr/>
           <p:nvPr/>
         </p:nvSpPr>
@@ -11316,9 +11322,1189 @@
           </a:p>
         </p:txBody>
       </p:sp>
+      <p:sp>
+        <p:nvSpPr>
+          <p:cNvPr id="9" name="Shape 6"/>
+          <p:cNvSpPr/>
+          <p:nvPr/>
+        </p:nvSpPr>
+        <p:spPr>
+          <a:xfrm>
+            <a:off x="3703320" y="2148840"/>
+            <a:ext cx="1737360" cy="1737360"/>
+          </a:xfrm>
+          <a:prstGeom prst="ellipse">
+            <a:avLst/>
+          </a:prstGeom>
+          <a:solidFill>
+            <a:srgbClr val="1E293B"/>
+          </a:solidFill>
+          <a:ln w="25400">
+            <a:solidFill>
+              <a:srgbClr val="4EA5D9"/>
+            </a:solidFill>
+            <a:prstDash val="solid"/>
+          </a:ln>
+        </p:spPr>
+      </p:sp>
+      <p:sp>
+        <p:nvSpPr>
+          <p:cNvPr id="10" name="Text 7"/>
+          <p:cNvSpPr/>
+          <p:nvPr/>
+        </p:nvSpPr>
+        <p:spPr>
+          <a:xfrm>
+            <a:off x="3703320" y="2514600"/>
+            <a:ext cx="1737360" cy="1005840"/>
+          </a:xfrm>
+          <a:prstGeom prst="rect">
+            <a:avLst/>
+          </a:prstGeom>
+          <a:noFill/>
+          <a:ln/>
+        </p:spPr>
+        <p:txBody>
+          <a:bodyPr wrap="square" rtlCol="0" anchor="ctr"/>
+          <a:lstStyle/>
+          <a:p>
+            <a:pPr algn="ctr" indent="0" marL="0">
+              <a:buNone/>
+            </a:pPr>
+            <a:r>
+              <a:rPr lang="en-US" sz="1600" b="1" dirty="0">
+                <a:solidFill>
+                  <a:srgbClr val="FFFFFF"/>
+                </a:solidFill>
+                <a:latin typeface="Calibri" pitchFamily="34" charset="0"/>
+                <a:ea typeface="Calibri" pitchFamily="34" charset="-122"/>
+                <a:cs typeface="Calibri" pitchFamily="34" charset="-120"/>
+              </a:rPr>
+              <a:t>10</a:t>
+            </a:r>
+            <a:endParaRPr lang="en-US" sz="1600" dirty="0"/>
+          </a:p>
+          <a:p>
+            <a:pPr algn="ctr" indent="0" marL="0">
+              <a:buNone/>
+            </a:pPr>
+            <a:r>
+              <a:rPr lang="en-US" sz="1600" b="1" dirty="0">
+                <a:solidFill>
+                  <a:srgbClr val="FFFFFF"/>
+                </a:solidFill>
+                <a:latin typeface="Calibri" pitchFamily="34" charset="0"/>
+                <a:ea typeface="Calibri" pitchFamily="34" charset="-122"/>
+                <a:cs typeface="Calibri" pitchFamily="34" charset="-120"/>
+              </a:rPr>
+              <a:t>Pillars</a:t>
+            </a:r>
+            <a:endParaRPr lang="en-US" sz="1600" dirty="0"/>
+          </a:p>
+        </p:txBody>
+      </p:sp>
+      <p:sp>
+        <p:nvSpPr>
+          <p:cNvPr id="11" name="Shape 8"/>
+          <p:cNvSpPr/>
+          <p:nvPr/>
+        </p:nvSpPr>
+        <p:spPr>
+          <a:xfrm>
+            <a:off x="4069080" y="667512"/>
+            <a:ext cx="1005840" cy="402336"/>
+          </a:xfrm>
+          <a:prstGeom prst="roundRect">
+            <a:avLst>
+              <a:gd name="adj" fmla="val 11364"/>
+            </a:avLst>
+          </a:prstGeom>
+          <a:solidFill>
+            <a:srgbClr val="4EA5D9"/>
+          </a:solidFill>
+          <a:ln w="9525">
+            <a:solidFill>
+              <a:srgbClr val="4EA5D9"/>
+            </a:solidFill>
+            <a:prstDash val="solid"/>
+          </a:ln>
+        </p:spPr>
+      </p:sp>
+      <p:sp>
+        <p:nvSpPr>
+          <p:cNvPr id="12" name="Text 9"/>
+          <p:cNvSpPr/>
+          <p:nvPr/>
+        </p:nvSpPr>
+        <p:spPr>
+          <a:xfrm>
+            <a:off x="4069080" y="722376"/>
+            <a:ext cx="1005840" cy="292608"/>
+          </a:xfrm>
+          <a:prstGeom prst="rect">
+            <a:avLst/>
+          </a:prstGeom>
+          <a:noFill/>
+          <a:ln/>
+        </p:spPr>
+        <p:txBody>
+          <a:bodyPr wrap="square" rtlCol="0" anchor="ctr"/>
+          <a:lstStyle/>
+          <a:p>
+            <a:pPr algn="ctr" indent="0" marL="0">
+              <a:buNone/>
+            </a:pPr>
+            <a:r>
+              <a:rPr lang="en-US" sz="650" b="1" dirty="0">
+                <a:solidFill>
+                  <a:srgbClr val="FFFFFF"/>
+                </a:solidFill>
+                <a:latin typeface="Calibri" pitchFamily="34" charset="0"/>
+                <a:ea typeface="Calibri" pitchFamily="34" charset="-122"/>
+                <a:cs typeface="Calibri" pitchFamily="34" charset="-120"/>
+              </a:rPr>
+              <a:t>Governance</a:t>
+            </a:r>
+            <a:endParaRPr lang="en-US" sz="650" dirty="0"/>
+          </a:p>
+        </p:txBody>
+      </p:sp>
+      <p:sp>
+        <p:nvSpPr>
+          <p:cNvPr id="13" name="Shape 10"/>
+          <p:cNvSpPr/>
+          <p:nvPr/>
+        </p:nvSpPr>
+        <p:spPr>
+          <a:xfrm>
+            <a:off x="4572000" y="3017520"/>
+            <a:ext cx="0" cy="-2148840"/>
+          </a:xfrm>
+          <a:prstGeom prst="line">
+            <a:avLst/>
+          </a:prstGeom>
+          <a:noFill/>
+          <a:ln w="9525">
+            <a:solidFill>
+              <a:srgbClr val="E2E8F0"/>
+            </a:solidFill>
+            <a:prstDash val="solid"/>
+          </a:ln>
+        </p:spPr>
+      </p:sp>
+      <p:sp>
+        <p:nvSpPr>
+          <p:cNvPr id="14" name="Shape 11"/>
+          <p:cNvSpPr/>
+          <p:nvPr/>
+        </p:nvSpPr>
+        <p:spPr>
+          <a:xfrm>
+            <a:off x="5332136" y="1077904"/>
+            <a:ext cx="1005840" cy="402336"/>
+          </a:xfrm>
+          <a:prstGeom prst="roundRect">
+            <a:avLst>
+              <a:gd name="adj" fmla="val 11364"/>
+            </a:avLst>
+          </a:prstGeom>
+          <a:solidFill>
+            <a:srgbClr val="F8FAFC"/>
+          </a:solidFill>
+          <a:ln w="9525">
+            <a:solidFill>
+              <a:srgbClr val="4EA5D9"/>
+            </a:solidFill>
+            <a:prstDash val="solid"/>
+          </a:ln>
+        </p:spPr>
+      </p:sp>
+      <p:sp>
+        <p:nvSpPr>
+          <p:cNvPr id="15" name="Text 12"/>
+          <p:cNvSpPr/>
+          <p:nvPr/>
+        </p:nvSpPr>
+        <p:spPr>
+          <a:xfrm>
+            <a:off x="5332136" y="1132768"/>
+            <a:ext cx="1005840" cy="292608"/>
+          </a:xfrm>
+          <a:prstGeom prst="rect">
+            <a:avLst/>
+          </a:prstGeom>
+          <a:noFill/>
+          <a:ln/>
+        </p:spPr>
+        <p:txBody>
+          <a:bodyPr wrap="square" rtlCol="0" anchor="ctr"/>
+          <a:lstStyle/>
+          <a:p>
+            <a:pPr algn="ctr" indent="0" marL="0">
+              <a:buNone/>
+            </a:pPr>
+            <a:r>
+              <a:rPr lang="en-US" sz="650" b="1" dirty="0">
+                <a:solidFill>
+                  <a:srgbClr val="1E293B"/>
+                </a:solidFill>
+                <a:latin typeface="Calibri" pitchFamily="34" charset="0"/>
+                <a:ea typeface="Calibri" pitchFamily="34" charset="-122"/>
+                <a:cs typeface="Calibri" pitchFamily="34" charset="-120"/>
+              </a:rPr>
+              <a:t>Cyber &amp; Digital</a:t>
+            </a:r>
+            <a:endParaRPr lang="en-US" sz="650" dirty="0"/>
+          </a:p>
+        </p:txBody>
+      </p:sp>
+      <p:sp>
+        <p:nvSpPr>
+          <p:cNvPr id="16" name="Shape 13"/>
+          <p:cNvSpPr/>
+          <p:nvPr/>
+        </p:nvSpPr>
+        <p:spPr>
+          <a:xfrm>
+            <a:off x="4572000" y="3017520"/>
+            <a:ext cx="1263056" cy="-1738448"/>
+          </a:xfrm>
+          <a:prstGeom prst="line">
+            <a:avLst/>
+          </a:prstGeom>
+          <a:noFill/>
+          <a:ln w="9525">
+            <a:solidFill>
+              <a:srgbClr val="E2E8F0"/>
+            </a:solidFill>
+            <a:prstDash val="solid"/>
+          </a:ln>
+        </p:spPr>
+      </p:sp>
+      <p:sp>
+        <p:nvSpPr>
+          <p:cNvPr id="17" name="Shape 14"/>
+          <p:cNvSpPr/>
+          <p:nvPr/>
+        </p:nvSpPr>
+        <p:spPr>
+          <a:xfrm>
+            <a:off x="6112748" y="2152324"/>
+            <a:ext cx="1005840" cy="402336"/>
+          </a:xfrm>
+          <a:prstGeom prst="roundRect">
+            <a:avLst>
+              <a:gd name="adj" fmla="val 11364"/>
+            </a:avLst>
+          </a:prstGeom>
+          <a:solidFill>
+            <a:srgbClr val="4EA5D9"/>
+          </a:solidFill>
+          <a:ln w="9525">
+            <a:solidFill>
+              <a:srgbClr val="4EA5D9"/>
+            </a:solidFill>
+            <a:prstDash val="solid"/>
+          </a:ln>
+        </p:spPr>
+      </p:sp>
+      <p:sp>
+        <p:nvSpPr>
+          <p:cNvPr id="18" name="Text 15"/>
+          <p:cNvSpPr/>
+          <p:nvPr/>
+        </p:nvSpPr>
+        <p:spPr>
+          <a:xfrm>
+            <a:off x="6112748" y="2207188"/>
+            <a:ext cx="1005840" cy="292608"/>
+          </a:xfrm>
+          <a:prstGeom prst="rect">
+            <a:avLst/>
+          </a:prstGeom>
+          <a:noFill/>
+          <a:ln/>
+        </p:spPr>
+        <p:txBody>
+          <a:bodyPr wrap="square" rtlCol="0" anchor="ctr"/>
+          <a:lstStyle/>
+          <a:p>
+            <a:pPr algn="ctr" indent="0" marL="0">
+              <a:buNone/>
+            </a:pPr>
+            <a:r>
+              <a:rPr lang="en-US" sz="650" b="1" dirty="0">
+                <a:solidFill>
+                  <a:srgbClr val="FFFFFF"/>
+                </a:solidFill>
+                <a:latin typeface="Calibri" pitchFamily="34" charset="0"/>
+                <a:ea typeface="Calibri" pitchFamily="34" charset="-122"/>
+                <a:cs typeface="Calibri" pitchFamily="34" charset="-120"/>
+              </a:rPr>
+              <a:t>Physical Security</a:t>
+            </a:r>
+            <a:endParaRPr lang="en-US" sz="650" dirty="0"/>
+          </a:p>
+        </p:txBody>
+      </p:sp>
+      <p:sp>
+        <p:nvSpPr>
+          <p:cNvPr id="19" name="Shape 16"/>
+          <p:cNvSpPr/>
+          <p:nvPr/>
+        </p:nvSpPr>
+        <p:spPr>
+          <a:xfrm>
+            <a:off x="4572000" y="3017520"/>
+            <a:ext cx="2043668" cy="-664028"/>
+          </a:xfrm>
+          <a:prstGeom prst="line">
+            <a:avLst/>
+          </a:prstGeom>
+          <a:noFill/>
+          <a:ln w="9525">
+            <a:solidFill>
+              <a:srgbClr val="E2E8F0"/>
+            </a:solidFill>
+            <a:prstDash val="solid"/>
+          </a:ln>
+        </p:spPr>
+      </p:sp>
+      <p:sp>
+        <p:nvSpPr>
+          <p:cNvPr id="20" name="Shape 17"/>
+          <p:cNvSpPr/>
+          <p:nvPr/>
+        </p:nvSpPr>
+        <p:spPr>
+          <a:xfrm>
+            <a:off x="6112748" y="3480380"/>
+            <a:ext cx="1005840" cy="402336"/>
+          </a:xfrm>
+          <a:prstGeom prst="roundRect">
+            <a:avLst>
+              <a:gd name="adj" fmla="val 11364"/>
+            </a:avLst>
+          </a:prstGeom>
+          <a:solidFill>
+            <a:srgbClr val="F8FAFC"/>
+          </a:solidFill>
+          <a:ln w="9525">
+            <a:solidFill>
+              <a:srgbClr val="4EA5D9"/>
+            </a:solidFill>
+            <a:prstDash val="solid"/>
+          </a:ln>
+        </p:spPr>
+      </p:sp>
+      <p:sp>
+        <p:nvSpPr>
+          <p:cNvPr id="21" name="Text 18"/>
+          <p:cNvSpPr/>
+          <p:nvPr/>
+        </p:nvSpPr>
+        <p:spPr>
+          <a:xfrm>
+            <a:off x="6112748" y="3535244"/>
+            <a:ext cx="1005840" cy="292608"/>
+          </a:xfrm>
+          <a:prstGeom prst="rect">
+            <a:avLst/>
+          </a:prstGeom>
+          <a:noFill/>
+          <a:ln/>
+        </p:spPr>
+        <p:txBody>
+          <a:bodyPr wrap="square" rtlCol="0" anchor="ctr"/>
+          <a:lstStyle/>
+          <a:p>
+            <a:pPr algn="ctr" indent="0" marL="0">
+              <a:buNone/>
+            </a:pPr>
+            <a:r>
+              <a:rPr lang="en-US" sz="650" b="1" dirty="0">
+                <a:solidFill>
+                  <a:srgbClr val="1E293B"/>
+                </a:solidFill>
+                <a:latin typeface="Calibri" pitchFamily="34" charset="0"/>
+                <a:ea typeface="Calibri" pitchFamily="34" charset="-122"/>
+                <a:cs typeface="Calibri" pitchFamily="34" charset="-120"/>
+              </a:rPr>
+              <a:t>Protection &amp; Risk Transfer</a:t>
+            </a:r>
+            <a:endParaRPr lang="en-US" sz="650" dirty="0"/>
+          </a:p>
+        </p:txBody>
+      </p:sp>
+      <p:sp>
+        <p:nvSpPr>
+          <p:cNvPr id="22" name="Shape 19"/>
+          <p:cNvSpPr/>
+          <p:nvPr/>
+        </p:nvSpPr>
+        <p:spPr>
+          <a:xfrm>
+            <a:off x="4572000" y="3017520"/>
+            <a:ext cx="2043668" cy="664028"/>
+          </a:xfrm>
+          <a:prstGeom prst="line">
+            <a:avLst/>
+          </a:prstGeom>
+          <a:noFill/>
+          <a:ln w="9525">
+            <a:solidFill>
+              <a:srgbClr val="E2E8F0"/>
+            </a:solidFill>
+            <a:prstDash val="solid"/>
+          </a:ln>
+        </p:spPr>
+      </p:sp>
+      <p:sp>
+        <p:nvSpPr>
+          <p:cNvPr id="23" name="Shape 20"/>
+          <p:cNvSpPr/>
+          <p:nvPr/>
+        </p:nvSpPr>
+        <p:spPr>
+          <a:xfrm>
+            <a:off x="5332136" y="4554800"/>
+            <a:ext cx="1005840" cy="402336"/>
+          </a:xfrm>
+          <a:prstGeom prst="roundRect">
+            <a:avLst>
+              <a:gd name="adj" fmla="val 11364"/>
+            </a:avLst>
+          </a:prstGeom>
+          <a:solidFill>
+            <a:srgbClr val="4EA5D9"/>
+          </a:solidFill>
+          <a:ln w="9525">
+            <a:solidFill>
+              <a:srgbClr val="4EA5D9"/>
+            </a:solidFill>
+            <a:prstDash val="solid"/>
+          </a:ln>
+        </p:spPr>
+      </p:sp>
+      <p:sp>
+        <p:nvSpPr>
+          <p:cNvPr id="24" name="Text 21"/>
+          <p:cNvSpPr/>
+          <p:nvPr/>
+        </p:nvSpPr>
+        <p:spPr>
+          <a:xfrm>
+            <a:off x="5332136" y="4609664"/>
+            <a:ext cx="1005840" cy="292608"/>
+          </a:xfrm>
+          <a:prstGeom prst="rect">
+            <a:avLst/>
+          </a:prstGeom>
+          <a:noFill/>
+          <a:ln/>
+        </p:spPr>
+        <p:txBody>
+          <a:bodyPr wrap="square" rtlCol="0" anchor="ctr"/>
+          <a:lstStyle/>
+          <a:p>
+            <a:pPr algn="ctr" indent="0" marL="0">
+              <a:buNone/>
+            </a:pPr>
+            <a:r>
+              <a:rPr lang="en-US" sz="650" b="1" dirty="0">
+                <a:solidFill>
+                  <a:srgbClr val="FFFFFF"/>
+                </a:solidFill>
+                <a:latin typeface="Calibri" pitchFamily="34" charset="0"/>
+                <a:ea typeface="Calibri" pitchFamily="34" charset="-122"/>
+                <a:cs typeface="Calibri" pitchFamily="34" charset="-120"/>
+              </a:rPr>
+              <a:t>Geographic &amp; Environmental</a:t>
+            </a:r>
+            <a:endParaRPr lang="en-US" sz="650" dirty="0"/>
+          </a:p>
+        </p:txBody>
+      </p:sp>
+      <p:sp>
+        <p:nvSpPr>
+          <p:cNvPr id="25" name="Shape 22"/>
+          <p:cNvSpPr/>
+          <p:nvPr/>
+        </p:nvSpPr>
+        <p:spPr>
+          <a:xfrm>
+            <a:off x="4572000" y="3017520"/>
+            <a:ext cx="1263056" cy="1738448"/>
+          </a:xfrm>
+          <a:prstGeom prst="line">
+            <a:avLst/>
+          </a:prstGeom>
+          <a:noFill/>
+          <a:ln w="9525">
+            <a:solidFill>
+              <a:srgbClr val="E2E8F0"/>
+            </a:solidFill>
+            <a:prstDash val="solid"/>
+          </a:ln>
+        </p:spPr>
+      </p:sp>
+      <p:sp>
+        <p:nvSpPr>
+          <p:cNvPr id="26" name="Shape 23"/>
+          <p:cNvSpPr/>
+          <p:nvPr/>
+        </p:nvSpPr>
+        <p:spPr>
+          <a:xfrm>
+            <a:off x="4069080" y="4965192"/>
+            <a:ext cx="1005840" cy="402336"/>
+          </a:xfrm>
+          <a:prstGeom prst="roundRect">
+            <a:avLst>
+              <a:gd name="adj" fmla="val 11364"/>
+            </a:avLst>
+          </a:prstGeom>
+          <a:solidFill>
+            <a:srgbClr val="F8FAFC"/>
+          </a:solidFill>
+          <a:ln w="9525">
+            <a:solidFill>
+              <a:srgbClr val="4EA5D9"/>
+            </a:solidFill>
+            <a:prstDash val="solid"/>
+          </a:ln>
+        </p:spPr>
+      </p:sp>
+      <p:sp>
+        <p:nvSpPr>
+          <p:cNvPr id="27" name="Text 24"/>
+          <p:cNvSpPr/>
+          <p:nvPr/>
+        </p:nvSpPr>
+        <p:spPr>
+          <a:xfrm>
+            <a:off x="4069080" y="5020056"/>
+            <a:ext cx="1005840" cy="292608"/>
+          </a:xfrm>
+          <a:prstGeom prst="rect">
+            <a:avLst/>
+          </a:prstGeom>
+          <a:noFill/>
+          <a:ln/>
+        </p:spPr>
+        <p:txBody>
+          <a:bodyPr wrap="square" rtlCol="0" anchor="ctr"/>
+          <a:lstStyle/>
+          <a:p>
+            <a:pPr algn="ctr" indent="0" marL="0">
+              <a:buNone/>
+            </a:pPr>
+            <a:r>
+              <a:rPr lang="en-US" sz="650" b="1" dirty="0">
+                <a:solidFill>
+                  <a:srgbClr val="1E293B"/>
+                </a:solidFill>
+                <a:latin typeface="Calibri" pitchFamily="34" charset="0"/>
+                <a:ea typeface="Calibri" pitchFamily="34" charset="-122"/>
+                <a:cs typeface="Calibri" pitchFamily="34" charset="-120"/>
+              </a:rPr>
+              <a:t>Reputation &amp; Social</a:t>
+            </a:r>
+            <a:endParaRPr lang="en-US" sz="650" dirty="0"/>
+          </a:p>
+        </p:txBody>
+      </p:sp>
+      <p:sp>
+        <p:nvSpPr>
+          <p:cNvPr id="28" name="Shape 25"/>
+          <p:cNvSpPr/>
+          <p:nvPr/>
+        </p:nvSpPr>
+        <p:spPr>
+          <a:xfrm>
+            <a:off x="4572000" y="3017520"/>
+            <a:ext cx="0" cy="2148840"/>
+          </a:xfrm>
+          <a:prstGeom prst="line">
+            <a:avLst/>
+          </a:prstGeom>
+          <a:noFill/>
+          <a:ln w="9525">
+            <a:solidFill>
+              <a:srgbClr val="E2E8F0"/>
+            </a:solidFill>
+            <a:prstDash val="solid"/>
+          </a:ln>
+        </p:spPr>
+      </p:sp>
+      <p:sp>
+        <p:nvSpPr>
+          <p:cNvPr id="29" name="Shape 26"/>
+          <p:cNvSpPr/>
+          <p:nvPr/>
+        </p:nvSpPr>
+        <p:spPr>
+          <a:xfrm>
+            <a:off x="2806024" y="4554800"/>
+            <a:ext cx="1005840" cy="402336"/>
+          </a:xfrm>
+          <a:prstGeom prst="roundRect">
+            <a:avLst>
+              <a:gd name="adj" fmla="val 11364"/>
+            </a:avLst>
+          </a:prstGeom>
+          <a:solidFill>
+            <a:srgbClr val="4EA5D9"/>
+          </a:solidFill>
+          <a:ln w="9525">
+            <a:solidFill>
+              <a:srgbClr val="4EA5D9"/>
+            </a:solidFill>
+            <a:prstDash val="solid"/>
+          </a:ln>
+        </p:spPr>
+      </p:sp>
+      <p:sp>
+        <p:nvSpPr>
+          <p:cNvPr id="30" name="Text 27"/>
+          <p:cNvSpPr/>
+          <p:nvPr/>
+        </p:nvSpPr>
+        <p:spPr>
+          <a:xfrm>
+            <a:off x="2806024" y="4609664"/>
+            <a:ext cx="1005840" cy="292608"/>
+          </a:xfrm>
+          <a:prstGeom prst="rect">
+            <a:avLst/>
+          </a:prstGeom>
+          <a:noFill/>
+          <a:ln/>
+        </p:spPr>
+        <p:txBody>
+          <a:bodyPr wrap="square" rtlCol="0" anchor="ctr"/>
+          <a:lstStyle/>
+          <a:p>
+            <a:pPr algn="ctr" indent="0" marL="0">
+              <a:buNone/>
+            </a:pPr>
+            <a:r>
+              <a:rPr lang="en-US" sz="650" b="1" dirty="0">
+                <a:solidFill>
+                  <a:srgbClr val="FFFFFF"/>
+                </a:solidFill>
+                <a:latin typeface="Calibri" pitchFamily="34" charset="0"/>
+                <a:ea typeface="Calibri" pitchFamily="34" charset="-122"/>
+                <a:cs typeface="Calibri" pitchFamily="34" charset="-120"/>
+              </a:rPr>
+              <a:t>Liquidity &amp; Cash</a:t>
+            </a:r>
+            <a:endParaRPr lang="en-US" sz="650" dirty="0"/>
+          </a:p>
+        </p:txBody>
+      </p:sp>
+      <p:sp>
+        <p:nvSpPr>
+          <p:cNvPr id="31" name="Shape 28"/>
+          <p:cNvSpPr/>
+          <p:nvPr/>
+        </p:nvSpPr>
+        <p:spPr>
+          <a:xfrm>
+            <a:off x="4572000" y="3017520"/>
+            <a:ext cx="-1263056" cy="1738448"/>
+          </a:xfrm>
+          <a:prstGeom prst="line">
+            <a:avLst/>
+          </a:prstGeom>
+          <a:noFill/>
+          <a:ln w="9525">
+            <a:solidFill>
+              <a:srgbClr val="E2E8F0"/>
+            </a:solidFill>
+            <a:prstDash val="solid"/>
+          </a:ln>
+        </p:spPr>
+      </p:sp>
+      <p:sp>
+        <p:nvSpPr>
+          <p:cNvPr id="32" name="Shape 29"/>
+          <p:cNvSpPr/>
+          <p:nvPr/>
+        </p:nvSpPr>
+        <p:spPr>
+          <a:xfrm>
+            <a:off x="2025412" y="3480380"/>
+            <a:ext cx="1005840" cy="402336"/>
+          </a:xfrm>
+          <a:prstGeom prst="roundRect">
+            <a:avLst>
+              <a:gd name="adj" fmla="val 11364"/>
+            </a:avLst>
+          </a:prstGeom>
+          <a:solidFill>
+            <a:srgbClr val="F8FAFC"/>
+          </a:solidFill>
+          <a:ln w="9525">
+            <a:solidFill>
+              <a:srgbClr val="4EA5D9"/>
+            </a:solidFill>
+            <a:prstDash val="solid"/>
+          </a:ln>
+        </p:spPr>
+      </p:sp>
+      <p:sp>
+        <p:nvSpPr>
+          <p:cNvPr id="33" name="Text 30"/>
+          <p:cNvSpPr/>
+          <p:nvPr/>
+        </p:nvSpPr>
+        <p:spPr>
+          <a:xfrm>
+            <a:off x="2025412" y="3535244"/>
+            <a:ext cx="1005840" cy="292608"/>
+          </a:xfrm>
+          <a:prstGeom prst="rect">
+            <a:avLst/>
+          </a:prstGeom>
+          <a:noFill/>
+          <a:ln/>
+        </p:spPr>
+        <p:txBody>
+          <a:bodyPr wrap="square" rtlCol="0" anchor="ctr"/>
+          <a:lstStyle/>
+          <a:p>
+            <a:pPr algn="ctr" indent="0" marL="0">
+              <a:buNone/>
+            </a:pPr>
+            <a:r>
+              <a:rPr lang="en-US" sz="650" b="1" dirty="0">
+                <a:solidFill>
+                  <a:srgbClr val="1E293B"/>
+                </a:solidFill>
+                <a:latin typeface="Calibri" pitchFamily="34" charset="0"/>
+                <a:ea typeface="Calibri" pitchFamily="34" charset="-122"/>
+                <a:cs typeface="Calibri" pitchFamily="34" charset="-120"/>
+              </a:rPr>
+              <a:t>Tax Exposure</a:t>
+            </a:r>
+            <a:endParaRPr lang="en-US" sz="650" dirty="0"/>
+          </a:p>
+        </p:txBody>
+      </p:sp>
+      <p:sp>
+        <p:nvSpPr>
+          <p:cNvPr id="34" name="Shape 31"/>
+          <p:cNvSpPr/>
+          <p:nvPr/>
+        </p:nvSpPr>
+        <p:spPr>
+          <a:xfrm>
+            <a:off x="4572000" y="3017520"/>
+            <a:ext cx="-2043668" cy="664028"/>
+          </a:xfrm>
+          <a:prstGeom prst="line">
+            <a:avLst/>
+          </a:prstGeom>
+          <a:noFill/>
+          <a:ln w="9525">
+            <a:solidFill>
+              <a:srgbClr val="E2E8F0"/>
+            </a:solidFill>
+            <a:prstDash val="solid"/>
+          </a:ln>
+        </p:spPr>
+      </p:sp>
+      <p:sp>
+        <p:nvSpPr>
+          <p:cNvPr id="35" name="Shape 32"/>
+          <p:cNvSpPr/>
+          <p:nvPr/>
+        </p:nvSpPr>
+        <p:spPr>
+          <a:xfrm>
+            <a:off x="2025412" y="2152324"/>
+            <a:ext cx="1005840" cy="402336"/>
+          </a:xfrm>
+          <a:prstGeom prst="roundRect">
+            <a:avLst>
+              <a:gd name="adj" fmla="val 11364"/>
+            </a:avLst>
+          </a:prstGeom>
+          <a:solidFill>
+            <a:srgbClr val="4EA5D9"/>
+          </a:solidFill>
+          <a:ln w="9525">
+            <a:solidFill>
+              <a:srgbClr val="4EA5D9"/>
+            </a:solidFill>
+            <a:prstDash val="solid"/>
+          </a:ln>
+        </p:spPr>
+      </p:sp>
+      <p:sp>
+        <p:nvSpPr>
+          <p:cNvPr id="36" name="Text 33"/>
+          <p:cNvSpPr/>
+          <p:nvPr/>
+        </p:nvSpPr>
+        <p:spPr>
+          <a:xfrm>
+            <a:off x="2025412" y="2207188"/>
+            <a:ext cx="1005840" cy="292608"/>
+          </a:xfrm>
+          <a:prstGeom prst="rect">
+            <a:avLst/>
+          </a:prstGeom>
+          <a:noFill/>
+          <a:ln/>
+        </p:spPr>
+        <p:txBody>
+          <a:bodyPr wrap="square" rtlCol="0" anchor="ctr"/>
+          <a:lstStyle/>
+          <a:p>
+            <a:pPr algn="ctr" indent="0" marL="0">
+              <a:buNone/>
+            </a:pPr>
+            <a:r>
+              <a:rPr lang="en-US" sz="650" b="1" dirty="0">
+                <a:solidFill>
+                  <a:srgbClr val="FFFFFF"/>
+                </a:solidFill>
+                <a:latin typeface="Calibri" pitchFamily="34" charset="0"/>
+                <a:ea typeface="Calibri" pitchFamily="34" charset="-122"/>
+                <a:cs typeface="Calibri" pitchFamily="34" charset="-120"/>
+              </a:rPr>
+              <a:t>Estate &amp; Succession</a:t>
+            </a:r>
+            <a:endParaRPr lang="en-US" sz="650" dirty="0"/>
+          </a:p>
+        </p:txBody>
+      </p:sp>
+      <p:sp>
+        <p:nvSpPr>
+          <p:cNvPr id="37" name="Shape 34"/>
+          <p:cNvSpPr/>
+          <p:nvPr/>
+        </p:nvSpPr>
+        <p:spPr>
+          <a:xfrm>
+            <a:off x="4572000" y="3017520"/>
+            <a:ext cx="-2043668" cy="-664028"/>
+          </a:xfrm>
+          <a:prstGeom prst="line">
+            <a:avLst/>
+          </a:prstGeom>
+          <a:noFill/>
+          <a:ln w="9525">
+            <a:solidFill>
+              <a:srgbClr val="E2E8F0"/>
+            </a:solidFill>
+            <a:prstDash val="solid"/>
+          </a:ln>
+        </p:spPr>
+      </p:sp>
+      <p:sp>
+        <p:nvSpPr>
+          <p:cNvPr id="38" name="Shape 35"/>
+          <p:cNvSpPr/>
+          <p:nvPr/>
+        </p:nvSpPr>
+        <p:spPr>
+          <a:xfrm>
+            <a:off x="2806024" y="1077904"/>
+            <a:ext cx="1005840" cy="402336"/>
+          </a:xfrm>
+          <a:prstGeom prst="roundRect">
+            <a:avLst>
+              <a:gd name="adj" fmla="val 11364"/>
+            </a:avLst>
+          </a:prstGeom>
+          <a:solidFill>
+            <a:srgbClr val="F8FAFC"/>
+          </a:solidFill>
+          <a:ln w="9525">
+            <a:solidFill>
+              <a:srgbClr val="4EA5D9"/>
+            </a:solidFill>
+            <a:prstDash val="solid"/>
+          </a:ln>
+        </p:spPr>
+      </p:sp>
+      <p:sp>
+        <p:nvSpPr>
+          <p:cNvPr id="39" name="Text 36"/>
+          <p:cNvSpPr/>
+          <p:nvPr/>
+        </p:nvSpPr>
+        <p:spPr>
+          <a:xfrm>
+            <a:off x="2806024" y="1132768"/>
+            <a:ext cx="1005840" cy="292608"/>
+          </a:xfrm>
+          <a:prstGeom prst="rect">
+            <a:avLst/>
+          </a:prstGeom>
+          <a:noFill/>
+          <a:ln/>
+        </p:spPr>
+        <p:txBody>
+          <a:bodyPr wrap="square" rtlCol="0" anchor="ctr"/>
+          <a:lstStyle/>
+          <a:p>
+            <a:pPr algn="ctr" indent="0" marL="0">
+              <a:buNone/>
+            </a:pPr>
+            <a:r>
+              <a:rPr lang="en-US" sz="650" b="1" dirty="0">
+                <a:solidFill>
+                  <a:srgbClr val="1E293B"/>
+                </a:solidFill>
+                <a:latin typeface="Calibri" pitchFamily="34" charset="0"/>
+                <a:ea typeface="Calibri" pitchFamily="34" charset="-122"/>
+                <a:cs typeface="Calibri" pitchFamily="34" charset="-120"/>
+              </a:rPr>
+              <a:t>Behavioral Resilience</a:t>
+            </a:r>
+            <a:endParaRPr lang="en-US" sz="650" dirty="0"/>
+          </a:p>
+        </p:txBody>
+      </p:sp>
+      <p:sp>
+        <p:nvSpPr>
+          <p:cNvPr id="40" name="Shape 37"/>
+          <p:cNvSpPr/>
+          <p:nvPr/>
+        </p:nvSpPr>
+        <p:spPr>
+          <a:xfrm>
+            <a:off x="4572000" y="3017520"/>
+            <a:ext cx="-1263056" cy="-1738448"/>
+          </a:xfrm>
+          <a:prstGeom prst="line">
+            <a:avLst/>
+          </a:prstGeom>
+          <a:noFill/>
+          <a:ln w="9525">
+            <a:solidFill>
+              <a:srgbClr val="E2E8F0"/>
+            </a:solidFill>
+            <a:prstDash val="solid"/>
+          </a:ln>
+        </p:spPr>
+      </p:sp>
+    </p:spTree>
+  </p:cSld>
+  <p:clrMapOvr>
+    <a:masterClrMapping/>
+  </p:clrMapOvr>
+</p:sld>
+</file>
+
+<file path=ppt/slides/slide9.xml><?xml version="1.0" encoding="utf-8"?>
+<p:sld xmlns:a="http://schemas.openxmlformats.org/drawingml/2006/main" xmlns:r="http://schemas.openxmlformats.org/officeDocument/2006/relationships" xmlns:p="http://schemas.openxmlformats.org/presentationml/2006/main">
+  <p:cSld name="Slide 9">
+    <p:bg>
+      <p:bgPr>
+        <a:solidFill>
+          <a:srgbClr val="FFFFFF"/>
+        </a:solidFill>
+      </p:bgPr>
+    </p:bg>
+    <p:spTree>
+      <p:nvGrpSpPr>
+        <p:cNvPr id="1" name=""/>
+        <p:cNvGrpSpPr/>
+        <p:nvPr/>
+      </p:nvGrpSpPr>
+      <p:grpSpPr>
+        <a:xfrm>
+          <a:off x="0" y="0"/>
+          <a:ext cx="0" cy="0"/>
+          <a:chOff x="0" y="0"/>
+          <a:chExt cx="0" cy="0"/>
+        </a:xfrm>
+      </p:grpSpPr>
+      <p:sp>
+        <p:nvSpPr>
+          <p:cNvPr id="2" name="Shape 0"/>
+          <p:cNvSpPr/>
+          <p:nvPr/>
+        </p:nvSpPr>
+        <p:spPr>
+          <a:xfrm>
+            <a:off x="0" y="0"/>
+            <a:ext cx="9144000" cy="73152"/>
+          </a:xfrm>
+          <a:prstGeom prst="rect">
+            <a:avLst/>
+          </a:prstGeom>
+          <a:solidFill>
+            <a:srgbClr val="4EA5D9"/>
+          </a:solidFill>
+          <a:ln w="12700">
+            <a:solidFill>
+              <a:srgbClr val="4EA5D9"/>
+            </a:solidFill>
+            <a:prstDash val="solid"/>
+          </a:ln>
+        </p:spPr>
+      </p:sp>
+      <p:sp>
+        <p:nvSpPr>
+          <p:cNvPr id="3" name="Shape 1"/>
+          <p:cNvSpPr/>
+          <p:nvPr/>
+        </p:nvSpPr>
+        <p:spPr>
+          <a:xfrm>
+            <a:off x="320040" y="502920"/>
+            <a:ext cx="54864" cy="502920"/>
+          </a:xfrm>
+          <a:prstGeom prst="rect">
+            <a:avLst/>
+          </a:prstGeom>
+          <a:solidFill>
+            <a:srgbClr val="D97706"/>
+          </a:solidFill>
+          <a:ln w="12700">
+            <a:solidFill>
+              <a:srgbClr val="D97706"/>
+            </a:solidFill>
+            <a:prstDash val="solid"/>
+          </a:ln>
+        </p:spPr>
+      </p:sp>
+      <p:sp>
+        <p:nvSpPr>
+          <p:cNvPr id="4" name="Text 2"/>
+          <p:cNvSpPr/>
+          <p:nvPr/>
+        </p:nvSpPr>
+        <p:spPr>
+          <a:xfrm>
+            <a:off x="502920" y="411480"/>
+            <a:ext cx="8138160" cy="685800"/>
+          </a:xfrm>
+          <a:prstGeom prst="rect">
+            <a:avLst/>
+          </a:prstGeom>
+          <a:noFill/>
+          <a:ln/>
+        </p:spPr>
+        <p:txBody>
+          <a:bodyPr wrap="square" rtlCol="0" anchor="t"/>
+          <a:lstStyle/>
+          <a:p>
+            <a:pPr indent="0" marL="0">
+              <a:buNone/>
+            </a:pPr>
+            <a:r>
+              <a:rPr lang="en-US" sz="2800" b="1" dirty="0">
+                <a:solidFill>
+                  <a:srgbClr val="1E293B"/>
+                </a:solidFill>
+                <a:latin typeface="Calibri Light" pitchFamily="34" charset="0"/>
+                <a:ea typeface="Calibri Light" pitchFamily="34" charset="-122"/>
+                <a:cs typeface="Calibri Light" pitchFamily="34" charset="-120"/>
+              </a:rPr>
+              <a:t>Professional Workflow</a:t>
+            </a:r>
+            <a:endParaRPr lang="en-US" sz="2800" dirty="0"/>
+          </a:p>
+        </p:txBody>
+      </p:sp>
+      <p:sp>
+        <p:nvSpPr>
+          <p:cNvPr id="5" name="Shape 3"/>
+          <p:cNvSpPr/>
+          <p:nvPr/>
+        </p:nvSpPr>
+        <p:spPr>
+          <a:xfrm>
+            <a:off x="0" y="4709160"/>
+            <a:ext cx="9144000" cy="320040"/>
+          </a:xfrm>
+          <a:prstGeom prst="rect">
+            <a:avLst/>
+          </a:prstGeom>
+          <a:solidFill>
+            <a:srgbClr val="F8FAFC"/>
+          </a:solidFill>
+          <a:ln w="12700">
+            <a:solidFill>
+              <a:srgbClr val="F8FAFC"/>
+            </a:solidFill>
+            <a:prstDash val="solid"/>
+          </a:ln>
+        </p:spPr>
+      </p:sp>
+      <p:pic>
+        <p:nvPicPr>
+          <p:cNvPr id="6" name="Image 0" descr="/Users/bwoodtalton/Projects/AkiliRisk/logo/akili-horizontal-compact.png">    </p:cNvPr>
+          <p:cNvPicPr>
+            <a:picLocks noChangeAspect="1"/>
+          </p:cNvPicPr>
+          <p:nvPr/>
+        </p:nvPicPr>
+        <p:blipFill>
+          <a:blip r:embed="rId1"/>
+          <a:stretch>
+            <a:fillRect/>
+          </a:stretch>
+        </p:blipFill>
+        <p:spPr>
+          <a:xfrm>
+            <a:off x="320040" y="4754880"/>
+            <a:ext cx="1234440" cy="256032"/>
+          </a:xfrm>
+          <a:prstGeom prst="rect">
+            <a:avLst/>
+          </a:prstGeom>
+        </p:spPr>
+      </p:pic>
+      <p:sp>
+        <p:nvSpPr>
+          <p:cNvPr id="7" name="Text 4"/>
+          <p:cNvSpPr/>
+          <p:nvPr/>
+        </p:nvSpPr>
+        <p:spPr>
+          <a:xfrm>
+            <a:off x="7498080" y="4773168"/>
+            <a:ext cx="1280160" cy="228600"/>
+          </a:xfrm>
+          <a:prstGeom prst="rect">
+            <a:avLst/>
+          </a:prstGeom>
+          <a:noFill/>
+          <a:ln/>
+        </p:spPr>
+        <p:txBody>
+          <a:bodyPr wrap="square" rtlCol="0" anchor="ctr"/>
+          <a:lstStyle/>
+          <a:p>
+            <a:pPr algn="r" indent="0" marL="0">
+              <a:buNone/>
+            </a:pPr>
+            <a:r>
+              <a:rPr lang="en-US" sz="900" dirty="0">
+                <a:solidFill>
+                  <a:srgbClr val="64748B"/>
+                </a:solidFill>
+                <a:latin typeface="Calibri" pitchFamily="34" charset="0"/>
+                <a:ea typeface="Calibri" pitchFamily="34" charset="-122"/>
+                <a:cs typeface="Calibri" pitchFamily="34" charset="-120"/>
+              </a:rPr>
+              <a:t>akilirisk.com</a:t>
+            </a:r>
+            <a:endParaRPr lang="en-US" sz="900" dirty="0"/>
+          </a:p>
+        </p:txBody>
+      </p:sp>
       <p:graphicFrame>
         <p:nvGraphicFramePr>
-          <p:cNvPr id="9" name="Table 0"/>
+          <p:cNvPr id="10" name="Table 0"/>
           <p:cNvGraphicFramePr>
             <a:graphicFrameLocks noGrp="1"/>
           </p:cNvGraphicFramePr>
@@ -11704,7 +12890,7 @@
                           <a:ea typeface="Calibri" pitchFamily="34" charset="-122"/>
                           <a:cs typeface="Calibri" pitchFamily="34" charset="-120"/>
                         </a:rPr>
-                        <a:t>Audio intake + transcription; advisor review</a:t>
+                        <a:t>Audio intake + transcription; firm review</a:t>
                       </a:r>
                       <a:endParaRPr lang="en-US" sz="1000" dirty="0">
                         <a:latin typeface="Calibri" charset="0"/>
@@ -12188,6 +13374,144 @@
                           <a:ea typeface="Calibri" pitchFamily="34" charset="-122"/>
                           <a:cs typeface="Calibri" pitchFamily="34" charset="-120"/>
                         </a:rPr>
+                        <a:t>Improve</a:t>
+                      </a:r>
+                      <a:endParaRPr lang="en-US" sz="1000" dirty="0">
+                        <a:latin typeface="Calibri" charset="0"/>
+                        <a:ea typeface="Calibri" charset="0"/>
+                        <a:cs typeface="Calibri" charset="0"/>
+                      </a:endParaRPr>
+                    </a:p>
+                  </a:txBody>
+                  <a:tcPr marL="91440" marR="91440" marT="45720" marB="45720" anchor="t">
+                    <a:lnL w="6350" cap="flat" cmpd="sng" algn="ctr">
+                      <a:solidFill>
+                        <a:srgbClr val="E2E8F0"/>
+                      </a:solidFill>
+                      <a:prstDash val="solid"/>
+                      <a:round/>
+                      <a:headEnd type="none" w="med" len="med"/>
+                      <a:tailEnd type="none" w="med" len="med"/>
+                    </a:lnL>
+                    <a:lnR w="6350" cap="flat" cmpd="sng" algn="ctr">
+                      <a:solidFill>
+                        <a:srgbClr val="E2E8F0"/>
+                      </a:solidFill>
+                      <a:prstDash val="solid"/>
+                      <a:round/>
+                      <a:headEnd type="none" w="med" len="med"/>
+                      <a:tailEnd type="none" w="med" len="med"/>
+                    </a:lnR>
+                    <a:lnT w="6350" cap="flat" cmpd="sng" algn="ctr">
+                      <a:solidFill>
+                        <a:srgbClr val="E2E8F0"/>
+                      </a:solidFill>
+                      <a:prstDash val="solid"/>
+                      <a:round/>
+                      <a:headEnd type="none" w="med" len="med"/>
+                      <a:tailEnd type="none" w="med" len="med"/>
+                    </a:lnT>
+                    <a:lnB w="6350" cap="flat" cmpd="sng" algn="ctr">
+                      <a:solidFill>
+                        <a:srgbClr val="E2E8F0"/>
+                      </a:solidFill>
+                      <a:prstDash val="solid"/>
+                      <a:round/>
+                      <a:headEnd type="none" w="med" len="med"/>
+                      <a:tailEnd type="none" w="med" len="med"/>
+                    </a:lnB>
+                    <a:solidFill>
+                      <a:srgbClr val="FFFFFF"/>
+                    </a:solidFill>
+                  </a:tcPr>
+                </a:tc>
+                <a:tc>
+                  <a:txBody>
+                    <a:bodyPr/>
+                    <a:lstStyle/>
+                    <a:p>
+                      <a:pPr indent="0" marL="0">
+                        <a:buNone/>
+                      </a:pPr>
+                      <a:r>
+                        <a:rPr lang="en-US" sz="1000" dirty="0">
+                          <a:solidFill>
+                            <a:srgbClr val="1E293B"/>
+                          </a:solidFill>
+                          <a:latin typeface="Calibri" pitchFamily="34" charset="0"/>
+                          <a:ea typeface="Calibri" pitchFamily="34" charset="-122"/>
+                          <a:cs typeface="Calibri" pitchFamily="34" charset="-120"/>
+                        </a:rPr>
+                        <a:t>Action plans, tracking, reassessment with score deltas</a:t>
+                      </a:r>
+                      <a:endParaRPr lang="en-US" sz="1000" dirty="0">
+                        <a:latin typeface="Calibri" charset="0"/>
+                        <a:ea typeface="Calibri" charset="0"/>
+                        <a:cs typeface="Calibri" charset="0"/>
+                      </a:endParaRPr>
+                    </a:p>
+                  </a:txBody>
+                  <a:tcPr marL="91440" marR="91440" marT="45720" marB="45720" anchor="t">
+                    <a:lnL w="6350" cap="flat" cmpd="sng" algn="ctr">
+                      <a:solidFill>
+                        <a:srgbClr val="E2E8F0"/>
+                      </a:solidFill>
+                      <a:prstDash val="solid"/>
+                      <a:round/>
+                      <a:headEnd type="none" w="med" len="med"/>
+                      <a:tailEnd type="none" w="med" len="med"/>
+                    </a:lnL>
+                    <a:lnR w="6350" cap="flat" cmpd="sng" algn="ctr">
+                      <a:solidFill>
+                        <a:srgbClr val="E2E8F0"/>
+                      </a:solidFill>
+                      <a:prstDash val="solid"/>
+                      <a:round/>
+                      <a:headEnd type="none" w="med" len="med"/>
+                      <a:tailEnd type="none" w="med" len="med"/>
+                    </a:lnR>
+                    <a:lnT w="6350" cap="flat" cmpd="sng" algn="ctr">
+                      <a:solidFill>
+                        <a:srgbClr val="E2E8F0"/>
+                      </a:solidFill>
+                      <a:prstDash val="solid"/>
+                      <a:round/>
+                      <a:headEnd type="none" w="med" len="med"/>
+                      <a:tailEnd type="none" w="med" len="med"/>
+                    </a:lnT>
+                    <a:lnB w="6350" cap="flat" cmpd="sng" algn="ctr">
+                      <a:solidFill>
+                        <a:srgbClr val="E2E8F0"/>
+                      </a:solidFill>
+                      <a:prstDash val="solid"/>
+                      <a:round/>
+                      <a:headEnd type="none" w="med" len="med"/>
+                      <a:tailEnd type="none" w="med" len="med"/>
+                    </a:lnB>
+                    <a:solidFill>
+                      <a:srgbClr val="FFFFFF"/>
+                    </a:solidFill>
+                  </a:tcPr>
+                </a:tc>
+              </a:tr>
+              <a:tr h="0">
+                <a:tc>
+                  <a:txBody>
+                    <a:bodyPr/>
+                    <a:lstStyle/>
+                    <a:p>
+                      <a:pPr indent="0" marL="0">
+                        <a:buNone/>
+                      </a:pPr>
+                      <a:r>
+                        <a:rPr lang="en-US" sz="1000" dirty="0">
+                          <a:solidFill>
+                            <a:srgbClr val="1E293B"/>
+                          </a:solidFill>
+                          <a:latin typeface="Calibri" pitchFamily="34" charset="0"/>
+                          <a:ea typeface="Calibri" pitchFamily="34" charset="-122"/>
+                          <a:cs typeface="Calibri" pitchFamily="34" charset="-120"/>
+                        </a:rPr>
                         <a:t>Manage</a:t>
                       </a:r>
                       <a:endParaRPr lang="en-US" sz="1000" dirty="0">
@@ -12235,7 +13559,7 @@
                       <a:tailEnd type="none" w="med" len="med"/>
                     </a:lnB>
                     <a:solidFill>
-                      <a:srgbClr val="FFFFFF"/>
+                      <a:srgbClr val="F8FAFC"/>
                     </a:solidFill>
                   </a:tcPr>
                 </a:tc>
@@ -12303,7 +13627,7 @@
                       <a:tailEnd type="none" w="med" len="med"/>
                     </a:lnB>
                     <a:solidFill>
-                      <a:srgbClr val="FFFFFF"/>
+                      <a:srgbClr val="F8FAFC"/>
                     </a:solidFill>
                   </a:tcPr>
                 </a:tc>
@@ -12312,363 +13636,6 @@
           </a:graphicData>
         </a:graphic>
       </p:graphicFrame>
-    </p:spTree>
-  </p:cSld>
-  <p:clrMapOvr>
-    <a:masterClrMapping/>
-  </p:clrMapOvr>
-</p:sld>
-</file>
-
-<file path=ppt/slides/slide9.xml><?xml version="1.0" encoding="utf-8"?>
-<p:sld xmlns:a="http://schemas.openxmlformats.org/drawingml/2006/main" xmlns:r="http://schemas.openxmlformats.org/officeDocument/2006/relationships" xmlns:p="http://schemas.openxmlformats.org/presentationml/2006/main">
-  <p:cSld name="Slide 9">
-    <p:bg>
-      <p:bgPr>
-        <a:solidFill>
-          <a:srgbClr val="FFFFFF"/>
-        </a:solidFill>
-      </p:bgPr>
-    </p:bg>
-    <p:spTree>
-      <p:nvGrpSpPr>
-        <p:cNvPr id="1" name=""/>
-        <p:cNvGrpSpPr/>
-        <p:nvPr/>
-      </p:nvGrpSpPr>
-      <p:grpSpPr>
-        <a:xfrm>
-          <a:off x="0" y="0"/>
-          <a:ext cx="0" cy="0"/>
-          <a:chOff x="0" y="0"/>
-          <a:chExt cx="0" cy="0"/>
-        </a:xfrm>
-      </p:grpSpPr>
-      <p:sp>
-        <p:nvSpPr>
-          <p:cNvPr id="2" name="Shape 0"/>
-          <p:cNvSpPr/>
-          <p:nvPr/>
-        </p:nvSpPr>
-        <p:spPr>
-          <a:xfrm>
-            <a:off x="0" y="0"/>
-            <a:ext cx="9144000" cy="73152"/>
-          </a:xfrm>
-          <a:prstGeom prst="rect">
-            <a:avLst/>
-          </a:prstGeom>
-          <a:solidFill>
-            <a:srgbClr val="4EA5D9"/>
-          </a:solidFill>
-          <a:ln w="12700">
-            <a:solidFill>
-              <a:srgbClr val="4EA5D9"/>
-            </a:solidFill>
-            <a:prstDash val="solid"/>
-          </a:ln>
-        </p:spPr>
-      </p:sp>
-      <p:sp>
-        <p:nvSpPr>
-          <p:cNvPr id="3" name="Shape 1"/>
-          <p:cNvSpPr/>
-          <p:nvPr/>
-        </p:nvSpPr>
-        <p:spPr>
-          <a:xfrm>
-            <a:off x="320040" y="502920"/>
-            <a:ext cx="54864" cy="502920"/>
-          </a:xfrm>
-          <a:prstGeom prst="rect">
-            <a:avLst/>
-          </a:prstGeom>
-          <a:solidFill>
-            <a:srgbClr val="D97706"/>
-          </a:solidFill>
-          <a:ln w="12700">
-            <a:solidFill>
-              <a:srgbClr val="D97706"/>
-            </a:solidFill>
-            <a:prstDash val="solid"/>
-          </a:ln>
-        </p:spPr>
-      </p:sp>
-      <p:sp>
-        <p:nvSpPr>
-          <p:cNvPr id="4" name="Text 2"/>
-          <p:cNvSpPr/>
-          <p:nvPr/>
-        </p:nvSpPr>
-        <p:spPr>
-          <a:xfrm>
-            <a:off x="502920" y="411480"/>
-            <a:ext cx="8138160" cy="685800"/>
-          </a:xfrm>
-          <a:prstGeom prst="rect">
-            <a:avLst/>
-          </a:prstGeom>
-          <a:noFill/>
-          <a:ln/>
-        </p:spPr>
-        <p:txBody>
-          <a:bodyPr wrap="square" rtlCol="0" anchor="t"/>
-          <a:lstStyle/>
-          <a:p>
-            <a:pPr indent="0" marL="0">
-              <a:buNone/>
-            </a:pPr>
-            <a:r>
-              <a:rPr lang="en-US" sz="2800" b="1" dirty="0">
-                <a:solidFill>
-                  <a:srgbClr val="1E293B"/>
-                </a:solidFill>
-                <a:latin typeface="Calibri Light" pitchFamily="34" charset="0"/>
-                <a:ea typeface="Calibri Light" pitchFamily="34" charset="-122"/>
-                <a:cs typeface="Calibri Light" pitchFamily="34" charset="-120"/>
-              </a:rPr>
-              <a:t>Intelligence &amp; Deliverables</a:t>
-            </a:r>
-            <a:endParaRPr lang="en-US" sz="2800" dirty="0"/>
-          </a:p>
-        </p:txBody>
-      </p:sp>
-      <p:sp>
-        <p:nvSpPr>
-          <p:cNvPr id="5" name="Shape 3"/>
-          <p:cNvSpPr/>
-          <p:nvPr/>
-        </p:nvSpPr>
-        <p:spPr>
-          <a:xfrm>
-            <a:off x="0" y="4709160"/>
-            <a:ext cx="9144000" cy="320040"/>
-          </a:xfrm>
-          <a:prstGeom prst="rect">
-            <a:avLst/>
-          </a:prstGeom>
-          <a:solidFill>
-            <a:srgbClr val="F8FAFC"/>
-          </a:solidFill>
-          <a:ln w="12700">
-            <a:solidFill>
-              <a:srgbClr val="F8FAFC"/>
-            </a:solidFill>
-            <a:prstDash val="solid"/>
-          </a:ln>
-        </p:spPr>
-      </p:sp>
-      <p:pic>
-        <p:nvPicPr>
-          <p:cNvPr id="6" name="Image 0" descr="/Users/bwoodtalton/Projects/AkiliRisk/logo/akili-horizontal-compact.png">    </p:cNvPr>
-          <p:cNvPicPr>
-            <a:picLocks noChangeAspect="1"/>
-          </p:cNvPicPr>
-          <p:nvPr/>
-        </p:nvPicPr>
-        <p:blipFill>
-          <a:blip r:embed="rId1"/>
-          <a:stretch>
-            <a:fillRect/>
-          </a:stretch>
-        </p:blipFill>
-        <p:spPr>
-          <a:xfrm>
-            <a:off x="320040" y="4754880"/>
-            <a:ext cx="1234440" cy="256032"/>
-          </a:xfrm>
-          <a:prstGeom prst="rect">
-            <a:avLst/>
-          </a:prstGeom>
-        </p:spPr>
-      </p:pic>
-      <p:sp>
-        <p:nvSpPr>
-          <p:cNvPr id="7" name="Text 4"/>
-          <p:cNvSpPr/>
-          <p:nvPr/>
-        </p:nvSpPr>
-        <p:spPr>
-          <a:xfrm>
-            <a:off x="7498080" y="4773168"/>
-            <a:ext cx="1280160" cy="228600"/>
-          </a:xfrm>
-          <a:prstGeom prst="rect">
-            <a:avLst/>
-          </a:prstGeom>
-          <a:noFill/>
-          <a:ln/>
-        </p:spPr>
-        <p:txBody>
-          <a:bodyPr wrap="square" rtlCol="0" anchor="ctr"/>
-          <a:lstStyle/>
-          <a:p>
-            <a:pPr algn="r" indent="0" marL="0">
-              <a:buNone/>
-            </a:pPr>
-            <a:r>
-              <a:rPr lang="en-US" sz="900" dirty="0">
-                <a:solidFill>
-                  <a:srgbClr val="64748B"/>
-                </a:solidFill>
-                <a:latin typeface="Calibri" pitchFamily="34" charset="0"/>
-                <a:ea typeface="Calibri" pitchFamily="34" charset="-122"/>
-                <a:cs typeface="Calibri" pitchFamily="34" charset="-120"/>
-              </a:rPr>
-              <a:t>akilirisk.com</a:t>
-            </a:r>
-            <a:endParaRPr lang="en-US" sz="900" dirty="0"/>
-          </a:p>
-        </p:txBody>
-      </p:sp>
-      <p:sp>
-        <p:nvSpPr>
-          <p:cNvPr id="8" name="Text 5"/>
-          <p:cNvSpPr/>
-          <p:nvPr/>
-        </p:nvSpPr>
-        <p:spPr>
-          <a:xfrm>
-            <a:off x="502920" y="1508760"/>
-            <a:ext cx="8138160" cy="3520440"/>
-          </a:xfrm>
-          <a:prstGeom prst="rect">
-            <a:avLst/>
-          </a:prstGeom>
-          <a:noFill/>
-          <a:ln/>
-        </p:spPr>
-        <p:txBody>
-          <a:bodyPr wrap="square" rtlCol="0" anchor="t"/>
-          <a:lstStyle/>
-          <a:p>
-            <a:pPr marL="342900" indent="-342900">
-              <a:spcAft>
-                <a:spcPts val="800"/>
-              </a:spcAft>
-              <a:buSzPct val="100000"/>
-              <a:buChar char="•"/>
-            </a:pPr>
-            <a:r>
-              <a:rPr lang="en-US" sz="1500" dirty="0">
-                <a:solidFill>
-                  <a:srgbClr val="1E293B"/>
-                </a:solidFill>
-                <a:latin typeface="Calibri" pitchFamily="34" charset="0"/>
-                <a:ea typeface="Calibri" pitchFamily="34" charset="-122"/>
-                <a:cs typeface="Calibri" pitchFamily="34" charset="-120"/>
-              </a:rPr>
-              <a:t>Composite risk score (0–10) across all 10 pillars</a:t>
-            </a:r>
-            <a:endParaRPr lang="en-US" sz="1500" dirty="0"/>
-          </a:p>
-          <a:p>
-            <a:pPr marL="342900" indent="-342900">
-              <a:spcAft>
-                <a:spcPts val="800"/>
-              </a:spcAft>
-              <a:buSzPct val="100000"/>
-              <a:buChar char="•"/>
-            </a:pPr>
-            <a:r>
-              <a:rPr lang="en-US" sz="1500" dirty="0">
-                <a:solidFill>
-                  <a:srgbClr val="1E293B"/>
-                </a:solidFill>
-                <a:latin typeface="Calibri" pitchFamily="34" charset="0"/>
-                <a:ea typeface="Calibri" pitchFamily="34" charset="-122"/>
-                <a:cs typeface="Calibri" pitchFamily="34" charset="-120"/>
-              </a:rPr>
-              <a:t>Risk heat map with trend tracking</a:t>
-            </a:r>
-            <a:endParaRPr lang="en-US" sz="1500" dirty="0"/>
-          </a:p>
-          <a:p>
-            <a:pPr marL="342900" indent="-342900">
-              <a:spcAft>
-                <a:spcPts val="800"/>
-              </a:spcAft>
-              <a:buSzPct val="100000"/>
-              <a:buChar char="•"/>
-            </a:pPr>
-            <a:r>
-              <a:rPr lang="en-US" sz="1500" dirty="0">
-                <a:solidFill>
-                  <a:srgbClr val="1E293B"/>
-                </a:solidFill>
-                <a:latin typeface="Calibri" pitchFamily="34" charset="0"/>
-                <a:ea typeface="Calibri" pitchFamily="34" charset="-122"/>
-                <a:cs typeface="Calibri" pitchFamily="34" charset="-120"/>
-              </a:rPr>
-              <a:t>Missing controls ranked by severity</a:t>
-            </a:r>
-            <a:endParaRPr lang="en-US" sz="1500" dirty="0"/>
-          </a:p>
-          <a:p>
-            <a:pPr marL="342900" indent="-342900">
-              <a:spcAft>
-                <a:spcPts val="800"/>
-              </a:spcAft>
-              <a:buSzPct val="100000"/>
-              <a:buChar char="•"/>
-            </a:pPr>
-            <a:r>
-              <a:rPr lang="en-US" sz="1500" dirty="0">
-                <a:solidFill>
-                  <a:srgbClr val="1E293B"/>
-                </a:solidFill>
-                <a:latin typeface="Calibri" pitchFamily="34" charset="0"/>
-                <a:ea typeface="Calibri" pitchFamily="34" charset="-122"/>
-                <a:cs typeface="Calibri" pitchFamily="34" charset="-120"/>
-              </a:rPr>
-              <a:t>Automated recommendations mapped to services</a:t>
-            </a:r>
-            <a:endParaRPr lang="en-US" sz="1500" dirty="0"/>
-          </a:p>
-          <a:p>
-            <a:pPr marL="342900" indent="-342900">
-              <a:spcAft>
-                <a:spcPts val="800"/>
-              </a:spcAft>
-              <a:buSzPct val="100000"/>
-              <a:buChar char="•"/>
-            </a:pPr>
-            <a:r>
-              <a:rPr lang="en-US" sz="1500" dirty="0">
-                <a:solidFill>
-                  <a:srgbClr val="1E293B"/>
-                </a:solidFill>
-                <a:latin typeface="Calibri" pitchFamily="34" charset="0"/>
-                <a:ea typeface="Calibri" pitchFamily="34" charset="-122"/>
-                <a:cs typeface="Calibri" pitchFamily="34" charset="-120"/>
-              </a:rPr>
-              <a:t>Policy templates &amp; branded PDF reports</a:t>
-            </a:r>
-            <a:endParaRPr lang="en-US" sz="1500" dirty="0"/>
-          </a:p>
-          <a:p>
-            <a:pPr marL="342900" indent="-342900">
-              <a:spcAft>
-                <a:spcPts val="800"/>
-              </a:spcAft>
-              <a:buSzPct val="100000"/>
-              <a:buChar char="•"/>
-            </a:pPr>
-            <a:r>
-              <a:rPr lang="en-US" sz="1500" dirty="0">
-                <a:solidFill>
-                  <a:srgbClr val="1E293B"/>
-                </a:solidFill>
-                <a:latin typeface="Calibri" pitchFamily="34" charset="0"/>
-                <a:ea typeface="Calibri" pitchFamily="34" charset="-122"/>
-                <a:cs typeface="Calibri" pitchFamily="34" charset="-120"/>
-              </a:rPr>
-              <a:t>AI-assisted intake: audio + transcription</a:t>
-            </a:r>
-            <a:endParaRPr lang="en-US" sz="1500" dirty="0"/>
-          </a:p>
-        </p:txBody>
-      </p:sp>
     </p:spTree>
   </p:cSld>
   <p:clrMapOvr>
